--- a/ppt/GopiKrishnan_X25112627_marine-vessel-monitoring.pptx
+++ b/ppt/GopiKrishnan_X25112627_marine-vessel-monitoring.pptx
@@ -1163,7 +1163,7 @@
           <a:bodyPr wrap="square" rtlCol="0" anchor="t"/>
           <a:lstStyle/>
           <a:p>
-            <a:pPr algn="l" indent="0" marL="0">
+            <a:pPr indent="0" marL="0">
               <a:buNone/>
             </a:pPr>
             <a:r>
@@ -1314,7 +1314,7 @@
               <a:buNone/>
             </a:pPr>
             <a:r>
-              <a:rPr lang="en-US" sz="1400" b="1" dirty="0">
+              <a:rPr lang="en-US" sz="1350" b="1" dirty="0">
                 <a:solidFill>
                   <a:srgbClr val="E5A83C"/>
                 </a:solidFill>
@@ -1324,7 +1324,7 @@
               </a:rPr>
               <a:t>Engine &gt; 75 °C</a:t>
             </a:r>
-            <a:endParaRPr lang="en-US" sz="1400" dirty="0"/>
+            <a:endParaRPr lang="en-US" sz="1350" dirty="0"/>
           </a:p>
         </p:txBody>
       </p:sp>
@@ -1380,7 +1380,7 @@
               <a:buNone/>
             </a:pPr>
             <a:r>
-              <a:rPr lang="en-US" sz="1400" b="1" dirty="0">
+              <a:rPr lang="en-US" sz="1350" b="1" dirty="0">
                 <a:solidFill>
                   <a:srgbClr val="E5A83C"/>
                 </a:solidFill>
@@ -1390,7 +1390,7 @@
               </a:rPr>
               <a:t>Fuel burn &gt; 350 L/h</a:t>
             </a:r>
-            <a:endParaRPr lang="en-US" sz="1400" dirty="0"/>
+            <a:endParaRPr lang="en-US" sz="1350" dirty="0"/>
           </a:p>
         </p:txBody>
       </p:sp>
@@ -1446,7 +1446,7 @@
               <a:buNone/>
             </a:pPr>
             <a:r>
-              <a:rPr lang="en-US" sz="1400" b="1" dirty="0">
+              <a:rPr lang="en-US" sz="1350" b="1" dirty="0">
                 <a:solidFill>
                   <a:srgbClr val="E5A83C"/>
                 </a:solidFill>
@@ -1456,7 +1456,7 @@
               </a:rPr>
               <a:t>Hull peak &gt; 15 mm/s</a:t>
             </a:r>
-            <a:endParaRPr lang="en-US" sz="1400" dirty="0"/>
+            <a:endParaRPr lang="en-US" sz="1350" dirty="0"/>
           </a:p>
         </p:txBody>
       </p:sp>
@@ -1578,12 +1578,12 @@
         </p:nvSpPr>
         <p:spPr>
           <a:xfrm>
-            <a:off x="640080" y="2468880"/>
-            <a:ext cx="1572768" cy="1371600"/>
+            <a:off x="640080" y="1874520"/>
+            <a:ext cx="2286000" cy="1280160"/>
           </a:xfrm>
           <a:prstGeom prst="roundRect">
             <a:avLst>
-              <a:gd name="adj" fmla="val 6667"/>
+              <a:gd name="adj" fmla="val 7143"/>
             </a:avLst>
           </a:prstGeom>
           <a:solidFill>
@@ -1605,8 +1605,8 @@
         </p:nvSpPr>
         <p:spPr>
           <a:xfrm>
-            <a:off x="1325880" y="2670048"/>
-            <a:ext cx="201168" cy="201168"/>
+            <a:off x="1691640" y="2039112"/>
+            <a:ext cx="182880" cy="182880"/>
           </a:xfrm>
           <a:prstGeom prst="ellipse">
             <a:avLst/>
@@ -1625,8 +1625,8 @@
         </p:nvSpPr>
         <p:spPr>
           <a:xfrm>
-            <a:off x="594360" y="2926080"/>
-            <a:ext cx="1664208" cy="411480"/>
+            <a:off x="612648" y="2258568"/>
+            <a:ext cx="2340864" cy="365760"/>
           </a:xfrm>
           <a:prstGeom prst="rect">
             <a:avLst/>
@@ -1664,8 +1664,8 @@
         </p:nvSpPr>
         <p:spPr>
           <a:xfrm>
-            <a:off x="621792" y="3310128"/>
-            <a:ext cx="1609344" cy="457200"/>
+            <a:off x="640080" y="2606040"/>
+            <a:ext cx="2286000" cy="411480"/>
           </a:xfrm>
           <a:prstGeom prst="rect">
             <a:avLst/>
@@ -1703,8 +1703,8 @@
         </p:nvSpPr>
         <p:spPr>
           <a:xfrm>
-            <a:off x="2231136" y="3154680"/>
-            <a:ext cx="258409" cy="0"/>
+            <a:off x="2944368" y="2514600"/>
+            <a:ext cx="1975104" cy="0"/>
           </a:xfrm>
           <a:prstGeom prst="line">
             <a:avLst/>
@@ -1715,6 +1715,7 @@
               <a:srgbClr val="4F98C0"/>
             </a:solidFill>
             <a:prstDash val="solid"/>
+            <a:headEnd type="none"/>
             <a:tailEnd type="triangle"/>
           </a:ln>
         </p:spPr>
@@ -1727,12 +1728,12 @@
         </p:nvSpPr>
         <p:spPr>
           <a:xfrm>
-            <a:off x="2507833" y="2468880"/>
-            <a:ext cx="1572768" cy="1371600"/>
+            <a:off x="4937760" y="1874520"/>
+            <a:ext cx="2286000" cy="1280160"/>
           </a:xfrm>
           <a:prstGeom prst="roundRect">
             <a:avLst>
-              <a:gd name="adj" fmla="val 6667"/>
+              <a:gd name="adj" fmla="val 7143"/>
             </a:avLst>
           </a:prstGeom>
           <a:solidFill>
@@ -1754,8 +1755,8 @@
         </p:nvSpPr>
         <p:spPr>
           <a:xfrm>
-            <a:off x="3193633" y="2670048"/>
-            <a:ext cx="201168" cy="201168"/>
+            <a:off x="5989320" y="2039112"/>
+            <a:ext cx="182880" cy="182880"/>
           </a:xfrm>
           <a:prstGeom prst="ellipse">
             <a:avLst/>
@@ -1774,8 +1775,8 @@
         </p:nvSpPr>
         <p:spPr>
           <a:xfrm>
-            <a:off x="2462113" y="2926080"/>
-            <a:ext cx="1664208" cy="411480"/>
+            <a:off x="4910328" y="2258568"/>
+            <a:ext cx="2340864" cy="365760"/>
           </a:xfrm>
           <a:prstGeom prst="rect">
             <a:avLst/>
@@ -1813,8 +1814,8 @@
         </p:nvSpPr>
         <p:spPr>
           <a:xfrm>
-            <a:off x="2489545" y="3310128"/>
-            <a:ext cx="1609344" cy="457200"/>
+            <a:off x="4937760" y="2606040"/>
+            <a:ext cx="2286000" cy="411480"/>
           </a:xfrm>
           <a:prstGeom prst="rect">
             <a:avLst/>
@@ -1852,8 +1853,8 @@
         </p:nvSpPr>
         <p:spPr>
           <a:xfrm>
-            <a:off x="4098889" y="3154680"/>
-            <a:ext cx="258409" cy="0"/>
+            <a:off x="7242048" y="2514600"/>
+            <a:ext cx="1975104" cy="0"/>
           </a:xfrm>
           <a:prstGeom prst="line">
             <a:avLst/>
@@ -1864,6 +1865,7 @@
               <a:srgbClr val="4F98C0"/>
             </a:solidFill>
             <a:prstDash val="solid"/>
+            <a:headEnd type="none"/>
             <a:tailEnd type="triangle"/>
           </a:ln>
         </p:spPr>
@@ -1876,12 +1878,12 @@
         </p:nvSpPr>
         <p:spPr>
           <a:xfrm>
-            <a:off x="4375587" y="2468880"/>
-            <a:ext cx="1572768" cy="1371600"/>
+            <a:off x="9235440" y="1874520"/>
+            <a:ext cx="2286000" cy="1280160"/>
           </a:xfrm>
           <a:prstGeom prst="roundRect">
             <a:avLst>
-              <a:gd name="adj" fmla="val 6667"/>
+              <a:gd name="adj" fmla="val 7143"/>
             </a:avLst>
           </a:prstGeom>
           <a:solidFill>
@@ -1903,8 +1905,8 @@
         </p:nvSpPr>
         <p:spPr>
           <a:xfrm>
-            <a:off x="5061387" y="2670048"/>
-            <a:ext cx="201168" cy="201168"/>
+            <a:off x="10287000" y="2039112"/>
+            <a:ext cx="182880" cy="182880"/>
           </a:xfrm>
           <a:prstGeom prst="ellipse">
             <a:avLst/>
@@ -1923,8 +1925,8 @@
         </p:nvSpPr>
         <p:spPr>
           <a:xfrm>
-            <a:off x="4329867" y="2926080"/>
-            <a:ext cx="1664208" cy="411480"/>
+            <a:off x="9208008" y="2258568"/>
+            <a:ext cx="2340864" cy="365760"/>
           </a:xfrm>
           <a:prstGeom prst="rect">
             <a:avLst/>
@@ -1962,8 +1964,8 @@
         </p:nvSpPr>
         <p:spPr>
           <a:xfrm>
-            <a:off x="4357299" y="3310128"/>
-            <a:ext cx="1609344" cy="457200"/>
+            <a:off x="9235440" y="2606040"/>
+            <a:ext cx="2286000" cy="411480"/>
           </a:xfrm>
           <a:prstGeom prst="rect">
             <a:avLst/>
@@ -2001,36 +2003,12 @@
         </p:nvSpPr>
         <p:spPr>
           <a:xfrm>
-            <a:off x="5966643" y="3154680"/>
-            <a:ext cx="258409" cy="0"/>
-          </a:xfrm>
-          <a:prstGeom prst="line">
-            <a:avLst/>
-          </a:prstGeom>
-          <a:noFill/>
-          <a:ln w="25400">
-            <a:solidFill>
-              <a:srgbClr val="4F98C0"/>
-            </a:solidFill>
-            <a:prstDash val="solid"/>
-            <a:tailEnd type="triangle"/>
-          </a:ln>
-        </p:spPr>
-      </p:sp>
-      <p:sp>
-        <p:nvSpPr>
-          <p:cNvPr id="18" name="Shape 16"/>
-          <p:cNvSpPr/>
-          <p:nvPr/>
-        </p:nvSpPr>
-        <p:spPr>
-          <a:xfrm>
-            <a:off x="6243340" y="2468880"/>
-            <a:ext cx="1572768" cy="1371600"/>
+            <a:off x="9235440" y="3520440"/>
+            <a:ext cx="2286000" cy="1280160"/>
           </a:xfrm>
           <a:prstGeom prst="roundRect">
             <a:avLst>
-              <a:gd name="adj" fmla="val 6667"/>
+              <a:gd name="adj" fmla="val 7143"/>
             </a:avLst>
           </a:prstGeom>
           <a:solidFill>
@@ -2046,14 +2024,14 @@
       </p:sp>
       <p:sp>
         <p:nvSpPr>
-          <p:cNvPr id="19" name="Shape 17"/>
-          <p:cNvSpPr/>
-          <p:nvPr/>
-        </p:nvSpPr>
-        <p:spPr>
-          <a:xfrm>
-            <a:off x="6929140" y="2670048"/>
-            <a:ext cx="201168" cy="201168"/>
+          <p:cNvPr id="18" name="Shape 16"/>
+          <p:cNvSpPr/>
+          <p:nvPr/>
+        </p:nvSpPr>
+        <p:spPr>
+          <a:xfrm>
+            <a:off x="10287000" y="3685032"/>
+            <a:ext cx="182880" cy="182880"/>
           </a:xfrm>
           <a:prstGeom prst="ellipse">
             <a:avLst/>
@@ -2066,14 +2044,14 @@
       </p:sp>
       <p:sp>
         <p:nvSpPr>
-          <p:cNvPr id="20" name="Text 18"/>
-          <p:cNvSpPr/>
-          <p:nvPr/>
-        </p:nvSpPr>
-        <p:spPr>
-          <a:xfrm>
-            <a:off x="6197620" y="2926080"/>
-            <a:ext cx="1664208" cy="411480"/>
+          <p:cNvPr id="19" name="Text 17"/>
+          <p:cNvSpPr/>
+          <p:nvPr/>
+        </p:nvSpPr>
+        <p:spPr>
+          <a:xfrm>
+            <a:off x="9208008" y="3904488"/>
+            <a:ext cx="2340864" cy="365760"/>
           </a:xfrm>
           <a:prstGeom prst="rect">
             <a:avLst/>
@@ -2105,14 +2083,14 @@
       </p:sp>
       <p:sp>
         <p:nvSpPr>
-          <p:cNvPr id="21" name="Text 19"/>
-          <p:cNvSpPr/>
-          <p:nvPr/>
-        </p:nvSpPr>
-        <p:spPr>
-          <a:xfrm>
-            <a:off x="6225052" y="3310128"/>
-            <a:ext cx="1609344" cy="457200"/>
+          <p:cNvPr id="20" name="Text 18"/>
+          <p:cNvSpPr/>
+          <p:nvPr/>
+        </p:nvSpPr>
+        <p:spPr>
+          <a:xfrm>
+            <a:off x="9235440" y="4251960"/>
+            <a:ext cx="2286000" cy="411480"/>
           </a:xfrm>
           <a:prstGeom prst="rect">
             <a:avLst/>
@@ -2144,14 +2122,14 @@
       </p:sp>
       <p:sp>
         <p:nvSpPr>
-          <p:cNvPr id="22" name="Shape 20"/>
-          <p:cNvSpPr/>
-          <p:nvPr/>
-        </p:nvSpPr>
-        <p:spPr>
-          <a:xfrm>
-            <a:off x="7834396" y="3154680"/>
-            <a:ext cx="258409" cy="0"/>
+          <p:cNvPr id="21" name="Shape 19"/>
+          <p:cNvSpPr/>
+          <p:nvPr/>
+        </p:nvSpPr>
+        <p:spPr>
+          <a:xfrm>
+            <a:off x="7242048" y="4160520"/>
+            <a:ext cx="1975104" cy="0"/>
           </a:xfrm>
           <a:prstGeom prst="line">
             <a:avLst/>
@@ -2162,24 +2140,25 @@
               <a:srgbClr val="4F98C0"/>
             </a:solidFill>
             <a:prstDash val="solid"/>
-            <a:tailEnd type="triangle"/>
+            <a:headEnd type="triangle"/>
+            <a:tailEnd type="oval"/>
           </a:ln>
         </p:spPr>
       </p:sp>
       <p:sp>
         <p:nvSpPr>
-          <p:cNvPr id="23" name="Shape 21"/>
-          <p:cNvSpPr/>
-          <p:nvPr/>
-        </p:nvSpPr>
-        <p:spPr>
-          <a:xfrm>
-            <a:off x="8111094" y="2468880"/>
-            <a:ext cx="1572768" cy="1371600"/>
+          <p:cNvPr id="22" name="Shape 20"/>
+          <p:cNvSpPr/>
+          <p:nvPr/>
+        </p:nvSpPr>
+        <p:spPr>
+          <a:xfrm>
+            <a:off x="4937760" y="3520440"/>
+            <a:ext cx="2286000" cy="1280160"/>
           </a:xfrm>
           <a:prstGeom prst="roundRect">
             <a:avLst>
-              <a:gd name="adj" fmla="val 6667"/>
+              <a:gd name="adj" fmla="val 7143"/>
             </a:avLst>
           </a:prstGeom>
           <a:solidFill>
@@ -2195,14 +2174,14 @@
       </p:sp>
       <p:sp>
         <p:nvSpPr>
-          <p:cNvPr id="24" name="Shape 22"/>
-          <p:cNvSpPr/>
-          <p:nvPr/>
-        </p:nvSpPr>
-        <p:spPr>
-          <a:xfrm>
-            <a:off x="8796894" y="2670048"/>
-            <a:ext cx="201168" cy="201168"/>
+          <p:cNvPr id="23" name="Shape 21"/>
+          <p:cNvSpPr/>
+          <p:nvPr/>
+        </p:nvSpPr>
+        <p:spPr>
+          <a:xfrm>
+            <a:off x="5989320" y="3685032"/>
+            <a:ext cx="182880" cy="182880"/>
           </a:xfrm>
           <a:prstGeom prst="ellipse">
             <a:avLst/>
@@ -2215,14 +2194,14 @@
       </p:sp>
       <p:sp>
         <p:nvSpPr>
-          <p:cNvPr id="25" name="Text 23"/>
-          <p:cNvSpPr/>
-          <p:nvPr/>
-        </p:nvSpPr>
-        <p:spPr>
-          <a:xfrm>
-            <a:off x="8065374" y="2926080"/>
-            <a:ext cx="1664208" cy="411480"/>
+          <p:cNvPr id="24" name="Text 22"/>
+          <p:cNvSpPr/>
+          <p:nvPr/>
+        </p:nvSpPr>
+        <p:spPr>
+          <a:xfrm>
+            <a:off x="4910328" y="3904488"/>
+            <a:ext cx="2340864" cy="365760"/>
           </a:xfrm>
           <a:prstGeom prst="rect">
             <a:avLst/>
@@ -2254,14 +2233,14 @@
       </p:sp>
       <p:sp>
         <p:nvSpPr>
-          <p:cNvPr id="26" name="Text 24"/>
-          <p:cNvSpPr/>
-          <p:nvPr/>
-        </p:nvSpPr>
-        <p:spPr>
-          <a:xfrm>
-            <a:off x="8092806" y="3310128"/>
-            <a:ext cx="1609344" cy="457200"/>
+          <p:cNvPr id="25" name="Text 23"/>
+          <p:cNvSpPr/>
+          <p:nvPr/>
+        </p:nvSpPr>
+        <p:spPr>
+          <a:xfrm>
+            <a:off x="4937760" y="4251960"/>
+            <a:ext cx="2286000" cy="411480"/>
           </a:xfrm>
           <a:prstGeom prst="rect">
             <a:avLst/>
@@ -2293,14 +2272,14 @@
       </p:sp>
       <p:sp>
         <p:nvSpPr>
-          <p:cNvPr id="27" name="Shape 25"/>
-          <p:cNvSpPr/>
-          <p:nvPr/>
-        </p:nvSpPr>
-        <p:spPr>
-          <a:xfrm>
-            <a:off x="9702150" y="3154680"/>
-            <a:ext cx="258409" cy="0"/>
+          <p:cNvPr id="26" name="Shape 24"/>
+          <p:cNvSpPr/>
+          <p:nvPr/>
+        </p:nvSpPr>
+        <p:spPr>
+          <a:xfrm>
+            <a:off x="2944368" y="4160520"/>
+            <a:ext cx="1975104" cy="0"/>
           </a:xfrm>
           <a:prstGeom prst="line">
             <a:avLst/>
@@ -2311,24 +2290,25 @@
               <a:srgbClr val="4F98C0"/>
             </a:solidFill>
             <a:prstDash val="solid"/>
-            <a:tailEnd type="triangle"/>
+            <a:headEnd type="triangle"/>
+            <a:tailEnd type="oval"/>
           </a:ln>
         </p:spPr>
       </p:sp>
       <p:sp>
         <p:nvSpPr>
-          <p:cNvPr id="28" name="Shape 26"/>
-          <p:cNvSpPr/>
-          <p:nvPr/>
-        </p:nvSpPr>
-        <p:spPr>
-          <a:xfrm>
-            <a:off x="9978847" y="2468880"/>
-            <a:ext cx="1572768" cy="1371600"/>
+          <p:cNvPr id="27" name="Shape 25"/>
+          <p:cNvSpPr/>
+          <p:nvPr/>
+        </p:nvSpPr>
+        <p:spPr>
+          <a:xfrm>
+            <a:off x="640080" y="3520440"/>
+            <a:ext cx="2286000" cy="1280160"/>
           </a:xfrm>
           <a:prstGeom prst="roundRect">
             <a:avLst>
-              <a:gd name="adj" fmla="val 6667"/>
+              <a:gd name="adj" fmla="val 7143"/>
             </a:avLst>
           </a:prstGeom>
           <a:solidFill>
@@ -2344,14 +2324,14 @@
       </p:sp>
       <p:sp>
         <p:nvSpPr>
-          <p:cNvPr id="29" name="Shape 27"/>
-          <p:cNvSpPr/>
-          <p:nvPr/>
-        </p:nvSpPr>
-        <p:spPr>
-          <a:xfrm>
-            <a:off x="10664647" y="2670048"/>
-            <a:ext cx="201168" cy="201168"/>
+          <p:cNvPr id="28" name="Shape 26"/>
+          <p:cNvSpPr/>
+          <p:nvPr/>
+        </p:nvSpPr>
+        <p:spPr>
+          <a:xfrm>
+            <a:off x="1691640" y="3685032"/>
+            <a:ext cx="182880" cy="182880"/>
           </a:xfrm>
           <a:prstGeom prst="ellipse">
             <a:avLst/>
@@ -2364,14 +2344,14 @@
       </p:sp>
       <p:sp>
         <p:nvSpPr>
-          <p:cNvPr id="30" name="Text 28"/>
-          <p:cNvSpPr/>
-          <p:nvPr/>
-        </p:nvSpPr>
-        <p:spPr>
-          <a:xfrm>
-            <a:off x="9933127" y="2926080"/>
-            <a:ext cx="1664208" cy="411480"/>
+          <p:cNvPr id="29" name="Text 27"/>
+          <p:cNvSpPr/>
+          <p:nvPr/>
+        </p:nvSpPr>
+        <p:spPr>
+          <a:xfrm>
+            <a:off x="612648" y="3904488"/>
+            <a:ext cx="2340864" cy="365760"/>
           </a:xfrm>
           <a:prstGeom prst="rect">
             <a:avLst/>
@@ -2403,14 +2383,14 @@
       </p:sp>
       <p:sp>
         <p:nvSpPr>
-          <p:cNvPr id="31" name="Text 29"/>
-          <p:cNvSpPr/>
-          <p:nvPr/>
-        </p:nvSpPr>
-        <p:spPr>
-          <a:xfrm>
-            <a:off x="9960559" y="3310128"/>
-            <a:ext cx="1609344" cy="457200"/>
+          <p:cNvPr id="30" name="Text 28"/>
+          <p:cNvSpPr/>
+          <p:nvPr/>
+        </p:nvSpPr>
+        <p:spPr>
+          <a:xfrm>
+            <a:off x="640080" y="4251960"/>
+            <a:ext cx="2286000" cy="411480"/>
           </a:xfrm>
           <a:prstGeom prst="rect">
             <a:avLst/>
@@ -2442,92 +2422,38 @@
       </p:sp>
       <p:sp>
         <p:nvSpPr>
+          <p:cNvPr id="31" name="Shape 29"/>
+          <p:cNvSpPr/>
+          <p:nvPr/>
+        </p:nvSpPr>
+        <p:spPr>
+          <a:xfrm>
+            <a:off x="10378440" y="3154680"/>
+            <a:ext cx="0" cy="365760"/>
+          </a:xfrm>
+          <a:prstGeom prst="line">
+            <a:avLst/>
+          </a:prstGeom>
+          <a:noFill/>
+          <a:ln w="25400">
+            <a:solidFill>
+              <a:srgbClr val="4F98C0"/>
+            </a:solidFill>
+            <a:prstDash val="solid"/>
+            <a:tailEnd type="triangle"/>
+          </a:ln>
+        </p:spPr>
+      </p:sp>
+      <p:sp>
+        <p:nvSpPr>
           <p:cNvPr id="32" name="Text 30"/>
           <p:cNvSpPr/>
           <p:nvPr/>
         </p:nvSpPr>
         <p:spPr>
           <a:xfrm>
-            <a:off x="640080" y="3977640"/>
-            <a:ext cx="3440521" cy="274320"/>
-          </a:xfrm>
-          <a:prstGeom prst="rect">
-            <a:avLst/>
-          </a:prstGeom>
-          <a:noFill/>
-          <a:ln/>
-        </p:spPr>
-        <p:txBody>
-          <a:bodyPr wrap="square" rtlCol="0" anchor="ctr"/>
-          <a:lstStyle/>
-          <a:p>
-            <a:pPr algn="ctr" indent="0" marL="0">
-              <a:buNone/>
-            </a:pPr>
-            <a:r>
-              <a:rPr lang="en-US" sz="1100" b="1" spc="200" kern="0" dirty="0">
-                <a:solidFill>
-                  <a:srgbClr val="4F98C0"/>
-                </a:solidFill>
-                <a:latin typeface="Calibri" pitchFamily="34" charset="0"/>
-                <a:ea typeface="Calibri" pitchFamily="34" charset="-122"/>
-                <a:cs typeface="Calibri" pitchFamily="34" charset="-120"/>
-              </a:rPr>
-              <a:t>EDGE</a:t>
-            </a:r>
-            <a:endParaRPr lang="en-US" sz="1100" dirty="0"/>
-          </a:p>
-        </p:txBody>
-      </p:sp>
-      <p:sp>
-        <p:nvSpPr>
-          <p:cNvPr id="33" name="Text 31"/>
-          <p:cNvSpPr/>
-          <p:nvPr/>
-        </p:nvSpPr>
-        <p:spPr>
-          <a:xfrm>
-            <a:off x="4375587" y="3977640"/>
-            <a:ext cx="7176028" cy="274320"/>
-          </a:xfrm>
-          <a:prstGeom prst="rect">
-            <a:avLst/>
-          </a:prstGeom>
-          <a:noFill/>
-          <a:ln/>
-        </p:spPr>
-        <p:txBody>
-          <a:bodyPr wrap="square" rtlCol="0" anchor="ctr"/>
-          <a:lstStyle/>
-          <a:p>
-            <a:pPr algn="ctr" indent="0" marL="0">
-              <a:buNone/>
-            </a:pPr>
-            <a:r>
-              <a:rPr lang="en-US" sz="1100" b="1" spc="200" kern="0" dirty="0">
-                <a:solidFill>
-                  <a:srgbClr val="0F4E7E"/>
-                </a:solidFill>
-                <a:latin typeface="Calibri" pitchFamily="34" charset="0"/>
-                <a:ea typeface="Calibri" pitchFamily="34" charset="-122"/>
-                <a:cs typeface="Calibri" pitchFamily="34" charset="-120"/>
-              </a:rPr>
-              <a:t>CLOUD</a:t>
-            </a:r>
-            <a:endParaRPr lang="en-US" sz="1100" dirty="0"/>
-          </a:p>
-        </p:txBody>
-      </p:sp>
-      <p:sp>
-        <p:nvSpPr>
-          <p:cNvPr id="34" name="Text 32"/>
-          <p:cNvSpPr/>
-          <p:nvPr/>
-        </p:nvSpPr>
-        <p:spPr>
-          <a:xfrm>
-            <a:off x="640080" y="5212080"/>
-            <a:ext cx="10972800" cy="640080"/>
+            <a:off x="640080" y="5257800"/>
+            <a:ext cx="10972800" cy="731520"/>
           </a:xfrm>
           <a:prstGeom prst="rect">
             <a:avLst/>
@@ -2675,8 +2601,35 @@
         </p:nvSpPr>
         <p:spPr>
           <a:xfrm>
-            <a:off x="731520" y="1965960"/>
-            <a:ext cx="685800" cy="685800"/>
+            <a:off x="640080" y="1874520"/>
+            <a:ext cx="3502152" cy="3657600"/>
+          </a:xfrm>
+          <a:prstGeom prst="roundRect">
+            <a:avLst>
+              <a:gd name="adj" fmla="val 2611"/>
+            </a:avLst>
+          </a:prstGeom>
+          <a:solidFill>
+            <a:srgbClr val="EDF4F9"/>
+          </a:solidFill>
+          <a:ln w="15240">
+            <a:solidFill>
+              <a:srgbClr val="1E76A6"/>
+            </a:solidFill>
+            <a:prstDash val="solid"/>
+          </a:ln>
+        </p:spPr>
+      </p:sp>
+      <p:sp>
+        <p:nvSpPr>
+          <p:cNvPr id="5" name="Shape 3"/>
+          <p:cNvSpPr/>
+          <p:nvPr/>
+        </p:nvSpPr>
+        <p:spPr>
+          <a:xfrm>
+            <a:off x="914400" y="2194560"/>
+            <a:ext cx="640080" cy="640080"/>
           </a:xfrm>
           <a:prstGeom prst="ellipse">
             <a:avLst/>
@@ -2689,14 +2642,14 @@
       </p:sp>
       <p:sp>
         <p:nvSpPr>
-          <p:cNvPr id="5" name="Text 3"/>
-          <p:cNvSpPr/>
-          <p:nvPr/>
-        </p:nvSpPr>
-        <p:spPr>
-          <a:xfrm>
-            <a:off x="731520" y="1965960"/>
-            <a:ext cx="685800" cy="685800"/>
+          <p:cNvPr id="6" name="Text 4"/>
+          <p:cNvSpPr/>
+          <p:nvPr/>
+        </p:nvSpPr>
+        <p:spPr>
+          <a:xfrm>
+            <a:off x="914400" y="2194560"/>
+            <a:ext cx="640080" cy="640080"/>
           </a:xfrm>
           <a:prstGeom prst="rect">
             <a:avLst/>
@@ -2712,7 +2665,7 @@
               <a:buNone/>
             </a:pPr>
             <a:r>
-              <a:rPr lang="en-US" sz="2600" b="1" dirty="0">
+              <a:rPr lang="en-US" sz="2400" b="1" dirty="0">
                 <a:solidFill>
                   <a:srgbClr val="FFFFFF"/>
                 </a:solidFill>
@@ -2722,20 +2675,20 @@
               </a:rPr>
               <a:t>1</a:t>
             </a:r>
-            <a:endParaRPr lang="en-US" sz="2600" dirty="0"/>
-          </a:p>
-        </p:txBody>
-      </p:sp>
-      <p:sp>
-        <p:nvSpPr>
-          <p:cNvPr id="6" name="Text 4"/>
-          <p:cNvSpPr/>
-          <p:nvPr/>
-        </p:nvSpPr>
-        <p:spPr>
-          <a:xfrm>
-            <a:off x="1691640" y="1920240"/>
-            <a:ext cx="9875520" cy="411480"/>
+            <a:endParaRPr lang="en-US" sz="2400" dirty="0"/>
+          </a:p>
+        </p:txBody>
+      </p:sp>
+      <p:sp>
+        <p:nvSpPr>
+          <p:cNvPr id="7" name="Text 5"/>
+          <p:cNvSpPr/>
+          <p:nvPr/>
+        </p:nvSpPr>
+        <p:spPr>
+          <a:xfrm>
+            <a:off x="914400" y="3017520"/>
+            <a:ext cx="2953512" cy="822960"/>
           </a:xfrm>
           <a:prstGeom prst="rect">
             <a:avLst/>
@@ -2751,7 +2704,7 @@
               <a:buNone/>
             </a:pPr>
             <a:r>
-              <a:rPr lang="en-US" sz="1800" b="1" dirty="0">
+              <a:rPr lang="en-US" sz="1700" b="1" dirty="0">
                 <a:solidFill>
                   <a:srgbClr val="102636"/>
                 </a:solidFill>
@@ -2759,22 +2712,22 @@
                 <a:ea typeface="Calibri" pitchFamily="34" charset="-122"/>
                 <a:cs typeface="Calibri" pitchFamily="34" charset="-120"/>
               </a:rPr>
-              <a:t>Pipeline health, all green</a:t>
-            </a:r>
-            <a:endParaRPr lang="en-US" sz="1800" dirty="0"/>
-          </a:p>
-        </p:txBody>
-      </p:sp>
-      <p:sp>
-        <p:nvSpPr>
-          <p:cNvPr id="7" name="Text 5"/>
-          <p:cNvSpPr/>
-          <p:nvPr/>
-        </p:nvSpPr>
-        <p:spPr>
-          <a:xfrm>
-            <a:off x="1691640" y="2340864"/>
-            <a:ext cx="9875520" cy="640080"/>
+              <a:t>A Bridge Console per vessel</a:t>
+            </a:r>
+            <a:endParaRPr lang="en-US" sz="1700" dirty="0"/>
+          </a:p>
+        </p:txBody>
+      </p:sp>
+      <p:sp>
+        <p:nvSpPr>
+          <p:cNvPr id="8" name="Text 6"/>
+          <p:cNvSpPr/>
+          <p:nvPr/>
+        </p:nvSpPr>
+        <p:spPr>
+          <a:xfrm>
+            <a:off x="914400" y="3794760"/>
+            <a:ext cx="2953512" cy="1554480"/>
           </a:xfrm>
           <a:prstGeom prst="rect">
             <a:avLst/>
@@ -2787,10 +2740,13 @@
           <a:lstStyle/>
           <a:p>
             <a:pPr indent="0" marL="0">
+              <a:lnSpc>
+                <a:spcPct val="105000"/>
+              </a:lnSpc>
               <a:buNone/>
             </a:pPr>
             <a:r>
-              <a:rPr lang="en-US" sz="1350" dirty="0">
+              <a:rPr lang="en-US" sz="1300" dirty="0">
                 <a:solidFill>
                   <a:srgbClr val="557280"/>
                 </a:solidFill>
@@ -2798,22 +2754,49 @@
                 <a:ea typeface="Calibri" pitchFamily="34" charset="-122"/>
                 <a:cs typeface="Calibri" pitchFamily="34" charset="-120"/>
               </a:rPr>
-              <a:t>Live health reports gateway, queue, Lambda and pipeline all true, freshest reading under one second old.</a:t>
-            </a:r>
-            <a:endParaRPr lang="en-US" sz="1350" dirty="0"/>
-          </a:p>
-        </p:txBody>
-      </p:sp>
-      <p:sp>
-        <p:nvSpPr>
-          <p:cNvPr id="8" name="Shape 6"/>
-          <p:cNvSpPr/>
-          <p:nvPr/>
-        </p:nvSpPr>
-        <p:spPr>
-          <a:xfrm>
-            <a:off x="731520" y="3383280"/>
-            <a:ext cx="685800" cy="685800"/>
+              <a:t>Engine, fuel, ballast, hull vibration and passengers live for both vessels, reduced to a summary before it leaves the ship.</a:t>
+            </a:r>
+            <a:endParaRPr lang="en-US" sz="1300" dirty="0"/>
+          </a:p>
+        </p:txBody>
+      </p:sp>
+      <p:sp>
+        <p:nvSpPr>
+          <p:cNvPr id="9" name="Shape 7"/>
+          <p:cNvSpPr/>
+          <p:nvPr/>
+        </p:nvSpPr>
+        <p:spPr>
+          <a:xfrm>
+            <a:off x="4416552" y="1874520"/>
+            <a:ext cx="3502152" cy="3657600"/>
+          </a:xfrm>
+          <a:prstGeom prst="roundRect">
+            <a:avLst>
+              <a:gd name="adj" fmla="val 2611"/>
+            </a:avLst>
+          </a:prstGeom>
+          <a:solidFill>
+            <a:srgbClr val="EDF4F9"/>
+          </a:solidFill>
+          <a:ln w="15240">
+            <a:solidFill>
+              <a:srgbClr val="1E76A6"/>
+            </a:solidFill>
+            <a:prstDash val="solid"/>
+          </a:ln>
+        </p:spPr>
+      </p:sp>
+      <p:sp>
+        <p:nvSpPr>
+          <p:cNvPr id="10" name="Shape 8"/>
+          <p:cNvSpPr/>
+          <p:nvPr/>
+        </p:nvSpPr>
+        <p:spPr>
+          <a:xfrm>
+            <a:off x="4690872" y="2194560"/>
+            <a:ext cx="640080" cy="640080"/>
           </a:xfrm>
           <a:prstGeom prst="ellipse">
             <a:avLst/>
@@ -2826,14 +2809,14 @@
       </p:sp>
       <p:sp>
         <p:nvSpPr>
-          <p:cNvPr id="9" name="Text 7"/>
-          <p:cNvSpPr/>
-          <p:nvPr/>
-        </p:nvSpPr>
-        <p:spPr>
-          <a:xfrm>
-            <a:off x="731520" y="3383280"/>
-            <a:ext cx="685800" cy="685800"/>
+          <p:cNvPr id="11" name="Text 9"/>
+          <p:cNvSpPr/>
+          <p:nvPr/>
+        </p:nvSpPr>
+        <p:spPr>
+          <a:xfrm>
+            <a:off x="4690872" y="2194560"/>
+            <a:ext cx="640080" cy="640080"/>
           </a:xfrm>
           <a:prstGeom prst="rect">
             <a:avLst/>
@@ -2849,7 +2832,7 @@
               <a:buNone/>
             </a:pPr>
             <a:r>
-              <a:rPr lang="en-US" sz="2600" b="1" dirty="0">
+              <a:rPr lang="en-US" sz="2400" b="1" dirty="0">
                 <a:solidFill>
                   <a:srgbClr val="FFFFFF"/>
                 </a:solidFill>
@@ -2859,20 +2842,20 @@
               </a:rPr>
               <a:t>2</a:t>
             </a:r>
-            <a:endParaRPr lang="en-US" sz="2600" dirty="0"/>
-          </a:p>
-        </p:txBody>
-      </p:sp>
-      <p:sp>
-        <p:nvSpPr>
-          <p:cNvPr id="10" name="Text 8"/>
-          <p:cNvSpPr/>
-          <p:nvPr/>
-        </p:nvSpPr>
-        <p:spPr>
-          <a:xfrm>
-            <a:off x="1691640" y="3337560"/>
-            <a:ext cx="9875520" cy="411480"/>
+            <a:endParaRPr lang="en-US" sz="2400" dirty="0"/>
+          </a:p>
+        </p:txBody>
+      </p:sp>
+      <p:sp>
+        <p:nvSpPr>
+          <p:cNvPr id="12" name="Text 10"/>
+          <p:cNvSpPr/>
+          <p:nvPr/>
+        </p:nvSpPr>
+        <p:spPr>
+          <a:xfrm>
+            <a:off x="4690872" y="3017520"/>
+            <a:ext cx="2953512" cy="822960"/>
           </a:xfrm>
           <a:prstGeom prst="rect">
             <a:avLst/>
@@ -2888,7 +2871,7 @@
               <a:buNone/>
             </a:pPr>
             <a:r>
-              <a:rPr lang="en-US" sz="1800" b="1" dirty="0">
+              <a:rPr lang="en-US" sz="1700" b="1" dirty="0">
                 <a:solidFill>
                   <a:srgbClr val="102636"/>
                 </a:solidFill>
@@ -2896,22 +2879,22 @@
                 <a:ea typeface="Calibri" pitchFamily="34" charset="-122"/>
                 <a:cs typeface="Calibri" pitchFamily="34" charset="-120"/>
               </a:rPr>
-              <a:t>Real data, climbing</a:t>
-            </a:r>
-            <a:endParaRPr lang="en-US" sz="1800" dirty="0"/>
-          </a:p>
-        </p:txBody>
-      </p:sp>
-      <p:sp>
-        <p:nvSpPr>
-          <p:cNvPr id="11" name="Text 9"/>
-          <p:cNvSpPr/>
-          <p:nvPr/>
-        </p:nvSpPr>
-        <p:spPr>
-          <a:xfrm>
-            <a:off x="1691640" y="3758184"/>
-            <a:ext cx="9875520" cy="640080"/>
+              <a:t>Real alerts on the console</a:t>
+            </a:r>
+            <a:endParaRPr lang="en-US" sz="1700" dirty="0"/>
+          </a:p>
+        </p:txBody>
+      </p:sp>
+      <p:sp>
+        <p:nvSpPr>
+          <p:cNvPr id="13" name="Text 11"/>
+          <p:cNvSpPr/>
+          <p:nvPr/>
+        </p:nvSpPr>
+        <p:spPr>
+          <a:xfrm>
+            <a:off x="4690872" y="3794760"/>
+            <a:ext cx="2953512" cy="1554480"/>
           </a:xfrm>
           <a:prstGeom prst="rect">
             <a:avLst/>
@@ -2924,10 +2907,13 @@
           <a:lstStyle/>
           <a:p>
             <a:pPr indent="0" marL="0">
+              <a:lnSpc>
+                <a:spcPct val="105000"/>
+              </a:lnSpc>
               <a:buNone/>
             </a:pPr>
             <a:r>
-              <a:rPr lang="en-US" sz="1350" dirty="0">
+              <a:rPr lang="en-US" sz="1300" dirty="0">
                 <a:solidFill>
                   <a:srgbClr val="557280"/>
                 </a:solidFill>
@@ -2935,22 +2921,49 @@
                 <a:ea typeface="Calibri" pitchFamily="34" charset="-122"/>
                 <a:cs typeface="Calibri" pitchFamily="34" charset="-120"/>
               </a:rPr>
-              <a:t>Stored items grew 59 to 374 to 425 during verification, with excessive fuel burn and hull stress firing on the Bridge Console.</a:t>
-            </a:r>
-            <a:endParaRPr lang="en-US" sz="1350" dirty="0"/>
-          </a:p>
-        </p:txBody>
-      </p:sp>
-      <p:sp>
-        <p:nvSpPr>
-          <p:cNvPr id="12" name="Shape 10"/>
-          <p:cNvSpPr/>
-          <p:nvPr/>
-        </p:nvSpPr>
-        <p:spPr>
-          <a:xfrm>
-            <a:off x="731520" y="4800600"/>
-            <a:ext cx="685800" cy="685800"/>
+              <a:t>Excessive fuel burn and hull stress fire on the Bridge Console as their thresholds are crossed, on real data.</a:t>
+            </a:r>
+            <a:endParaRPr lang="en-US" sz="1300" dirty="0"/>
+          </a:p>
+        </p:txBody>
+      </p:sp>
+      <p:sp>
+        <p:nvSpPr>
+          <p:cNvPr id="14" name="Shape 12"/>
+          <p:cNvSpPr/>
+          <p:nvPr/>
+        </p:nvSpPr>
+        <p:spPr>
+          <a:xfrm>
+            <a:off x="8193024" y="1874520"/>
+            <a:ext cx="3502152" cy="3657600"/>
+          </a:xfrm>
+          <a:prstGeom prst="roundRect">
+            <a:avLst>
+              <a:gd name="adj" fmla="val 2611"/>
+            </a:avLst>
+          </a:prstGeom>
+          <a:solidFill>
+            <a:srgbClr val="EDF4F9"/>
+          </a:solidFill>
+          <a:ln w="15240">
+            <a:solidFill>
+              <a:srgbClr val="1E76A6"/>
+            </a:solidFill>
+            <a:prstDash val="solid"/>
+          </a:ln>
+        </p:spPr>
+      </p:sp>
+      <p:sp>
+        <p:nvSpPr>
+          <p:cNvPr id="15" name="Shape 13"/>
+          <p:cNvSpPr/>
+          <p:nvPr/>
+        </p:nvSpPr>
+        <p:spPr>
+          <a:xfrm>
+            <a:off x="8467344" y="2194560"/>
+            <a:ext cx="640080" cy="640080"/>
           </a:xfrm>
           <a:prstGeom prst="ellipse">
             <a:avLst/>
@@ -2963,14 +2976,14 @@
       </p:sp>
       <p:sp>
         <p:nvSpPr>
-          <p:cNvPr id="13" name="Text 11"/>
-          <p:cNvSpPr/>
-          <p:nvPr/>
-        </p:nvSpPr>
-        <p:spPr>
-          <a:xfrm>
-            <a:off x="731520" y="4800600"/>
-            <a:ext cx="685800" cy="685800"/>
+          <p:cNvPr id="16" name="Text 14"/>
+          <p:cNvSpPr/>
+          <p:nvPr/>
+        </p:nvSpPr>
+        <p:spPr>
+          <a:xfrm>
+            <a:off x="8467344" y="2194560"/>
+            <a:ext cx="640080" cy="640080"/>
           </a:xfrm>
           <a:prstGeom prst="rect">
             <a:avLst/>
@@ -2986,7 +2999,7 @@
               <a:buNone/>
             </a:pPr>
             <a:r>
-              <a:rPr lang="en-US" sz="2600" b="1" dirty="0">
+              <a:rPr lang="en-US" sz="2400" b="1" dirty="0">
                 <a:solidFill>
                   <a:srgbClr val="FFFFFF"/>
                 </a:solidFill>
@@ -2996,20 +3009,20 @@
               </a:rPr>
               <a:t>3</a:t>
             </a:r>
-            <a:endParaRPr lang="en-US" sz="2600" dirty="0"/>
-          </a:p>
-        </p:txBody>
-      </p:sp>
-      <p:sp>
-        <p:nvSpPr>
-          <p:cNvPr id="14" name="Text 12"/>
-          <p:cNvSpPr/>
-          <p:nvPr/>
-        </p:nvSpPr>
-        <p:spPr>
-          <a:xfrm>
-            <a:off x="1691640" y="4754880"/>
-            <a:ext cx="9875520" cy="411480"/>
+            <a:endParaRPr lang="en-US" sz="2400" dirty="0"/>
+          </a:p>
+        </p:txBody>
+      </p:sp>
+      <p:sp>
+        <p:nvSpPr>
+          <p:cNvPr id="17" name="Text 15"/>
+          <p:cNvSpPr/>
+          <p:nvPr/>
+        </p:nvSpPr>
+        <p:spPr>
+          <a:xfrm>
+            <a:off x="8467344" y="3017520"/>
+            <a:ext cx="2953512" cy="822960"/>
           </a:xfrm>
           <a:prstGeom prst="rect">
             <a:avLst/>
@@ -3025,7 +3038,7 @@
               <a:buNone/>
             </a:pPr>
             <a:r>
-              <a:rPr lang="en-US" sz="1800" b="1" dirty="0">
+              <a:rPr lang="en-US" sz="1700" b="1" dirty="0">
                 <a:solidFill>
                   <a:srgbClr val="102636"/>
                 </a:solidFill>
@@ -3033,22 +3046,22 @@
                 <a:ea typeface="Calibri" pitchFamily="34" charset="-122"/>
                 <a:cs typeface="Calibri" pitchFamily="34" charset="-120"/>
               </a:rPr>
-              <a:t>Tested end to end</a:t>
-            </a:r>
-            <a:endParaRPr lang="en-US" sz="1800" dirty="0"/>
-          </a:p>
-        </p:txBody>
-      </p:sp>
-      <p:sp>
-        <p:nvSpPr>
-          <p:cNvPr id="15" name="Text 13"/>
-          <p:cNvSpPr/>
-          <p:nvPr/>
-        </p:nvSpPr>
-        <p:spPr>
-          <a:xfrm>
-            <a:off x="1691640" y="5175504"/>
-            <a:ext cx="9875520" cy="640080"/>
+              <a:t>Stored items climbing live</a:t>
+            </a:r>
+            <a:endParaRPr lang="en-US" sz="1700" dirty="0"/>
+          </a:p>
+        </p:txBody>
+      </p:sp>
+      <p:sp>
+        <p:nvSpPr>
+          <p:cNvPr id="18" name="Text 16"/>
+          <p:cNvSpPr/>
+          <p:nvPr/>
+        </p:nvSpPr>
+        <p:spPr>
+          <a:xfrm>
+            <a:off x="8467344" y="3794760"/>
+            <a:ext cx="2953512" cy="1554480"/>
           </a:xfrm>
           <a:prstGeom prst="rect">
             <a:avLst/>
@@ -3061,10 +3074,13 @@
           <a:lstStyle/>
           <a:p>
             <a:pPr indent="0" marL="0">
+              <a:lnSpc>
+                <a:spcPct val="105000"/>
+              </a:lnSpc>
               <a:buNone/>
             </a:pPr>
             <a:r>
-              <a:rPr lang="en-US" sz="1350" dirty="0">
+              <a:rPr lang="en-US" sz="1300" dirty="0">
                 <a:solidFill>
                   <a:srgbClr val="557280"/>
                 </a:solidFill>
@@ -3072,15 +3088,15 @@
                 <a:ea typeface="Calibri" pitchFamily="34" charset="-122"/>
                 <a:cs typeface="Calibri" pitchFamily="34" charset="-120"/>
               </a:rPr>
-              <a:t>120 automated tests pass — unit and real-socket HTTP across sensors, fog, publisher, processor and dashboard, re-verified against the live account.</a:t>
-            </a:r>
-            <a:endParaRPr lang="en-US" sz="1350" dirty="0"/>
-          </a:p>
-        </p:txBody>
-      </p:sp>
-      <p:sp>
-        <p:nvSpPr>
-          <p:cNvPr id="16" name="Text 14"/>
+              <a:t>The count grows 59 to 374 to 425 during verification, and the freshest reading stays under a second old.</a:t>
+            </a:r>
+            <a:endParaRPr lang="en-US" sz="1300" dirty="0"/>
+          </a:p>
+        </p:txBody>
+      </p:sp>
+      <p:sp>
+        <p:nvSpPr>
+          <p:cNvPr id="19" name="Text 17"/>
           <p:cNvSpPr/>
           <p:nvPr/>
         </p:nvSpPr>
@@ -3157,24 +3173,24 @@
         </p:nvSpPr>
         <p:spPr>
           <a:xfrm>
-            <a:off x="640080" y="640080"/>
-            <a:ext cx="10972800" cy="640080"/>
-          </a:xfrm>
-          <a:prstGeom prst="rect">
-            <a:avLst/>
-          </a:prstGeom>
-          <a:noFill/>
-          <a:ln/>
-        </p:spPr>
-        <p:txBody>
-          <a:bodyPr wrap="square" rtlCol="0" anchor="ctr"/>
+            <a:off x="640080" y="594360"/>
+            <a:ext cx="10972800" cy="822960"/>
+          </a:xfrm>
+          <a:prstGeom prst="rect">
+            <a:avLst/>
+          </a:prstGeom>
+          <a:noFill/>
+          <a:ln/>
+        </p:spPr>
+        <p:txBody>
+          <a:bodyPr wrap="square" rtlCol="0" anchor="t"/>
           <a:lstStyle/>
           <a:p>
             <a:pPr indent="0" marL="0">
               <a:buNone/>
             </a:pPr>
             <a:r>
-              <a:rPr lang="en-US" sz="3000" b="1" dirty="0">
+              <a:rPr lang="en-US" sz="2800" b="1" dirty="0">
                 <a:solidFill>
                   <a:srgbClr val="FFFFFF"/>
                 </a:solidFill>
@@ -3184,47 +3200,20 @@
               </a:rPr>
               <a:t>Hardest Part — green checks, broken page</a:t>
             </a:r>
-            <a:endParaRPr lang="en-US" sz="3000" dirty="0"/>
-          </a:p>
-        </p:txBody>
-      </p:sp>
-      <p:sp>
-        <p:nvSpPr>
-          <p:cNvPr id="3" name="Shape 1"/>
-          <p:cNvSpPr/>
-          <p:nvPr/>
-        </p:nvSpPr>
-        <p:spPr>
-          <a:xfrm>
-            <a:off x="731520" y="1920240"/>
-            <a:ext cx="10698480" cy="1965960"/>
-          </a:xfrm>
-          <a:prstGeom prst="roundRect">
-            <a:avLst>
-              <a:gd name="adj" fmla="val 4651"/>
-            </a:avLst>
-          </a:prstGeom>
-          <a:solidFill>
-            <a:srgbClr val="174560"/>
-          </a:solidFill>
-          <a:ln w="15875">
-            <a:solidFill>
-              <a:srgbClr val="E5A83C"/>
-            </a:solidFill>
-            <a:prstDash val="solid"/>
-          </a:ln>
-        </p:spPr>
-      </p:sp>
-      <p:sp>
-        <p:nvSpPr>
-          <p:cNvPr id="4" name="Text 2"/>
-          <p:cNvSpPr/>
-          <p:nvPr/>
-        </p:nvSpPr>
-        <p:spPr>
-          <a:xfrm>
-            <a:off x="1005840" y="2103120"/>
-            <a:ext cx="3657600" cy="457200"/>
+            <a:endParaRPr lang="en-US" sz="2800" dirty="0"/>
+          </a:p>
+        </p:txBody>
+      </p:sp>
+      <p:sp>
+        <p:nvSpPr>
+          <p:cNvPr id="3" name="Text 1"/>
+          <p:cNvSpPr/>
+          <p:nvPr/>
+        </p:nvSpPr>
+        <p:spPr>
+          <a:xfrm>
+            <a:off x="731520" y="1965960"/>
+            <a:ext cx="2377440" cy="548640"/>
           </a:xfrm>
           <a:prstGeom prst="rect">
             <a:avLst/>
@@ -3240,7 +3229,7 @@
               <a:buNone/>
             </a:pPr>
             <a:r>
-              <a:rPr lang="en-US" sz="1900" b="1" dirty="0">
+              <a:rPr lang="en-US" sz="2200" b="1" dirty="0">
                 <a:solidFill>
                   <a:srgbClr val="E5A83C"/>
                 </a:solidFill>
@@ -3250,9 +3239,32 @@
               </a:rPr>
               <a:t>Problem</a:t>
             </a:r>
-            <a:endParaRPr lang="en-US" sz="1900" dirty="0"/>
-          </a:p>
-        </p:txBody>
+            <a:endParaRPr lang="en-US" sz="2200" dirty="0"/>
+          </a:p>
+        </p:txBody>
+      </p:sp>
+      <p:sp>
+        <p:nvSpPr>
+          <p:cNvPr id="4" name="Shape 2"/>
+          <p:cNvSpPr/>
+          <p:nvPr/>
+        </p:nvSpPr>
+        <p:spPr>
+          <a:xfrm>
+            <a:off x="3200400" y="1920240"/>
+            <a:ext cx="0" cy="1737360"/>
+          </a:xfrm>
+          <a:prstGeom prst="line">
+            <a:avLst/>
+          </a:prstGeom>
+          <a:noFill/>
+          <a:ln w="25400">
+            <a:solidFill>
+              <a:srgbClr val="E5A83C"/>
+            </a:solidFill>
+            <a:prstDash val="solid"/>
+          </a:ln>
+        </p:spPr>
       </p:sp>
       <p:sp>
         <p:nvSpPr>
@@ -3262,8 +3274,8 @@
         </p:nvSpPr>
         <p:spPr>
           <a:xfrm>
-            <a:off x="1005840" y="2578608"/>
-            <a:ext cx="9966960" cy="1188720"/>
+            <a:off x="3474720" y="1920240"/>
+            <a:ext cx="7955280" cy="1874520"/>
           </a:xfrm>
           <a:prstGeom prst="rect">
             <a:avLst/>
@@ -3277,12 +3289,12 @@
           <a:p>
             <a:pPr indent="0" marL="0">
               <a:lnSpc>
-                <a:spcPct val="105000"/>
+                <a:spcPct val="110000"/>
               </a:lnSpc>
               <a:buNone/>
             </a:pPr>
             <a:r>
-              <a:rPr lang="en-US" sz="1300" dirty="0">
+              <a:rPr lang="en-US" sz="1450" dirty="0">
                 <a:solidFill>
                   <a:srgbClr val="CEE2EE"/>
                 </a:solidFill>
@@ -3292,47 +3304,20 @@
               </a:rPr>
               <a:t>Deployed to the real AWS account, the dashboard page loaded but every panel stayed empty — its stylesheet, script and chart library all returned 404 from S3. Every signal said healthy: 120 tests green, a full emulator run clean, every curl check on the JSON API returning live data. The upload had flattened the static folder to the bucket root, and nothing was testing the page's own asset requests.</a:t>
             </a:r>
-            <a:endParaRPr lang="en-US" sz="1300" dirty="0"/>
-          </a:p>
-        </p:txBody>
-      </p:sp>
-      <p:sp>
-        <p:nvSpPr>
-          <p:cNvPr id="6" name="Shape 4"/>
-          <p:cNvSpPr/>
-          <p:nvPr/>
-        </p:nvSpPr>
-        <p:spPr>
-          <a:xfrm>
-            <a:off x="731520" y="4041648"/>
-            <a:ext cx="10698480" cy="1965960"/>
-          </a:xfrm>
-          <a:prstGeom prst="roundRect">
-            <a:avLst>
-              <a:gd name="adj" fmla="val 4651"/>
-            </a:avLst>
-          </a:prstGeom>
-          <a:solidFill>
-            <a:srgbClr val="174560"/>
-          </a:solidFill>
-          <a:ln w="15875">
-            <a:solidFill>
-              <a:srgbClr val="4F98C0"/>
-            </a:solidFill>
-            <a:prstDash val="solid"/>
-          </a:ln>
-        </p:spPr>
-      </p:sp>
-      <p:sp>
-        <p:nvSpPr>
-          <p:cNvPr id="7" name="Text 5"/>
-          <p:cNvSpPr/>
-          <p:nvPr/>
-        </p:nvSpPr>
-        <p:spPr>
-          <a:xfrm>
-            <a:off x="1005840" y="4224528"/>
-            <a:ext cx="3657600" cy="457200"/>
+            <a:endParaRPr lang="en-US" sz="1450" dirty="0"/>
+          </a:p>
+        </p:txBody>
+      </p:sp>
+      <p:sp>
+        <p:nvSpPr>
+          <p:cNvPr id="6" name="Text 4"/>
+          <p:cNvSpPr/>
+          <p:nvPr/>
+        </p:nvSpPr>
+        <p:spPr>
+          <a:xfrm>
+            <a:off x="731520" y="4114800"/>
+            <a:ext cx="2377440" cy="548640"/>
           </a:xfrm>
           <a:prstGeom prst="rect">
             <a:avLst/>
@@ -3348,7 +3333,7 @@
               <a:buNone/>
             </a:pPr>
             <a:r>
-              <a:rPr lang="en-US" sz="1900" b="1" dirty="0">
+              <a:rPr lang="en-US" sz="2200" b="1" dirty="0">
                 <a:solidFill>
                   <a:srgbClr val="4F98C0"/>
                 </a:solidFill>
@@ -3358,9 +3343,32 @@
               </a:rPr>
               <a:t>Solution</a:t>
             </a:r>
-            <a:endParaRPr lang="en-US" sz="1900" dirty="0"/>
-          </a:p>
-        </p:txBody>
+            <a:endParaRPr lang="en-US" sz="2200" dirty="0"/>
+          </a:p>
+        </p:txBody>
+      </p:sp>
+      <p:sp>
+        <p:nvSpPr>
+          <p:cNvPr id="7" name="Shape 5"/>
+          <p:cNvSpPr/>
+          <p:nvPr/>
+        </p:nvSpPr>
+        <p:spPr>
+          <a:xfrm>
+            <a:off x="3200400" y="4069080"/>
+            <a:ext cx="0" cy="1737360"/>
+          </a:xfrm>
+          <a:prstGeom prst="line">
+            <a:avLst/>
+          </a:prstGeom>
+          <a:noFill/>
+          <a:ln w="25400">
+            <a:solidFill>
+              <a:srgbClr val="4F98C0"/>
+            </a:solidFill>
+            <a:prstDash val="solid"/>
+          </a:ln>
+        </p:spPr>
       </p:sp>
       <p:sp>
         <p:nvSpPr>
@@ -3370,8 +3378,8 @@
         </p:nvSpPr>
         <p:spPr>
           <a:xfrm>
-            <a:off x="1005840" y="4700016"/>
-            <a:ext cx="9966960" cy="1188720"/>
+            <a:off x="3474720" y="4069080"/>
+            <a:ext cx="7955280" cy="1874520"/>
           </a:xfrm>
           <a:prstGeom prst="rect">
             <a:avLst/>
@@ -3385,12 +3393,12 @@
           <a:p>
             <a:pPr indent="0" marL="0">
               <a:lnSpc>
-                <a:spcPct val="105000"/>
+                <a:spcPct val="110000"/>
               </a:lnSpc>
               <a:buNone/>
             </a:pPr>
             <a:r>
-              <a:rPr lang="en-US" sz="1300" dirty="0">
+              <a:rPr lang="en-US" sz="1450" dirty="0">
                 <a:solidFill>
                   <a:srgbClr val="CEE2EE"/>
                 </a:solidFill>
@@ -3400,7 +3408,7 @@
               </a:rPr>
               <a:t>Open the real page in a real browser and read its network requests — three 404s, visible immediately. Re-upload preserving the exact paths the page asks for, then re-verify by watching the item count climb across live reloads. The same live run also exposed a count-only scan undercount and one-message-per-aggregate sends, both fixed.</a:t>
             </a:r>
-            <a:endParaRPr lang="en-US" sz="1300" dirty="0"/>
+            <a:endParaRPr lang="en-US" sz="1450" dirty="0"/>
           </a:p>
         </p:txBody>
       </p:sp>

--- a/ppt/GopiKrishnan_X25112627_marine-vessel-monitoring.pptx
+++ b/ppt/GopiKrishnan_X25112627_marine-vessel-monitoring.pptx
@@ -3147,7 +3147,7 @@
     <p:bg>
       <p:bgPr>
         <a:solidFill>
-          <a:srgbClr val="0E2436"/>
+          <a:srgbClr val="FFFFFF"/>
         </a:solidFill>
       </p:bgPr>
     </p:bg>
@@ -3173,7 +3173,7 @@
         </p:nvSpPr>
         <p:spPr>
           <a:xfrm>
-            <a:off x="640080" y="594360"/>
+            <a:off x="640080" y="502920"/>
             <a:ext cx="10972800" cy="822960"/>
           </a:xfrm>
           <a:prstGeom prst="rect">
@@ -3192,7 +3192,7 @@
             <a:r>
               <a:rPr lang="en-US" sz="2800" b="1" dirty="0">
                 <a:solidFill>
-                  <a:srgbClr val="FFFFFF"/>
+                  <a:srgbClr val="102636"/>
                 </a:solidFill>
                 <a:latin typeface="Times New Roman" pitchFamily="34" charset="0"/>
                 <a:ea typeface="Times New Roman" pitchFamily="34" charset="-122"/>
@@ -3229,7 +3229,7 @@
               <a:buNone/>
             </a:pPr>
             <a:r>
-              <a:rPr lang="en-US" sz="2200" b="1" dirty="0">
+              <a:rPr lang="en-US" sz="2300" b="1" dirty="0">
                 <a:solidFill>
                   <a:srgbClr val="E5A83C"/>
                 </a:solidFill>
@@ -3239,7 +3239,7 @@
               </a:rPr>
               <a:t>Problem</a:t>
             </a:r>
-            <a:endParaRPr lang="en-US" sz="2200" dirty="0"/>
+            <a:endParaRPr lang="en-US" sz="2300" dirty="0"/>
           </a:p>
         </p:txBody>
       </p:sp>
@@ -3252,13 +3252,13 @@
         <p:spPr>
           <a:xfrm>
             <a:off x="3200400" y="1920240"/>
-            <a:ext cx="0" cy="1737360"/>
+            <a:ext cx="0" cy="1783080"/>
           </a:xfrm>
           <a:prstGeom prst="line">
             <a:avLst/>
           </a:prstGeom>
           <a:noFill/>
-          <a:ln w="25400">
+          <a:ln w="31750">
             <a:solidFill>
               <a:srgbClr val="E5A83C"/>
             </a:solidFill>
@@ -3275,7 +3275,7 @@
         <p:spPr>
           <a:xfrm>
             <a:off x="3474720" y="1920240"/>
-            <a:ext cx="7955280" cy="1874520"/>
+            <a:ext cx="7955280" cy="1920240"/>
           </a:xfrm>
           <a:prstGeom prst="rect">
             <a:avLst/>
@@ -3289,14 +3289,14 @@
           <a:p>
             <a:pPr indent="0" marL="0">
               <a:lnSpc>
-                <a:spcPct val="110000"/>
+                <a:spcPct val="112000"/>
               </a:lnSpc>
               <a:buNone/>
             </a:pPr>
             <a:r>
               <a:rPr lang="en-US" sz="1450" dirty="0">
                 <a:solidFill>
-                  <a:srgbClr val="CEE2EE"/>
+                  <a:srgbClr val="102636"/>
                 </a:solidFill>
                 <a:latin typeface="Calibri" pitchFamily="34" charset="0"/>
                 <a:ea typeface="Calibri" pitchFamily="34" charset="-122"/>
@@ -3333,9 +3333,9 @@
               <a:buNone/>
             </a:pPr>
             <a:r>
-              <a:rPr lang="en-US" sz="2200" b="1" dirty="0">
+              <a:rPr lang="en-US" sz="2300" b="1" dirty="0">
                 <a:solidFill>
-                  <a:srgbClr val="4F98C0"/>
+                  <a:srgbClr val="1E76A6"/>
                 </a:solidFill>
                 <a:latin typeface="Times New Roman" pitchFamily="34" charset="0"/>
                 <a:ea typeface="Times New Roman" pitchFamily="34" charset="-122"/>
@@ -3343,7 +3343,7 @@
               </a:rPr>
               <a:t>Solution</a:t>
             </a:r>
-            <a:endParaRPr lang="en-US" sz="2200" dirty="0"/>
+            <a:endParaRPr lang="en-US" sz="2300" dirty="0"/>
           </a:p>
         </p:txBody>
       </p:sp>
@@ -3356,15 +3356,15 @@
         <p:spPr>
           <a:xfrm>
             <a:off x="3200400" y="4069080"/>
-            <a:ext cx="0" cy="1737360"/>
+            <a:ext cx="0" cy="1783080"/>
           </a:xfrm>
           <a:prstGeom prst="line">
             <a:avLst/>
           </a:prstGeom>
           <a:noFill/>
-          <a:ln w="25400">
+          <a:ln w="31750">
             <a:solidFill>
-              <a:srgbClr val="4F98C0"/>
+              <a:srgbClr val="1E76A6"/>
             </a:solidFill>
             <a:prstDash val="solid"/>
           </a:ln>
@@ -3379,7 +3379,7 @@
         <p:spPr>
           <a:xfrm>
             <a:off x="3474720" y="4069080"/>
-            <a:ext cx="7955280" cy="1874520"/>
+            <a:ext cx="7955280" cy="1920240"/>
           </a:xfrm>
           <a:prstGeom prst="rect">
             <a:avLst/>
@@ -3393,14 +3393,14 @@
           <a:p>
             <a:pPr indent="0" marL="0">
               <a:lnSpc>
-                <a:spcPct val="110000"/>
+                <a:spcPct val="112000"/>
               </a:lnSpc>
               <a:buNone/>
             </a:pPr>
             <a:r>
               <a:rPr lang="en-US" sz="1450" dirty="0">
                 <a:solidFill>
-                  <a:srgbClr val="CEE2EE"/>
+                  <a:srgbClr val="102636"/>
                 </a:solidFill>
                 <a:latin typeface="Calibri" pitchFamily="34" charset="0"/>
                 <a:ea typeface="Calibri" pitchFamily="34" charset="-122"/>

--- a/ppt/GopiKrishnan_X25112627_marine-vessel-monitoring.pptx
+++ b/ppt/GopiKrishnan_X25112627_marine-vessel-monitoring.pptx
@@ -1150,8 +1150,8 @@
         </p:nvSpPr>
         <p:spPr>
           <a:xfrm>
-            <a:off x="640080" y="914400"/>
-            <a:ext cx="10972800" cy="1280160"/>
+            <a:off x="640080" y="777240"/>
+            <a:ext cx="11064240" cy="2103120"/>
           </a:xfrm>
           <a:prstGeom prst="rect">
             <a:avLst/>
@@ -1164,10 +1164,13 @@
           <a:lstStyle/>
           <a:p>
             <a:pPr indent="0" marL="0">
-              <a:buNone/>
-            </a:pPr>
-            <a:r>
-              <a:rPr lang="en-US" sz="3600" b="1" dirty="0">
+              <a:lnSpc>
+                <a:spcPct val="98000"/>
+              </a:lnSpc>
+              <a:buNone/>
+            </a:pPr>
+            <a:r>
+              <a:rPr lang="en-US" sz="5000" b="1" dirty="0">
                 <a:solidFill>
                   <a:srgbClr val="FFFFFF"/>
                 </a:solidFill>
@@ -1177,7 +1180,7 @@
               </a:rPr>
               <a:t>Marine Vessel Condition Monitoring</a:t>
             </a:r>
-            <a:endParaRPr lang="en-US" sz="3600" dirty="0"/>
+            <a:endParaRPr lang="en-US" sz="5000" dirty="0"/>
           </a:p>
         </p:txBody>
       </p:sp>
@@ -1189,7 +1192,7 @@
         </p:nvSpPr>
         <p:spPr>
           <a:xfrm>
-            <a:off x="658368" y="2148840"/>
+            <a:off x="658368" y="2971800"/>
             <a:ext cx="10972800" cy="365760"/>
           </a:xfrm>
           <a:prstGeom prst="rect">
@@ -1228,8 +1231,8 @@
         </p:nvSpPr>
         <p:spPr>
           <a:xfrm>
-            <a:off x="658368" y="2697480"/>
-            <a:ext cx="10424160" cy="1371600"/>
+            <a:off x="658368" y="3611880"/>
+            <a:ext cx="10424160" cy="1280160"/>
           </a:xfrm>
           <a:prstGeom prst="rect">
             <a:avLst/>
@@ -1243,12 +1246,12 @@
           <a:p>
             <a:pPr indent="0" marL="0">
               <a:lnSpc>
-                <a:spcPct val="110000"/>
+                <a:spcPct val="108000"/>
               </a:lnSpc>
               <a:buNone/>
             </a:pPr>
             <a:r>
-              <a:rPr lang="en-US" sz="2000" dirty="0">
+              <a:rPr lang="en-US" sz="1900" dirty="0">
                 <a:solidFill>
                   <a:srgbClr val="CEE2EE"/>
                 </a:solidFill>
@@ -1258,7 +1261,7 @@
               </a:rPr>
               <a:t>Between fixed rounds the bridge is blind — a fuel-burn spike, a ballast imbalance or rising hull vibration surfaces only at the next check, and the raw data cannot fit the ship-to-shore link.</a:t>
             </a:r>
-            <a:endParaRPr lang="en-US" sz="2000" dirty="0"/>
+            <a:endParaRPr lang="en-US" sz="1900" dirty="0"/>
           </a:p>
         </p:txBody>
       </p:sp>
@@ -1270,7 +1273,7 @@
         </p:nvSpPr>
         <p:spPr>
           <a:xfrm>
-            <a:off x="658368" y="4206240"/>
+            <a:off x="658368" y="5074920"/>
             <a:ext cx="2651760" cy="566928"/>
           </a:xfrm>
           <a:prstGeom prst="roundRect">
@@ -1297,7 +1300,7 @@
         </p:nvSpPr>
         <p:spPr>
           <a:xfrm>
-            <a:off x="658368" y="4206240"/>
+            <a:off x="658368" y="5074920"/>
             <a:ext cx="2651760" cy="566928"/>
           </a:xfrm>
           <a:prstGeom prst="rect">
@@ -1336,7 +1339,7 @@
         </p:nvSpPr>
         <p:spPr>
           <a:xfrm>
-            <a:off x="3538728" y="4206240"/>
+            <a:off x="3538728" y="5074920"/>
             <a:ext cx="2651760" cy="566928"/>
           </a:xfrm>
           <a:prstGeom prst="roundRect">
@@ -1363,7 +1366,7 @@
         </p:nvSpPr>
         <p:spPr>
           <a:xfrm>
-            <a:off x="3538728" y="4206240"/>
+            <a:off x="3538728" y="5074920"/>
             <a:ext cx="2651760" cy="566928"/>
           </a:xfrm>
           <a:prstGeom prst="rect">
@@ -1402,7 +1405,7 @@
         </p:nvSpPr>
         <p:spPr>
           <a:xfrm>
-            <a:off x="6419088" y="4206240"/>
+            <a:off x="6419088" y="5074920"/>
             <a:ext cx="2651760" cy="566928"/>
           </a:xfrm>
           <a:prstGeom prst="roundRect">
@@ -1429,7 +1432,7 @@
         </p:nvSpPr>
         <p:spPr>
           <a:xfrm>
-            <a:off x="6419088" y="4206240"/>
+            <a:off x="6419088" y="5074920"/>
             <a:ext cx="2651760" cy="566928"/>
           </a:xfrm>
           <a:prstGeom prst="rect">
@@ -1468,8 +1471,8 @@
         </p:nvSpPr>
         <p:spPr>
           <a:xfrm>
-            <a:off x="658368" y="6126480"/>
-            <a:ext cx="10972800" cy="365760"/>
+            <a:off x="658368" y="6355080"/>
+            <a:ext cx="10972800" cy="320040"/>
           </a:xfrm>
           <a:prstGeom prst="rect">
             <a:avLst/>
@@ -1485,7 +1488,7 @@
               <a:buNone/>
             </a:pPr>
             <a:r>
-              <a:rPr lang="en-US" sz="1300" dirty="0">
+              <a:rPr lang="en-US" sz="1250" dirty="0">
                 <a:solidFill>
                   <a:srgbClr val="557280"/>
                 </a:solidFill>
@@ -1495,7 +1498,7 @@
               </a:rPr>
               <a:t>Fog &amp; Edge Computing (H9FECC)   ·   deployed live on AWS</a:t>
             </a:r>
-            <a:endParaRPr lang="en-US" sz="1300" dirty="0"/>
+            <a:endParaRPr lang="en-US" sz="1250" dirty="0"/>
           </a:p>
         </p:txBody>
       </p:sp>
@@ -1578,12 +1581,12 @@
         </p:nvSpPr>
         <p:spPr>
           <a:xfrm>
-            <a:off x="640080" y="1874520"/>
-            <a:ext cx="2286000" cy="1280160"/>
+            <a:off x="640080" y="1554480"/>
+            <a:ext cx="3200400" cy="3383280"/>
           </a:xfrm>
           <a:prstGeom prst="roundRect">
             <a:avLst>
-              <a:gd name="adj" fmla="val 7143"/>
+              <a:gd name="adj" fmla="val 2857"/>
             </a:avLst>
           </a:prstGeom>
           <a:solidFill>
@@ -1599,147 +1602,63 @@
       </p:sp>
       <p:sp>
         <p:nvSpPr>
-          <p:cNvPr id="4" name="Shape 2"/>
-          <p:cNvSpPr/>
-          <p:nvPr/>
-        </p:nvSpPr>
-        <p:spPr>
-          <a:xfrm>
-            <a:off x="1691640" y="2039112"/>
-            <a:ext cx="182880" cy="182880"/>
-          </a:xfrm>
-          <a:prstGeom prst="ellipse">
-            <a:avLst/>
-          </a:prstGeom>
-          <a:solidFill>
-            <a:srgbClr val="4F98C0"/>
-          </a:solidFill>
-          <a:ln/>
-        </p:spPr>
-      </p:sp>
-      <p:sp>
-        <p:nvSpPr>
-          <p:cNvPr id="5" name="Text 3"/>
-          <p:cNvSpPr/>
-          <p:nvPr/>
-        </p:nvSpPr>
-        <p:spPr>
-          <a:xfrm>
-            <a:off x="612648" y="2258568"/>
-            <a:ext cx="2340864" cy="365760"/>
-          </a:xfrm>
-          <a:prstGeom prst="rect">
-            <a:avLst/>
-          </a:prstGeom>
-          <a:noFill/>
-          <a:ln/>
-        </p:spPr>
-        <p:txBody>
-          <a:bodyPr wrap="square" lIns="0" tIns="0" rIns="0" bIns="0" rtlCol="0" anchor="ctr"/>
+          <p:cNvPr id="4" name="Text 2"/>
+          <p:cNvSpPr/>
+          <p:nvPr/>
+        </p:nvSpPr>
+        <p:spPr>
+          <a:xfrm>
+            <a:off x="640080" y="1691640"/>
+            <a:ext cx="3200400" cy="365760"/>
+          </a:xfrm>
+          <a:prstGeom prst="rect">
+            <a:avLst/>
+          </a:prstGeom>
+          <a:noFill/>
+          <a:ln/>
+        </p:spPr>
+        <p:txBody>
+          <a:bodyPr wrap="square" rtlCol="0" anchor="ctr"/>
           <a:lstStyle/>
           <a:p>
             <a:pPr algn="ctr" indent="0" marL="0">
               <a:buNone/>
             </a:pPr>
             <a:r>
-              <a:rPr lang="en-US" sz="1450" b="1" dirty="0">
-                <a:solidFill>
-                  <a:srgbClr val="102636"/>
+              <a:rPr lang="en-US" sz="1200" b="1" spc="300" kern="0" dirty="0">
+                <a:solidFill>
+                  <a:srgbClr val="4F98C0"/>
                 </a:solidFill>
                 <a:latin typeface="Calibri" pitchFamily="34" charset="0"/>
                 <a:ea typeface="Calibri" pitchFamily="34" charset="-122"/>
                 <a:cs typeface="Calibri" pitchFamily="34" charset="-120"/>
               </a:rPr>
-              <a:t>Vessel sensors</a:t>
-            </a:r>
-            <a:endParaRPr lang="en-US" sz="1450" dirty="0"/>
-          </a:p>
-        </p:txBody>
-      </p:sp>
-      <p:sp>
-        <p:nvSpPr>
-          <p:cNvPr id="6" name="Text 4"/>
-          <p:cNvSpPr/>
-          <p:nvPr/>
-        </p:nvSpPr>
-        <p:spPr>
-          <a:xfrm>
-            <a:off x="640080" y="2606040"/>
-            <a:ext cx="2286000" cy="411480"/>
-          </a:xfrm>
-          <a:prstGeom prst="rect">
-            <a:avLst/>
-          </a:prstGeom>
-          <a:noFill/>
-          <a:ln/>
-        </p:spPr>
-        <p:txBody>
-          <a:bodyPr wrap="square" lIns="0" tIns="0" rIns="0" bIns="0" rtlCol="0" anchor="t"/>
-          <a:lstStyle/>
-          <a:p>
-            <a:pPr algn="ctr" indent="0" marL="0">
-              <a:buNone/>
-            </a:pPr>
-            <a:r>
-              <a:rPr lang="en-US" sz="1050" dirty="0">
-                <a:solidFill>
-                  <a:srgbClr val="557280"/>
-                </a:solidFill>
-                <a:latin typeface="Calibri" pitchFamily="34" charset="0"/>
-                <a:ea typeface="Calibri" pitchFamily="34" charset="-122"/>
-                <a:cs typeface="Calibri" pitchFamily="34" charset="-120"/>
-              </a:rPr>
-              <a:t>10 · 2 vessels</a:t>
-            </a:r>
-            <a:endParaRPr lang="en-US" sz="1050" dirty="0"/>
-          </a:p>
-        </p:txBody>
-      </p:sp>
-      <p:sp>
-        <p:nvSpPr>
-          <p:cNvPr id="7" name="Shape 5"/>
-          <p:cNvSpPr/>
-          <p:nvPr/>
-        </p:nvSpPr>
-        <p:spPr>
-          <a:xfrm>
-            <a:off x="2944368" y="2514600"/>
-            <a:ext cx="1975104" cy="0"/>
-          </a:xfrm>
-          <a:prstGeom prst="line">
-            <a:avLst/>
-          </a:prstGeom>
-          <a:noFill/>
-          <a:ln w="25400">
-            <a:solidFill>
-              <a:srgbClr val="4F98C0"/>
-            </a:solidFill>
-            <a:prstDash val="solid"/>
-            <a:headEnd type="none"/>
-            <a:tailEnd type="triangle"/>
-          </a:ln>
-        </p:spPr>
-      </p:sp>
-      <p:sp>
-        <p:nvSpPr>
-          <p:cNvPr id="8" name="Shape 6"/>
-          <p:cNvSpPr/>
-          <p:nvPr/>
-        </p:nvSpPr>
-        <p:spPr>
-          <a:xfrm>
-            <a:off x="4937760" y="1874520"/>
-            <a:ext cx="2286000" cy="1280160"/>
+              <a:t>EDGE</a:t>
+            </a:r>
+            <a:endParaRPr lang="en-US" sz="1200" dirty="0"/>
+          </a:p>
+        </p:txBody>
+      </p:sp>
+      <p:sp>
+        <p:nvSpPr>
+          <p:cNvPr id="5" name="Shape 3"/>
+          <p:cNvSpPr/>
+          <p:nvPr/>
+        </p:nvSpPr>
+        <p:spPr>
+          <a:xfrm>
+            <a:off x="914400" y="2286000"/>
+            <a:ext cx="2651760" cy="1005840"/>
           </a:xfrm>
           <a:prstGeom prst="roundRect">
             <a:avLst>
-              <a:gd name="adj" fmla="val 7143"/>
+              <a:gd name="adj" fmla="val 7273"/>
             </a:avLst>
           </a:prstGeom>
           <a:solidFill>
-            <a:srgbClr val="EDF4F9"/>
-          </a:solidFill>
-          <a:ln w="19050">
+            <a:srgbClr val="FFFFFF"/>
+          </a:solidFill>
+          <a:ln w="15240">
             <a:solidFill>
               <a:srgbClr val="4F98C0"/>
             </a:solidFill>
@@ -1749,34 +1668,14 @@
       </p:sp>
       <p:sp>
         <p:nvSpPr>
-          <p:cNvPr id="9" name="Shape 7"/>
-          <p:cNvSpPr/>
-          <p:nvPr/>
-        </p:nvSpPr>
-        <p:spPr>
-          <a:xfrm>
-            <a:off x="5989320" y="2039112"/>
-            <a:ext cx="182880" cy="182880"/>
-          </a:xfrm>
-          <a:prstGeom prst="ellipse">
-            <a:avLst/>
-          </a:prstGeom>
-          <a:solidFill>
-            <a:srgbClr val="4F98C0"/>
-          </a:solidFill>
-          <a:ln/>
-        </p:spPr>
-      </p:sp>
-      <p:sp>
-        <p:nvSpPr>
-          <p:cNvPr id="10" name="Text 8"/>
-          <p:cNvSpPr/>
-          <p:nvPr/>
-        </p:nvSpPr>
-        <p:spPr>
-          <a:xfrm>
-            <a:off x="4910328" y="2258568"/>
-            <a:ext cx="2340864" cy="365760"/>
+          <p:cNvPr id="6" name="Text 4"/>
+          <p:cNvSpPr/>
+          <p:nvPr/>
+        </p:nvSpPr>
+        <p:spPr>
+          <a:xfrm>
+            <a:off x="914400" y="2432304"/>
+            <a:ext cx="2651760" cy="365760"/>
           </a:xfrm>
           <a:prstGeom prst="rect">
             <a:avLst/>
@@ -1792,7 +1691,7 @@
               <a:buNone/>
             </a:pPr>
             <a:r>
-              <a:rPr lang="en-US" sz="1450" b="1" dirty="0">
+              <a:rPr lang="en-US" sz="1400" b="1" dirty="0">
                 <a:solidFill>
                   <a:srgbClr val="102636"/>
                 </a:solidFill>
@@ -1800,38 +1699,38 @@
                 <a:ea typeface="Calibri" pitchFamily="34" charset="-122"/>
                 <a:cs typeface="Calibri" pitchFamily="34" charset="-120"/>
               </a:rPr>
-              <a:t>Fog node</a:t>
-            </a:r>
-            <a:endParaRPr lang="en-US" sz="1450" dirty="0"/>
-          </a:p>
-        </p:txBody>
-      </p:sp>
-      <p:sp>
-        <p:nvSpPr>
-          <p:cNvPr id="11" name="Text 9"/>
-          <p:cNvSpPr/>
-          <p:nvPr/>
-        </p:nvSpPr>
-        <p:spPr>
-          <a:xfrm>
-            <a:off x="4937760" y="2606040"/>
-            <a:ext cx="2286000" cy="411480"/>
-          </a:xfrm>
-          <a:prstGeom prst="rect">
-            <a:avLst/>
-          </a:prstGeom>
-          <a:noFill/>
-          <a:ln/>
-        </p:spPr>
-        <p:txBody>
-          <a:bodyPr wrap="square" lIns="0" tIns="0" rIns="0" bIns="0" rtlCol="0" anchor="t"/>
+              <a:t>Vessel sensors</a:t>
+            </a:r>
+            <a:endParaRPr lang="en-US" sz="1400" dirty="0"/>
+          </a:p>
+        </p:txBody>
+      </p:sp>
+      <p:sp>
+        <p:nvSpPr>
+          <p:cNvPr id="7" name="Text 5"/>
+          <p:cNvSpPr/>
+          <p:nvPr/>
+        </p:nvSpPr>
+        <p:spPr>
+          <a:xfrm>
+            <a:off x="914400" y="2816352"/>
+            <a:ext cx="2651760" cy="365760"/>
+          </a:xfrm>
+          <a:prstGeom prst="rect">
+            <a:avLst/>
+          </a:prstGeom>
+          <a:noFill/>
+          <a:ln/>
+        </p:spPr>
+        <p:txBody>
+          <a:bodyPr wrap="square" lIns="0" tIns="0" rIns="0" bIns="0" rtlCol="0" anchor="ctr"/>
           <a:lstStyle/>
           <a:p>
             <a:pPr algn="ctr" indent="0" marL="0">
               <a:buNone/>
             </a:pPr>
             <a:r>
-              <a:rPr lang="en-US" sz="1050" dirty="0">
+              <a:rPr lang="en-US" sz="1000" dirty="0">
                 <a:solidFill>
                   <a:srgbClr val="557280"/>
                 </a:solidFill>
@@ -1839,51 +1738,155 @@
                 <a:ea typeface="Calibri" pitchFamily="34" charset="-122"/>
                 <a:cs typeface="Calibri" pitchFamily="34" charset="-120"/>
               </a:rPr>
-              <a:t>window · aggregate · alert</a:t>
-            </a:r>
-            <a:endParaRPr lang="en-US" sz="1050" dirty="0"/>
-          </a:p>
-        </p:txBody>
-      </p:sp>
-      <p:sp>
-        <p:nvSpPr>
-          <p:cNvPr id="12" name="Shape 10"/>
-          <p:cNvSpPr/>
-          <p:nvPr/>
-        </p:nvSpPr>
-        <p:spPr>
-          <a:xfrm>
-            <a:off x="7242048" y="2514600"/>
-            <a:ext cx="1975104" cy="0"/>
-          </a:xfrm>
-          <a:prstGeom prst="line">
-            <a:avLst/>
-          </a:prstGeom>
-          <a:noFill/>
-          <a:ln w="25400">
+              <a:t>10 · 2 vessels</a:t>
+            </a:r>
+            <a:endParaRPr lang="en-US" sz="1000" dirty="0"/>
+          </a:p>
+        </p:txBody>
+      </p:sp>
+      <p:sp>
+        <p:nvSpPr>
+          <p:cNvPr id="8" name="Shape 6"/>
+          <p:cNvSpPr/>
+          <p:nvPr/>
+        </p:nvSpPr>
+        <p:spPr>
+          <a:xfrm>
+            <a:off x="914400" y="3520440"/>
+            <a:ext cx="2651760" cy="1005840"/>
+          </a:xfrm>
+          <a:prstGeom prst="roundRect">
+            <a:avLst>
+              <a:gd name="adj" fmla="val 7273"/>
+            </a:avLst>
+          </a:prstGeom>
+          <a:solidFill>
+            <a:srgbClr val="FFFFFF"/>
+          </a:solidFill>
+          <a:ln w="15240">
             <a:solidFill>
               <a:srgbClr val="4F98C0"/>
             </a:solidFill>
             <a:prstDash val="solid"/>
-            <a:headEnd type="none"/>
+          </a:ln>
+        </p:spPr>
+      </p:sp>
+      <p:sp>
+        <p:nvSpPr>
+          <p:cNvPr id="9" name="Text 7"/>
+          <p:cNvSpPr/>
+          <p:nvPr/>
+        </p:nvSpPr>
+        <p:spPr>
+          <a:xfrm>
+            <a:off x="914400" y="3666744"/>
+            <a:ext cx="2651760" cy="365760"/>
+          </a:xfrm>
+          <a:prstGeom prst="rect">
+            <a:avLst/>
+          </a:prstGeom>
+          <a:noFill/>
+          <a:ln/>
+        </p:spPr>
+        <p:txBody>
+          <a:bodyPr wrap="square" lIns="0" tIns="0" rIns="0" bIns="0" rtlCol="0" anchor="ctr"/>
+          <a:lstStyle/>
+          <a:p>
+            <a:pPr algn="ctr" indent="0" marL="0">
+              <a:buNone/>
+            </a:pPr>
+            <a:r>
+              <a:rPr lang="en-US" sz="1400" b="1" dirty="0">
+                <a:solidFill>
+                  <a:srgbClr val="102636"/>
+                </a:solidFill>
+                <a:latin typeface="Calibri" pitchFamily="34" charset="0"/>
+                <a:ea typeface="Calibri" pitchFamily="34" charset="-122"/>
+                <a:cs typeface="Calibri" pitchFamily="34" charset="-120"/>
+              </a:rPr>
+              <a:t>Fog node</a:t>
+            </a:r>
+            <a:endParaRPr lang="en-US" sz="1400" dirty="0"/>
+          </a:p>
+        </p:txBody>
+      </p:sp>
+      <p:sp>
+        <p:nvSpPr>
+          <p:cNvPr id="10" name="Text 8"/>
+          <p:cNvSpPr/>
+          <p:nvPr/>
+        </p:nvSpPr>
+        <p:spPr>
+          <a:xfrm>
+            <a:off x="914400" y="4050792"/>
+            <a:ext cx="2651760" cy="365760"/>
+          </a:xfrm>
+          <a:prstGeom prst="rect">
+            <a:avLst/>
+          </a:prstGeom>
+          <a:noFill/>
+          <a:ln/>
+        </p:spPr>
+        <p:txBody>
+          <a:bodyPr wrap="square" lIns="0" tIns="0" rIns="0" bIns="0" rtlCol="0" anchor="ctr"/>
+          <a:lstStyle/>
+          <a:p>
+            <a:pPr algn="ctr" indent="0" marL="0">
+              <a:buNone/>
+            </a:pPr>
+            <a:r>
+              <a:rPr lang="en-US" sz="1000" dirty="0">
+                <a:solidFill>
+                  <a:srgbClr val="557280"/>
+                </a:solidFill>
+                <a:latin typeface="Calibri" pitchFamily="34" charset="0"/>
+                <a:ea typeface="Calibri" pitchFamily="34" charset="-122"/>
+                <a:cs typeface="Calibri" pitchFamily="34" charset="-120"/>
+              </a:rPr>
+              <a:t>window · aggregate · alert</a:t>
+            </a:r>
+            <a:endParaRPr lang="en-US" sz="1000" dirty="0"/>
+          </a:p>
+        </p:txBody>
+      </p:sp>
+      <p:sp>
+        <p:nvSpPr>
+          <p:cNvPr id="11" name="Shape 9"/>
+          <p:cNvSpPr/>
+          <p:nvPr/>
+        </p:nvSpPr>
+        <p:spPr>
+          <a:xfrm>
+            <a:off x="3886200" y="3246120"/>
+            <a:ext cx="502920" cy="0"/>
+          </a:xfrm>
+          <a:prstGeom prst="line">
+            <a:avLst/>
+          </a:prstGeom>
+          <a:noFill/>
+          <a:ln w="31750">
+            <a:solidFill>
+              <a:srgbClr val="0F4E7E"/>
+            </a:solidFill>
+            <a:prstDash val="solid"/>
             <a:tailEnd type="triangle"/>
           </a:ln>
         </p:spPr>
       </p:sp>
       <p:sp>
         <p:nvSpPr>
-          <p:cNvPr id="13" name="Shape 11"/>
-          <p:cNvSpPr/>
-          <p:nvPr/>
-        </p:nvSpPr>
-        <p:spPr>
-          <a:xfrm>
-            <a:off x="9235440" y="1874520"/>
-            <a:ext cx="2286000" cy="1280160"/>
+          <p:cNvPr id="12" name="Shape 10"/>
+          <p:cNvSpPr/>
+          <p:nvPr/>
+        </p:nvSpPr>
+        <p:spPr>
+          <a:xfrm>
+            <a:off x="4572000" y="1554480"/>
+            <a:ext cx="6949440" cy="3383280"/>
           </a:xfrm>
           <a:prstGeom prst="roundRect">
             <a:avLst>
-              <a:gd name="adj" fmla="val 7143"/>
+              <a:gd name="adj" fmla="val 2703"/>
             </a:avLst>
           </a:prstGeom>
           <a:solidFill>
@@ -1899,122 +1902,63 @@
       </p:sp>
       <p:sp>
         <p:nvSpPr>
-          <p:cNvPr id="14" name="Shape 12"/>
-          <p:cNvSpPr/>
-          <p:nvPr/>
-        </p:nvSpPr>
-        <p:spPr>
-          <a:xfrm>
-            <a:off x="10287000" y="2039112"/>
-            <a:ext cx="182880" cy="182880"/>
-          </a:xfrm>
-          <a:prstGeom prst="ellipse">
-            <a:avLst/>
-          </a:prstGeom>
-          <a:solidFill>
-            <a:srgbClr val="0F4E7E"/>
-          </a:solidFill>
-          <a:ln/>
-        </p:spPr>
-      </p:sp>
-      <p:sp>
-        <p:nvSpPr>
-          <p:cNvPr id="15" name="Text 13"/>
-          <p:cNvSpPr/>
-          <p:nvPr/>
-        </p:nvSpPr>
-        <p:spPr>
-          <a:xfrm>
-            <a:off x="9208008" y="2258568"/>
-            <a:ext cx="2340864" cy="365760"/>
-          </a:xfrm>
-          <a:prstGeom prst="rect">
-            <a:avLst/>
-          </a:prstGeom>
-          <a:noFill/>
-          <a:ln/>
-        </p:spPr>
-        <p:txBody>
-          <a:bodyPr wrap="square" lIns="0" tIns="0" rIns="0" bIns="0" rtlCol="0" anchor="ctr"/>
+          <p:cNvPr id="13" name="Text 11"/>
+          <p:cNvSpPr/>
+          <p:nvPr/>
+        </p:nvSpPr>
+        <p:spPr>
+          <a:xfrm>
+            <a:off x="4572000" y="1691640"/>
+            <a:ext cx="6949440" cy="365760"/>
+          </a:xfrm>
+          <a:prstGeom prst="rect">
+            <a:avLst/>
+          </a:prstGeom>
+          <a:noFill/>
+          <a:ln/>
+        </p:spPr>
+        <p:txBody>
+          <a:bodyPr wrap="square" rtlCol="0" anchor="ctr"/>
           <a:lstStyle/>
           <a:p>
             <a:pPr algn="ctr" indent="0" marL="0">
               <a:buNone/>
             </a:pPr>
             <a:r>
-              <a:rPr lang="en-US" sz="1450" b="1" dirty="0">
-                <a:solidFill>
-                  <a:srgbClr val="102636"/>
+              <a:rPr lang="en-US" sz="1200" b="1" spc="200" kern="0" dirty="0">
+                <a:solidFill>
+                  <a:srgbClr val="0F4E7E"/>
                 </a:solidFill>
                 <a:latin typeface="Calibri" pitchFamily="34" charset="0"/>
                 <a:ea typeface="Calibri" pitchFamily="34" charset="-122"/>
                 <a:cs typeface="Calibri" pitchFamily="34" charset="-120"/>
               </a:rPr>
-              <a:t>Amazon SQS</a:t>
-            </a:r>
-            <a:endParaRPr lang="en-US" sz="1450" dirty="0"/>
-          </a:p>
-        </p:txBody>
-      </p:sp>
-      <p:sp>
-        <p:nvSpPr>
-          <p:cNvPr id="16" name="Text 14"/>
-          <p:cNvSpPr/>
-          <p:nvPr/>
-        </p:nvSpPr>
-        <p:spPr>
-          <a:xfrm>
-            <a:off x="9235440" y="2606040"/>
-            <a:ext cx="2286000" cy="411480"/>
-          </a:xfrm>
-          <a:prstGeom prst="rect">
-            <a:avLst/>
-          </a:prstGeom>
-          <a:noFill/>
-          <a:ln/>
-        </p:spPr>
-        <p:txBody>
-          <a:bodyPr wrap="square" lIns="0" tIns="0" rIns="0" bIns="0" rtlCol="0" anchor="t"/>
-          <a:lstStyle/>
-          <a:p>
-            <a:pPr algn="ctr" indent="0" marL="0">
-              <a:buNone/>
-            </a:pPr>
-            <a:r>
-              <a:rPr lang="en-US" sz="1050" dirty="0">
-                <a:solidFill>
-                  <a:srgbClr val="557280"/>
-                </a:solidFill>
-                <a:latin typeface="Calibri" pitchFamily="34" charset="0"/>
-                <a:ea typeface="Calibri" pitchFamily="34" charset="-122"/>
-                <a:cs typeface="Calibri" pitchFamily="34" charset="-120"/>
-              </a:rPr>
-              <a:t>batches ≤10 ashore</a:t>
-            </a:r>
-            <a:endParaRPr lang="en-US" sz="1050" dirty="0"/>
-          </a:p>
-        </p:txBody>
-      </p:sp>
-      <p:sp>
-        <p:nvSpPr>
-          <p:cNvPr id="17" name="Shape 15"/>
-          <p:cNvSpPr/>
-          <p:nvPr/>
-        </p:nvSpPr>
-        <p:spPr>
-          <a:xfrm>
-            <a:off x="9235440" y="3520440"/>
-            <a:ext cx="2286000" cy="1280160"/>
+              <a:t>CLOUD (serverless)</a:t>
+            </a:r>
+            <a:endParaRPr lang="en-US" sz="1200" dirty="0"/>
+          </a:p>
+        </p:txBody>
+      </p:sp>
+      <p:sp>
+        <p:nvSpPr>
+          <p:cNvPr id="14" name="Shape 12"/>
+          <p:cNvSpPr/>
+          <p:nvPr/>
+        </p:nvSpPr>
+        <p:spPr>
+          <a:xfrm>
+            <a:off x="4846320" y="2651760"/>
+            <a:ext cx="1463040" cy="1371600"/>
           </a:xfrm>
           <a:prstGeom prst="roundRect">
             <a:avLst>
-              <a:gd name="adj" fmla="val 7143"/>
+              <a:gd name="adj" fmla="val 5333"/>
             </a:avLst>
           </a:prstGeom>
           <a:solidFill>
-            <a:srgbClr val="EDF4F9"/>
-          </a:solidFill>
-          <a:ln w="19050">
+            <a:srgbClr val="FFFFFF"/>
+          </a:solidFill>
+          <a:ln w="15240">
             <a:solidFill>
               <a:srgbClr val="0F4E7E"/>
             </a:solidFill>
@@ -2024,34 +1968,14 @@
       </p:sp>
       <p:sp>
         <p:nvSpPr>
-          <p:cNvPr id="18" name="Shape 16"/>
-          <p:cNvSpPr/>
-          <p:nvPr/>
-        </p:nvSpPr>
-        <p:spPr>
-          <a:xfrm>
-            <a:off x="10287000" y="3685032"/>
-            <a:ext cx="182880" cy="182880"/>
-          </a:xfrm>
-          <a:prstGeom prst="ellipse">
-            <a:avLst/>
-          </a:prstGeom>
-          <a:solidFill>
-            <a:srgbClr val="0F4E7E"/>
-          </a:solidFill>
-          <a:ln/>
-        </p:spPr>
-      </p:sp>
-      <p:sp>
-        <p:nvSpPr>
-          <p:cNvPr id="19" name="Text 17"/>
-          <p:cNvSpPr/>
-          <p:nvPr/>
-        </p:nvSpPr>
-        <p:spPr>
-          <a:xfrm>
-            <a:off x="9208008" y="3904488"/>
-            <a:ext cx="2340864" cy="365760"/>
+          <p:cNvPr id="15" name="Text 13"/>
+          <p:cNvSpPr/>
+          <p:nvPr/>
+        </p:nvSpPr>
+        <p:spPr>
+          <a:xfrm>
+            <a:off x="4800600" y="2907792"/>
+            <a:ext cx="1554480" cy="457200"/>
           </a:xfrm>
           <a:prstGeom prst="rect">
             <a:avLst/>
@@ -2067,7 +1991,7 @@
               <a:buNone/>
             </a:pPr>
             <a:r>
-              <a:rPr lang="en-US" sz="1450" b="1" dirty="0">
+              <a:rPr lang="en-US" sz="1250" b="1" dirty="0">
                 <a:solidFill>
                   <a:srgbClr val="102636"/>
                 </a:solidFill>
@@ -2075,38 +1999,38 @@
                 <a:ea typeface="Calibri" pitchFamily="34" charset="-122"/>
                 <a:cs typeface="Calibri" pitchFamily="34" charset="-120"/>
               </a:rPr>
-              <a:t>AWS Lambda</a:t>
-            </a:r>
-            <a:endParaRPr lang="en-US" sz="1450" dirty="0"/>
-          </a:p>
-        </p:txBody>
-      </p:sp>
-      <p:sp>
-        <p:nvSpPr>
-          <p:cNvPr id="20" name="Text 18"/>
-          <p:cNvSpPr/>
-          <p:nvPr/>
-        </p:nvSpPr>
-        <p:spPr>
-          <a:xfrm>
-            <a:off x="9235440" y="4251960"/>
-            <a:ext cx="2286000" cy="411480"/>
-          </a:xfrm>
-          <a:prstGeom prst="rect">
-            <a:avLst/>
-          </a:prstGeom>
-          <a:noFill/>
-          <a:ln/>
-        </p:spPr>
-        <p:txBody>
-          <a:bodyPr wrap="square" lIns="0" tIns="0" rIns="0" bIns="0" rtlCol="0" anchor="t"/>
+              <a:t>Amazon SQS</a:t>
+            </a:r>
+            <a:endParaRPr lang="en-US" sz="1250" dirty="0"/>
+          </a:p>
+        </p:txBody>
+      </p:sp>
+      <p:sp>
+        <p:nvSpPr>
+          <p:cNvPr id="16" name="Text 14"/>
+          <p:cNvSpPr/>
+          <p:nvPr/>
+        </p:nvSpPr>
+        <p:spPr>
+          <a:xfrm>
+            <a:off x="4828032" y="3401568"/>
+            <a:ext cx="1499616" cy="457200"/>
+          </a:xfrm>
+          <a:prstGeom prst="rect">
+            <a:avLst/>
+          </a:prstGeom>
+          <a:noFill/>
+          <a:ln/>
+        </p:spPr>
+        <p:txBody>
+          <a:bodyPr wrap="square" lIns="0" tIns="0" rIns="0" bIns="0" rtlCol="0" anchor="ctr"/>
           <a:lstStyle/>
           <a:p>
             <a:pPr algn="ctr" indent="0" marL="0">
               <a:buNone/>
             </a:pPr>
             <a:r>
-              <a:rPr lang="en-US" sz="1050" dirty="0">
+              <a:rPr lang="en-US" sz="900" dirty="0">
                 <a:solidFill>
                   <a:srgbClr val="557280"/>
                 </a:solidFill>
@@ -2114,328 +2038,28 @@
                 <a:ea typeface="Calibri" pitchFamily="34" charset="-122"/>
                 <a:cs typeface="Calibri" pitchFamily="34" charset="-120"/>
               </a:rPr>
-              <a:t>nodejs20 ingest</a:t>
-            </a:r>
-            <a:endParaRPr lang="en-US" sz="1050" dirty="0"/>
-          </a:p>
-        </p:txBody>
-      </p:sp>
-      <p:sp>
-        <p:nvSpPr>
-          <p:cNvPr id="21" name="Shape 19"/>
-          <p:cNvSpPr/>
-          <p:nvPr/>
-        </p:nvSpPr>
-        <p:spPr>
-          <a:xfrm>
-            <a:off x="7242048" y="4160520"/>
-            <a:ext cx="1975104" cy="0"/>
+              <a:t>batches ≤10 ashore</a:t>
+            </a:r>
+            <a:endParaRPr lang="en-US" sz="900" dirty="0"/>
+          </a:p>
+        </p:txBody>
+      </p:sp>
+      <p:sp>
+        <p:nvSpPr>
+          <p:cNvPr id="17" name="Shape 15"/>
+          <p:cNvSpPr/>
+          <p:nvPr/>
+        </p:nvSpPr>
+        <p:spPr>
+          <a:xfrm>
+            <a:off x="6318504" y="3337560"/>
+            <a:ext cx="164592" cy="0"/>
           </a:xfrm>
           <a:prstGeom prst="line">
             <a:avLst/>
           </a:prstGeom>
           <a:noFill/>
-          <a:ln w="25400">
-            <a:solidFill>
-              <a:srgbClr val="4F98C0"/>
-            </a:solidFill>
-            <a:prstDash val="solid"/>
-            <a:headEnd type="triangle"/>
-            <a:tailEnd type="oval"/>
-          </a:ln>
-        </p:spPr>
-      </p:sp>
-      <p:sp>
-        <p:nvSpPr>
-          <p:cNvPr id="22" name="Shape 20"/>
-          <p:cNvSpPr/>
-          <p:nvPr/>
-        </p:nvSpPr>
-        <p:spPr>
-          <a:xfrm>
-            <a:off x="4937760" y="3520440"/>
-            <a:ext cx="2286000" cy="1280160"/>
-          </a:xfrm>
-          <a:prstGeom prst="roundRect">
-            <a:avLst>
-              <a:gd name="adj" fmla="val 7143"/>
-            </a:avLst>
-          </a:prstGeom>
-          <a:solidFill>
-            <a:srgbClr val="EDF4F9"/>
-          </a:solidFill>
-          <a:ln w="19050">
-            <a:solidFill>
-              <a:srgbClr val="0F4E7E"/>
-            </a:solidFill>
-            <a:prstDash val="solid"/>
-          </a:ln>
-        </p:spPr>
-      </p:sp>
-      <p:sp>
-        <p:nvSpPr>
-          <p:cNvPr id="23" name="Shape 21"/>
-          <p:cNvSpPr/>
-          <p:nvPr/>
-        </p:nvSpPr>
-        <p:spPr>
-          <a:xfrm>
-            <a:off x="5989320" y="3685032"/>
-            <a:ext cx="182880" cy="182880"/>
-          </a:xfrm>
-          <a:prstGeom prst="ellipse">
-            <a:avLst/>
-          </a:prstGeom>
-          <a:solidFill>
-            <a:srgbClr val="0F4E7E"/>
-          </a:solidFill>
-          <a:ln/>
-        </p:spPr>
-      </p:sp>
-      <p:sp>
-        <p:nvSpPr>
-          <p:cNvPr id="24" name="Text 22"/>
-          <p:cNvSpPr/>
-          <p:nvPr/>
-        </p:nvSpPr>
-        <p:spPr>
-          <a:xfrm>
-            <a:off x="4910328" y="3904488"/>
-            <a:ext cx="2340864" cy="365760"/>
-          </a:xfrm>
-          <a:prstGeom prst="rect">
-            <a:avLst/>
-          </a:prstGeom>
-          <a:noFill/>
-          <a:ln/>
-        </p:spPr>
-        <p:txBody>
-          <a:bodyPr wrap="square" lIns="0" tIns="0" rIns="0" bIns="0" rtlCol="0" anchor="ctr"/>
-          <a:lstStyle/>
-          <a:p>
-            <a:pPr algn="ctr" indent="0" marL="0">
-              <a:buNone/>
-            </a:pPr>
-            <a:r>
-              <a:rPr lang="en-US" sz="1450" b="1" dirty="0">
-                <a:solidFill>
-                  <a:srgbClr val="102636"/>
-                </a:solidFill>
-                <a:latin typeface="Calibri" pitchFamily="34" charset="0"/>
-                <a:ea typeface="Calibri" pitchFamily="34" charset="-122"/>
-                <a:cs typeface="Calibri" pitchFamily="34" charset="-120"/>
-              </a:rPr>
-              <a:t>DynamoDB</a:t>
-            </a:r>
-            <a:endParaRPr lang="en-US" sz="1450" dirty="0"/>
-          </a:p>
-        </p:txBody>
-      </p:sp>
-      <p:sp>
-        <p:nvSpPr>
-          <p:cNvPr id="25" name="Text 23"/>
-          <p:cNvSpPr/>
-          <p:nvPr/>
-        </p:nvSpPr>
-        <p:spPr>
-          <a:xfrm>
-            <a:off x="4937760" y="4251960"/>
-            <a:ext cx="2286000" cy="411480"/>
-          </a:xfrm>
-          <a:prstGeom prst="rect">
-            <a:avLst/>
-          </a:prstGeom>
-          <a:noFill/>
-          <a:ln/>
-        </p:spPr>
-        <p:txBody>
-          <a:bodyPr wrap="square" lIns="0" tIns="0" rIns="0" bIns="0" rtlCol="0" anchor="t"/>
-          <a:lstStyle/>
-          <a:p>
-            <a:pPr algn="ctr" indent="0" marL="0">
-              <a:buNone/>
-            </a:pPr>
-            <a:r>
-              <a:rPr lang="en-US" sz="1050" dirty="0">
-                <a:solidFill>
-                  <a:srgbClr val="557280"/>
-                </a:solidFill>
-                <a:latin typeface="Calibri" pitchFamily="34" charset="0"/>
-                <a:ea typeface="Calibri" pitchFamily="34" charset="-122"/>
-                <a:cs typeface="Calibri" pitchFamily="34" charset="-120"/>
-              </a:rPr>
-              <a:t>aggregate store</a:t>
-            </a:r>
-            <a:endParaRPr lang="en-US" sz="1050" dirty="0"/>
-          </a:p>
-        </p:txBody>
-      </p:sp>
-      <p:sp>
-        <p:nvSpPr>
-          <p:cNvPr id="26" name="Shape 24"/>
-          <p:cNvSpPr/>
-          <p:nvPr/>
-        </p:nvSpPr>
-        <p:spPr>
-          <a:xfrm>
-            <a:off x="2944368" y="4160520"/>
-            <a:ext cx="1975104" cy="0"/>
-          </a:xfrm>
-          <a:prstGeom prst="line">
-            <a:avLst/>
-          </a:prstGeom>
-          <a:noFill/>
-          <a:ln w="25400">
-            <a:solidFill>
-              <a:srgbClr val="4F98C0"/>
-            </a:solidFill>
-            <a:prstDash val="solid"/>
-            <a:headEnd type="triangle"/>
-            <a:tailEnd type="oval"/>
-          </a:ln>
-        </p:spPr>
-      </p:sp>
-      <p:sp>
-        <p:nvSpPr>
-          <p:cNvPr id="27" name="Shape 25"/>
-          <p:cNvSpPr/>
-          <p:nvPr/>
-        </p:nvSpPr>
-        <p:spPr>
-          <a:xfrm>
-            <a:off x="640080" y="3520440"/>
-            <a:ext cx="2286000" cy="1280160"/>
-          </a:xfrm>
-          <a:prstGeom prst="roundRect">
-            <a:avLst>
-              <a:gd name="adj" fmla="val 7143"/>
-            </a:avLst>
-          </a:prstGeom>
-          <a:solidFill>
-            <a:srgbClr val="EDF4F9"/>
-          </a:solidFill>
-          <a:ln w="19050">
-            <a:solidFill>
-              <a:srgbClr val="1E76A6"/>
-            </a:solidFill>
-            <a:prstDash val="solid"/>
-          </a:ln>
-        </p:spPr>
-      </p:sp>
-      <p:sp>
-        <p:nvSpPr>
-          <p:cNvPr id="28" name="Shape 26"/>
-          <p:cNvSpPr/>
-          <p:nvPr/>
-        </p:nvSpPr>
-        <p:spPr>
-          <a:xfrm>
-            <a:off x="1691640" y="3685032"/>
-            <a:ext cx="182880" cy="182880"/>
-          </a:xfrm>
-          <a:prstGeom prst="ellipse">
-            <a:avLst/>
-          </a:prstGeom>
-          <a:solidFill>
-            <a:srgbClr val="1E76A6"/>
-          </a:solidFill>
-          <a:ln/>
-        </p:spPr>
-      </p:sp>
-      <p:sp>
-        <p:nvSpPr>
-          <p:cNvPr id="29" name="Text 27"/>
-          <p:cNvSpPr/>
-          <p:nvPr/>
-        </p:nvSpPr>
-        <p:spPr>
-          <a:xfrm>
-            <a:off x="612648" y="3904488"/>
-            <a:ext cx="2340864" cy="365760"/>
-          </a:xfrm>
-          <a:prstGeom prst="rect">
-            <a:avLst/>
-          </a:prstGeom>
-          <a:noFill/>
-          <a:ln/>
-        </p:spPr>
-        <p:txBody>
-          <a:bodyPr wrap="square" lIns="0" tIns="0" rIns="0" bIns="0" rtlCol="0" anchor="ctr"/>
-          <a:lstStyle/>
-          <a:p>
-            <a:pPr algn="ctr" indent="0" marL="0">
-              <a:buNone/>
-            </a:pPr>
-            <a:r>
-              <a:rPr lang="en-US" sz="1450" b="1" dirty="0">
-                <a:solidFill>
-                  <a:srgbClr val="102636"/>
-                </a:solidFill>
-                <a:latin typeface="Calibri" pitchFamily="34" charset="0"/>
-                <a:ea typeface="Calibri" pitchFamily="34" charset="-122"/>
-                <a:cs typeface="Calibri" pitchFamily="34" charset="-120"/>
-              </a:rPr>
-              <a:t>API GW + S3</a:t>
-            </a:r>
-            <a:endParaRPr lang="en-US" sz="1450" dirty="0"/>
-          </a:p>
-        </p:txBody>
-      </p:sp>
-      <p:sp>
-        <p:nvSpPr>
-          <p:cNvPr id="30" name="Text 28"/>
-          <p:cNvSpPr/>
-          <p:nvPr/>
-        </p:nvSpPr>
-        <p:spPr>
-          <a:xfrm>
-            <a:off x="640080" y="4251960"/>
-            <a:ext cx="2286000" cy="411480"/>
-          </a:xfrm>
-          <a:prstGeom prst="rect">
-            <a:avLst/>
-          </a:prstGeom>
-          <a:noFill/>
-          <a:ln/>
-        </p:spPr>
-        <p:txBody>
-          <a:bodyPr wrap="square" lIns="0" tIns="0" rIns="0" bIns="0" rtlCol="0" anchor="t"/>
-          <a:lstStyle/>
-          <a:p>
-            <a:pPr algn="ctr" indent="0" marL="0">
-              <a:buNone/>
-            </a:pPr>
-            <a:r>
-              <a:rPr lang="en-US" sz="1050" dirty="0">
-                <a:solidFill>
-                  <a:srgbClr val="557280"/>
-                </a:solidFill>
-                <a:latin typeface="Calibri" pitchFamily="34" charset="0"/>
-                <a:ea typeface="Calibri" pitchFamily="34" charset="-122"/>
-                <a:cs typeface="Calibri" pitchFamily="34" charset="-120"/>
-              </a:rPr>
-              <a:t>bridge console</a:t>
-            </a:r>
-            <a:endParaRPr lang="en-US" sz="1050" dirty="0"/>
-          </a:p>
-        </p:txBody>
-      </p:sp>
-      <p:sp>
-        <p:nvSpPr>
-          <p:cNvPr id="31" name="Shape 29"/>
-          <p:cNvSpPr/>
-          <p:nvPr/>
-        </p:nvSpPr>
-        <p:spPr>
-          <a:xfrm>
-            <a:off x="10378440" y="3154680"/>
-            <a:ext cx="0" cy="365760"/>
-          </a:xfrm>
-          <a:prstGeom prst="line">
-            <a:avLst/>
-          </a:prstGeom>
-          <a:noFill/>
-          <a:ln w="25400">
+          <a:ln w="20320">
             <a:solidFill>
               <a:srgbClr val="4F98C0"/>
             </a:solidFill>
@@ -2446,7 +2070,370 @@
       </p:sp>
       <p:sp>
         <p:nvSpPr>
-          <p:cNvPr id="32" name="Text 30"/>
+          <p:cNvPr id="18" name="Shape 16"/>
+          <p:cNvSpPr/>
+          <p:nvPr/>
+        </p:nvSpPr>
+        <p:spPr>
+          <a:xfrm>
+            <a:off x="6492240" y="2651760"/>
+            <a:ext cx="1463040" cy="1371600"/>
+          </a:xfrm>
+          <a:prstGeom prst="roundRect">
+            <a:avLst>
+              <a:gd name="adj" fmla="val 5333"/>
+            </a:avLst>
+          </a:prstGeom>
+          <a:solidFill>
+            <a:srgbClr val="FFFFFF"/>
+          </a:solidFill>
+          <a:ln w="15240">
+            <a:solidFill>
+              <a:srgbClr val="0F4E7E"/>
+            </a:solidFill>
+            <a:prstDash val="solid"/>
+          </a:ln>
+        </p:spPr>
+      </p:sp>
+      <p:sp>
+        <p:nvSpPr>
+          <p:cNvPr id="19" name="Text 17"/>
+          <p:cNvSpPr/>
+          <p:nvPr/>
+        </p:nvSpPr>
+        <p:spPr>
+          <a:xfrm>
+            <a:off x="6446520" y="2907792"/>
+            <a:ext cx="1554480" cy="457200"/>
+          </a:xfrm>
+          <a:prstGeom prst="rect">
+            <a:avLst/>
+          </a:prstGeom>
+          <a:noFill/>
+          <a:ln/>
+        </p:spPr>
+        <p:txBody>
+          <a:bodyPr wrap="square" lIns="0" tIns="0" rIns="0" bIns="0" rtlCol="0" anchor="ctr"/>
+          <a:lstStyle/>
+          <a:p>
+            <a:pPr algn="ctr" indent="0" marL="0">
+              <a:buNone/>
+            </a:pPr>
+            <a:r>
+              <a:rPr lang="en-US" sz="1250" b="1" dirty="0">
+                <a:solidFill>
+                  <a:srgbClr val="102636"/>
+                </a:solidFill>
+                <a:latin typeface="Calibri" pitchFamily="34" charset="0"/>
+                <a:ea typeface="Calibri" pitchFamily="34" charset="-122"/>
+                <a:cs typeface="Calibri" pitchFamily="34" charset="-120"/>
+              </a:rPr>
+              <a:t>AWS Lambda</a:t>
+            </a:r>
+            <a:endParaRPr lang="en-US" sz="1250" dirty="0"/>
+          </a:p>
+        </p:txBody>
+      </p:sp>
+      <p:sp>
+        <p:nvSpPr>
+          <p:cNvPr id="20" name="Text 18"/>
+          <p:cNvSpPr/>
+          <p:nvPr/>
+        </p:nvSpPr>
+        <p:spPr>
+          <a:xfrm>
+            <a:off x="6473952" y="3401568"/>
+            <a:ext cx="1499616" cy="457200"/>
+          </a:xfrm>
+          <a:prstGeom prst="rect">
+            <a:avLst/>
+          </a:prstGeom>
+          <a:noFill/>
+          <a:ln/>
+        </p:spPr>
+        <p:txBody>
+          <a:bodyPr wrap="square" lIns="0" tIns="0" rIns="0" bIns="0" rtlCol="0" anchor="ctr"/>
+          <a:lstStyle/>
+          <a:p>
+            <a:pPr algn="ctr" indent="0" marL="0">
+              <a:buNone/>
+            </a:pPr>
+            <a:r>
+              <a:rPr lang="en-US" sz="900" dirty="0">
+                <a:solidFill>
+                  <a:srgbClr val="557280"/>
+                </a:solidFill>
+                <a:latin typeface="Calibri" pitchFamily="34" charset="0"/>
+                <a:ea typeface="Calibri" pitchFamily="34" charset="-122"/>
+                <a:cs typeface="Calibri" pitchFamily="34" charset="-120"/>
+              </a:rPr>
+              <a:t>nodejs20 ingest</a:t>
+            </a:r>
+            <a:endParaRPr lang="en-US" sz="900" dirty="0"/>
+          </a:p>
+        </p:txBody>
+      </p:sp>
+      <p:sp>
+        <p:nvSpPr>
+          <p:cNvPr id="21" name="Shape 19"/>
+          <p:cNvSpPr/>
+          <p:nvPr/>
+        </p:nvSpPr>
+        <p:spPr>
+          <a:xfrm>
+            <a:off x="7964424" y="3337560"/>
+            <a:ext cx="164592" cy="0"/>
+          </a:xfrm>
+          <a:prstGeom prst="line">
+            <a:avLst/>
+          </a:prstGeom>
+          <a:noFill/>
+          <a:ln w="20320">
+            <a:solidFill>
+              <a:srgbClr val="4F98C0"/>
+            </a:solidFill>
+            <a:prstDash val="solid"/>
+            <a:tailEnd type="triangle"/>
+          </a:ln>
+        </p:spPr>
+      </p:sp>
+      <p:sp>
+        <p:nvSpPr>
+          <p:cNvPr id="22" name="Shape 20"/>
+          <p:cNvSpPr/>
+          <p:nvPr/>
+        </p:nvSpPr>
+        <p:spPr>
+          <a:xfrm>
+            <a:off x="8138160" y="2651760"/>
+            <a:ext cx="1463040" cy="1371600"/>
+          </a:xfrm>
+          <a:prstGeom prst="roundRect">
+            <a:avLst>
+              <a:gd name="adj" fmla="val 5333"/>
+            </a:avLst>
+          </a:prstGeom>
+          <a:solidFill>
+            <a:srgbClr val="FFFFFF"/>
+          </a:solidFill>
+          <a:ln w="15240">
+            <a:solidFill>
+              <a:srgbClr val="0F4E7E"/>
+            </a:solidFill>
+            <a:prstDash val="solid"/>
+          </a:ln>
+        </p:spPr>
+      </p:sp>
+      <p:sp>
+        <p:nvSpPr>
+          <p:cNvPr id="23" name="Text 21"/>
+          <p:cNvSpPr/>
+          <p:nvPr/>
+        </p:nvSpPr>
+        <p:spPr>
+          <a:xfrm>
+            <a:off x="8092440" y="2907792"/>
+            <a:ext cx="1554480" cy="457200"/>
+          </a:xfrm>
+          <a:prstGeom prst="rect">
+            <a:avLst/>
+          </a:prstGeom>
+          <a:noFill/>
+          <a:ln/>
+        </p:spPr>
+        <p:txBody>
+          <a:bodyPr wrap="square" lIns="0" tIns="0" rIns="0" bIns="0" rtlCol="0" anchor="ctr"/>
+          <a:lstStyle/>
+          <a:p>
+            <a:pPr algn="ctr" indent="0" marL="0">
+              <a:buNone/>
+            </a:pPr>
+            <a:r>
+              <a:rPr lang="en-US" sz="1250" b="1" dirty="0">
+                <a:solidFill>
+                  <a:srgbClr val="102636"/>
+                </a:solidFill>
+                <a:latin typeface="Calibri" pitchFamily="34" charset="0"/>
+                <a:ea typeface="Calibri" pitchFamily="34" charset="-122"/>
+                <a:cs typeface="Calibri" pitchFamily="34" charset="-120"/>
+              </a:rPr>
+              <a:t>DynamoDB</a:t>
+            </a:r>
+            <a:endParaRPr lang="en-US" sz="1250" dirty="0"/>
+          </a:p>
+        </p:txBody>
+      </p:sp>
+      <p:sp>
+        <p:nvSpPr>
+          <p:cNvPr id="24" name="Text 22"/>
+          <p:cNvSpPr/>
+          <p:nvPr/>
+        </p:nvSpPr>
+        <p:spPr>
+          <a:xfrm>
+            <a:off x="8119872" y="3401568"/>
+            <a:ext cx="1499616" cy="457200"/>
+          </a:xfrm>
+          <a:prstGeom prst="rect">
+            <a:avLst/>
+          </a:prstGeom>
+          <a:noFill/>
+          <a:ln/>
+        </p:spPr>
+        <p:txBody>
+          <a:bodyPr wrap="square" lIns="0" tIns="0" rIns="0" bIns="0" rtlCol="0" anchor="ctr"/>
+          <a:lstStyle/>
+          <a:p>
+            <a:pPr algn="ctr" indent="0" marL="0">
+              <a:buNone/>
+            </a:pPr>
+            <a:r>
+              <a:rPr lang="en-US" sz="900" dirty="0">
+                <a:solidFill>
+                  <a:srgbClr val="557280"/>
+                </a:solidFill>
+                <a:latin typeface="Calibri" pitchFamily="34" charset="0"/>
+                <a:ea typeface="Calibri" pitchFamily="34" charset="-122"/>
+                <a:cs typeface="Calibri" pitchFamily="34" charset="-120"/>
+              </a:rPr>
+              <a:t>aggregate store</a:t>
+            </a:r>
+            <a:endParaRPr lang="en-US" sz="900" dirty="0"/>
+          </a:p>
+        </p:txBody>
+      </p:sp>
+      <p:sp>
+        <p:nvSpPr>
+          <p:cNvPr id="25" name="Shape 23"/>
+          <p:cNvSpPr/>
+          <p:nvPr/>
+        </p:nvSpPr>
+        <p:spPr>
+          <a:xfrm>
+            <a:off x="9610344" y="3337560"/>
+            <a:ext cx="164592" cy="0"/>
+          </a:xfrm>
+          <a:prstGeom prst="line">
+            <a:avLst/>
+          </a:prstGeom>
+          <a:noFill/>
+          <a:ln w="20320">
+            <a:solidFill>
+              <a:srgbClr val="4F98C0"/>
+            </a:solidFill>
+            <a:prstDash val="solid"/>
+            <a:tailEnd type="triangle"/>
+          </a:ln>
+        </p:spPr>
+      </p:sp>
+      <p:sp>
+        <p:nvSpPr>
+          <p:cNvPr id="26" name="Shape 24"/>
+          <p:cNvSpPr/>
+          <p:nvPr/>
+        </p:nvSpPr>
+        <p:spPr>
+          <a:xfrm>
+            <a:off x="9784080" y="2651760"/>
+            <a:ext cx="1463040" cy="1371600"/>
+          </a:xfrm>
+          <a:prstGeom prst="roundRect">
+            <a:avLst>
+              <a:gd name="adj" fmla="val 5333"/>
+            </a:avLst>
+          </a:prstGeom>
+          <a:solidFill>
+            <a:srgbClr val="FFFFFF"/>
+          </a:solidFill>
+          <a:ln w="15240">
+            <a:solidFill>
+              <a:srgbClr val="1E76A6"/>
+            </a:solidFill>
+            <a:prstDash val="solid"/>
+          </a:ln>
+        </p:spPr>
+      </p:sp>
+      <p:sp>
+        <p:nvSpPr>
+          <p:cNvPr id="27" name="Text 25"/>
+          <p:cNvSpPr/>
+          <p:nvPr/>
+        </p:nvSpPr>
+        <p:spPr>
+          <a:xfrm>
+            <a:off x="9738360" y="2907792"/>
+            <a:ext cx="1554480" cy="457200"/>
+          </a:xfrm>
+          <a:prstGeom prst="rect">
+            <a:avLst/>
+          </a:prstGeom>
+          <a:noFill/>
+          <a:ln/>
+        </p:spPr>
+        <p:txBody>
+          <a:bodyPr wrap="square" lIns="0" tIns="0" rIns="0" bIns="0" rtlCol="0" anchor="ctr"/>
+          <a:lstStyle/>
+          <a:p>
+            <a:pPr algn="ctr" indent="0" marL="0">
+              <a:buNone/>
+            </a:pPr>
+            <a:r>
+              <a:rPr lang="en-US" sz="1250" b="1" dirty="0">
+                <a:solidFill>
+                  <a:srgbClr val="102636"/>
+                </a:solidFill>
+                <a:latin typeface="Calibri" pitchFamily="34" charset="0"/>
+                <a:ea typeface="Calibri" pitchFamily="34" charset="-122"/>
+                <a:cs typeface="Calibri" pitchFamily="34" charset="-120"/>
+              </a:rPr>
+              <a:t>API GW + S3</a:t>
+            </a:r>
+            <a:endParaRPr lang="en-US" sz="1250" dirty="0"/>
+          </a:p>
+        </p:txBody>
+      </p:sp>
+      <p:sp>
+        <p:nvSpPr>
+          <p:cNvPr id="28" name="Text 26"/>
+          <p:cNvSpPr/>
+          <p:nvPr/>
+        </p:nvSpPr>
+        <p:spPr>
+          <a:xfrm>
+            <a:off x="9765792" y="3401568"/>
+            <a:ext cx="1499616" cy="457200"/>
+          </a:xfrm>
+          <a:prstGeom prst="rect">
+            <a:avLst/>
+          </a:prstGeom>
+          <a:noFill/>
+          <a:ln/>
+        </p:spPr>
+        <p:txBody>
+          <a:bodyPr wrap="square" lIns="0" tIns="0" rIns="0" bIns="0" rtlCol="0" anchor="ctr"/>
+          <a:lstStyle/>
+          <a:p>
+            <a:pPr algn="ctr" indent="0" marL="0">
+              <a:buNone/>
+            </a:pPr>
+            <a:r>
+              <a:rPr lang="en-US" sz="900" dirty="0">
+                <a:solidFill>
+                  <a:srgbClr val="557280"/>
+                </a:solidFill>
+                <a:latin typeface="Calibri" pitchFamily="34" charset="0"/>
+                <a:ea typeface="Calibri" pitchFamily="34" charset="-122"/>
+                <a:cs typeface="Calibri" pitchFamily="34" charset="-120"/>
+              </a:rPr>
+              <a:t>bridge console</a:t>
+            </a:r>
+            <a:endParaRPr lang="en-US" sz="900" dirty="0"/>
+          </a:p>
+        </p:txBody>
+      </p:sp>
+      <p:sp>
+        <p:nvSpPr>
+          <p:cNvPr id="29" name="Text 27"/>
           <p:cNvSpPr/>
           <p:nvPr/>
         </p:nvSpPr>
@@ -3206,59 +3193,24 @@
       </p:sp>
       <p:sp>
         <p:nvSpPr>
-          <p:cNvPr id="3" name="Text 1"/>
-          <p:cNvSpPr/>
-          <p:nvPr/>
-        </p:nvSpPr>
-        <p:spPr>
-          <a:xfrm>
-            <a:off x="731520" y="1965960"/>
-            <a:ext cx="2377440" cy="548640"/>
-          </a:xfrm>
-          <a:prstGeom prst="rect">
-            <a:avLst/>
-          </a:prstGeom>
-          <a:noFill/>
-          <a:ln/>
-        </p:spPr>
-        <p:txBody>
-          <a:bodyPr wrap="square" lIns="0" tIns="0" rIns="0" bIns="0" rtlCol="0" anchor="ctr"/>
-          <a:lstStyle/>
-          <a:p>
-            <a:pPr indent="0" marL="0">
-              <a:buNone/>
-            </a:pPr>
-            <a:r>
-              <a:rPr lang="en-US" sz="2300" b="1" dirty="0">
-                <a:solidFill>
-                  <a:srgbClr val="E5A83C"/>
-                </a:solidFill>
-                <a:latin typeface="Times New Roman" pitchFamily="34" charset="0"/>
-                <a:ea typeface="Times New Roman" pitchFamily="34" charset="-122"/>
-                <a:cs typeface="Times New Roman" pitchFamily="34" charset="-120"/>
-              </a:rPr>
-              <a:t>Problem</a:t>
-            </a:r>
-            <a:endParaRPr lang="en-US" sz="2300" dirty="0"/>
-          </a:p>
-        </p:txBody>
-      </p:sp>
-      <p:sp>
-        <p:nvSpPr>
-          <p:cNvPr id="4" name="Shape 2"/>
-          <p:cNvSpPr/>
-          <p:nvPr/>
-        </p:nvSpPr>
-        <p:spPr>
-          <a:xfrm>
-            <a:off x="3200400" y="1920240"/>
-            <a:ext cx="0" cy="1783080"/>
-          </a:xfrm>
-          <a:prstGeom prst="line">
-            <a:avLst/>
-          </a:prstGeom>
-          <a:noFill/>
-          <a:ln w="31750">
+          <p:cNvPr id="3" name="Shape 1"/>
+          <p:cNvSpPr/>
+          <p:nvPr/>
+        </p:nvSpPr>
+        <p:spPr>
+          <a:xfrm>
+            <a:off x="640080" y="1874520"/>
+            <a:ext cx="4937760" cy="4160520"/>
+          </a:xfrm>
+          <a:prstGeom prst="roundRect">
+            <a:avLst>
+              <a:gd name="adj" fmla="val 2198"/>
+            </a:avLst>
+          </a:prstGeom>
+          <a:solidFill>
+            <a:srgbClr val="EDF4F9"/>
+          </a:solidFill>
+          <a:ln w="19050">
             <a:solidFill>
               <a:srgbClr val="E5A83C"/>
             </a:solidFill>
@@ -3268,14 +3220,53 @@
       </p:sp>
       <p:sp>
         <p:nvSpPr>
+          <p:cNvPr id="4" name="Text 2"/>
+          <p:cNvSpPr/>
+          <p:nvPr/>
+        </p:nvSpPr>
+        <p:spPr>
+          <a:xfrm>
+            <a:off x="960120" y="2103120"/>
+            <a:ext cx="3657600" cy="457200"/>
+          </a:xfrm>
+          <a:prstGeom prst="rect">
+            <a:avLst/>
+          </a:prstGeom>
+          <a:noFill/>
+          <a:ln/>
+        </p:spPr>
+        <p:txBody>
+          <a:bodyPr wrap="square" lIns="0" tIns="0" rIns="0" bIns="0" rtlCol="0" anchor="ctr"/>
+          <a:lstStyle/>
+          <a:p>
+            <a:pPr indent="0" marL="0">
+              <a:buNone/>
+            </a:pPr>
+            <a:r>
+              <a:rPr lang="en-US" sz="1900" b="1" dirty="0">
+                <a:solidFill>
+                  <a:srgbClr val="E5A83C"/>
+                </a:solidFill>
+                <a:latin typeface="Times New Roman" pitchFamily="34" charset="0"/>
+                <a:ea typeface="Times New Roman" pitchFamily="34" charset="-122"/>
+                <a:cs typeface="Times New Roman" pitchFamily="34" charset="-120"/>
+              </a:rPr>
+              <a:t>Problem</a:t>
+            </a:r>
+            <a:endParaRPr lang="en-US" sz="1900" dirty="0"/>
+          </a:p>
+        </p:txBody>
+      </p:sp>
+      <p:sp>
+        <p:nvSpPr>
           <p:cNvPr id="5" name="Text 3"/>
           <p:cNvSpPr/>
           <p:nvPr/>
         </p:nvSpPr>
         <p:spPr>
           <a:xfrm>
-            <a:off x="3474720" y="1920240"/>
-            <a:ext cx="7955280" cy="1920240"/>
+            <a:off x="960120" y="2651760"/>
+            <a:ext cx="4343400" cy="3200400"/>
           </a:xfrm>
           <a:prstGeom prst="rect">
             <a:avLst/>
@@ -3294,7 +3285,7 @@
               <a:buNone/>
             </a:pPr>
             <a:r>
-              <a:rPr lang="en-US" sz="1450" dirty="0">
+              <a:rPr lang="en-US" sz="1350" dirty="0">
                 <a:solidFill>
                   <a:srgbClr val="102636"/>
                 </a:solidFill>
@@ -3304,65 +3295,30 @@
               </a:rPr>
               <a:t>Deployed to the real AWS account, the dashboard page loaded but every panel stayed empty — its stylesheet, script and chart library all returned 404 from S3. Every signal said healthy: 120 tests green, a full emulator run clean, every curl check on the JSON API returning live data. The upload had flattened the static folder to the bucket root, and nothing was testing the page's own asset requests.</a:t>
             </a:r>
-            <a:endParaRPr lang="en-US" sz="1450" dirty="0"/>
-          </a:p>
-        </p:txBody>
-      </p:sp>
-      <p:sp>
-        <p:nvSpPr>
-          <p:cNvPr id="6" name="Text 4"/>
-          <p:cNvSpPr/>
-          <p:nvPr/>
-        </p:nvSpPr>
-        <p:spPr>
-          <a:xfrm>
-            <a:off x="731520" y="4114800"/>
-            <a:ext cx="2377440" cy="548640"/>
-          </a:xfrm>
-          <a:prstGeom prst="rect">
-            <a:avLst/>
-          </a:prstGeom>
-          <a:noFill/>
-          <a:ln/>
-        </p:spPr>
-        <p:txBody>
-          <a:bodyPr wrap="square" lIns="0" tIns="0" rIns="0" bIns="0" rtlCol="0" anchor="ctr"/>
-          <a:lstStyle/>
-          <a:p>
-            <a:pPr indent="0" marL="0">
-              <a:buNone/>
-            </a:pPr>
-            <a:r>
-              <a:rPr lang="en-US" sz="2300" b="1" dirty="0">
-                <a:solidFill>
-                  <a:srgbClr val="1E76A6"/>
-                </a:solidFill>
-                <a:latin typeface="Times New Roman" pitchFamily="34" charset="0"/>
-                <a:ea typeface="Times New Roman" pitchFamily="34" charset="-122"/>
-                <a:cs typeface="Times New Roman" pitchFamily="34" charset="-120"/>
-              </a:rPr>
-              <a:t>Solution</a:t>
-            </a:r>
-            <a:endParaRPr lang="en-US" sz="2300" dirty="0"/>
-          </a:p>
-        </p:txBody>
-      </p:sp>
-      <p:sp>
-        <p:nvSpPr>
-          <p:cNvPr id="7" name="Shape 5"/>
-          <p:cNvSpPr/>
-          <p:nvPr/>
-        </p:nvSpPr>
-        <p:spPr>
-          <a:xfrm>
-            <a:off x="3200400" y="4069080"/>
-            <a:ext cx="0" cy="1783080"/>
-          </a:xfrm>
-          <a:prstGeom prst="line">
-            <a:avLst/>
-          </a:prstGeom>
-          <a:noFill/>
-          <a:ln w="31750">
+            <a:endParaRPr lang="en-US" sz="1350" dirty="0"/>
+          </a:p>
+        </p:txBody>
+      </p:sp>
+      <p:sp>
+        <p:nvSpPr>
+          <p:cNvPr id="6" name="Shape 4"/>
+          <p:cNvSpPr/>
+          <p:nvPr/>
+        </p:nvSpPr>
+        <p:spPr>
+          <a:xfrm>
+            <a:off x="6611112" y="1874520"/>
+            <a:ext cx="4937760" cy="4160520"/>
+          </a:xfrm>
+          <a:prstGeom prst="roundRect">
+            <a:avLst>
+              <a:gd name="adj" fmla="val 2198"/>
+            </a:avLst>
+          </a:prstGeom>
+          <a:solidFill>
+            <a:srgbClr val="EDF4F9"/>
+          </a:solidFill>
+          <a:ln w="19050">
             <a:solidFill>
               <a:srgbClr val="1E76A6"/>
             </a:solidFill>
@@ -3372,14 +3328,53 @@
       </p:sp>
       <p:sp>
         <p:nvSpPr>
+          <p:cNvPr id="7" name="Text 5"/>
+          <p:cNvSpPr/>
+          <p:nvPr/>
+        </p:nvSpPr>
+        <p:spPr>
+          <a:xfrm>
+            <a:off x="6931152" y="2103120"/>
+            <a:ext cx="3657600" cy="457200"/>
+          </a:xfrm>
+          <a:prstGeom prst="rect">
+            <a:avLst/>
+          </a:prstGeom>
+          <a:noFill/>
+          <a:ln/>
+        </p:spPr>
+        <p:txBody>
+          <a:bodyPr wrap="square" lIns="0" tIns="0" rIns="0" bIns="0" rtlCol="0" anchor="ctr"/>
+          <a:lstStyle/>
+          <a:p>
+            <a:pPr indent="0" marL="0">
+              <a:buNone/>
+            </a:pPr>
+            <a:r>
+              <a:rPr lang="en-US" sz="1900" b="1" dirty="0">
+                <a:solidFill>
+                  <a:srgbClr val="1E76A6"/>
+                </a:solidFill>
+                <a:latin typeface="Times New Roman" pitchFamily="34" charset="0"/>
+                <a:ea typeface="Times New Roman" pitchFamily="34" charset="-122"/>
+                <a:cs typeface="Times New Roman" pitchFamily="34" charset="-120"/>
+              </a:rPr>
+              <a:t>Solution</a:t>
+            </a:r>
+            <a:endParaRPr lang="en-US" sz="1900" dirty="0"/>
+          </a:p>
+        </p:txBody>
+      </p:sp>
+      <p:sp>
+        <p:nvSpPr>
           <p:cNvPr id="8" name="Text 6"/>
           <p:cNvSpPr/>
           <p:nvPr/>
         </p:nvSpPr>
         <p:spPr>
           <a:xfrm>
-            <a:off x="3474720" y="4069080"/>
-            <a:ext cx="7955280" cy="1920240"/>
+            <a:off x="6931152" y="2651760"/>
+            <a:ext cx="4343400" cy="3200400"/>
           </a:xfrm>
           <a:prstGeom prst="rect">
             <a:avLst/>
@@ -3398,7 +3393,7 @@
               <a:buNone/>
             </a:pPr>
             <a:r>
-              <a:rPr lang="en-US" sz="1450" dirty="0">
+              <a:rPr lang="en-US" sz="1350" dirty="0">
                 <a:solidFill>
                   <a:srgbClr val="102636"/>
                 </a:solidFill>
@@ -3408,9 +3403,29 @@
               </a:rPr>
               <a:t>Open the real page in a real browser and read its network requests — three 404s, visible immediately. Re-upload preserving the exact paths the page asks for, then re-verify by watching the item count climb across live reloads. The same live run also exposed a count-only scan undercount and one-message-per-aggregate sends, both fixed.</a:t>
             </a:r>
-            <a:endParaRPr lang="en-US" sz="1450" dirty="0"/>
-          </a:p>
-        </p:txBody>
+            <a:endParaRPr lang="en-US" sz="1350" dirty="0"/>
+          </a:p>
+        </p:txBody>
+      </p:sp>
+      <p:sp>
+        <p:nvSpPr>
+          <p:cNvPr id="9" name="Shape 7"/>
+          <p:cNvSpPr/>
+          <p:nvPr/>
+        </p:nvSpPr>
+        <p:spPr>
+          <a:xfrm>
+            <a:off x="5669280" y="3703320"/>
+            <a:ext cx="841248" cy="512064"/>
+          </a:xfrm>
+          <a:prstGeom prst="rightArrow">
+            <a:avLst/>
+          </a:prstGeom>
+          <a:solidFill>
+            <a:srgbClr val="0F4E7E"/>
+          </a:solidFill>
+          <a:ln/>
+        </p:spPr>
       </p:sp>
     </p:spTree>
   </p:cSld>

--- a/ppt/GopiKrishnan_X25112627_marine-vessel-monitoring.pptx
+++ b/ppt/GopiKrishnan_X25112627_marine-vessel-monitoring.pptx
@@ -2588,12 +2588,12 @@
         </p:nvSpPr>
         <p:spPr>
           <a:xfrm>
-            <a:off x="640080" y="1874520"/>
-            <a:ext cx="3502152" cy="3657600"/>
+            <a:off x="640080" y="1828800"/>
+            <a:ext cx="10881360" cy="1371600"/>
           </a:xfrm>
           <a:prstGeom prst="roundRect">
             <a:avLst>
-              <a:gd name="adj" fmla="val 2611"/>
+              <a:gd name="adj" fmla="val 6667"/>
             </a:avLst>
           </a:prstGeom>
           <a:solidFill>
@@ -2615,8 +2615,8 @@
         </p:nvSpPr>
         <p:spPr>
           <a:xfrm>
-            <a:off x="914400" y="2194560"/>
-            <a:ext cx="640080" cy="640080"/>
+            <a:off x="960120" y="2203704"/>
+            <a:ext cx="621792" cy="621792"/>
           </a:xfrm>
           <a:prstGeom prst="ellipse">
             <a:avLst/>
@@ -2635,8 +2635,8 @@
         </p:nvSpPr>
         <p:spPr>
           <a:xfrm>
-            <a:off x="914400" y="2194560"/>
-            <a:ext cx="640080" cy="640080"/>
+            <a:off x="960120" y="2203704"/>
+            <a:ext cx="621792" cy="621792"/>
           </a:xfrm>
           <a:prstGeom prst="rect">
             <a:avLst/>
@@ -2652,7 +2652,7 @@
               <a:buNone/>
             </a:pPr>
             <a:r>
-              <a:rPr lang="en-US" sz="2400" b="1" dirty="0">
+              <a:rPr lang="en-US" sz="2200" b="1" dirty="0">
                 <a:solidFill>
                   <a:srgbClr val="FFFFFF"/>
                 </a:solidFill>
@@ -2662,7 +2662,7 @@
               </a:rPr>
               <a:t>1</a:t>
             </a:r>
-            <a:endParaRPr lang="en-US" sz="2400" dirty="0"/>
+            <a:endParaRPr lang="en-US" sz="2200" dirty="0"/>
           </a:p>
         </p:txBody>
       </p:sp>
@@ -2674,8 +2674,8 @@
         </p:nvSpPr>
         <p:spPr>
           <a:xfrm>
-            <a:off x="914400" y="3017520"/>
-            <a:ext cx="2953512" cy="822960"/>
+            <a:off x="1828800" y="2029968"/>
+            <a:ext cx="9418320" cy="411480"/>
           </a:xfrm>
           <a:prstGeom prst="rect">
             <a:avLst/>
@@ -2713,8 +2713,8 @@
         </p:nvSpPr>
         <p:spPr>
           <a:xfrm>
-            <a:off x="914400" y="3794760"/>
-            <a:ext cx="2953512" cy="1554480"/>
+            <a:off x="1828800" y="2450592"/>
+            <a:ext cx="9418320" cy="594360"/>
           </a:xfrm>
           <a:prstGeom prst="rect">
             <a:avLst/>
@@ -2755,12 +2755,12 @@
         </p:nvSpPr>
         <p:spPr>
           <a:xfrm>
-            <a:off x="4416552" y="1874520"/>
-            <a:ext cx="3502152" cy="3657600"/>
+            <a:off x="640080" y="3346704"/>
+            <a:ext cx="10881360" cy="1371600"/>
           </a:xfrm>
           <a:prstGeom prst="roundRect">
             <a:avLst>
-              <a:gd name="adj" fmla="val 2611"/>
+              <a:gd name="adj" fmla="val 6667"/>
             </a:avLst>
           </a:prstGeom>
           <a:solidFill>
@@ -2782,8 +2782,8 @@
         </p:nvSpPr>
         <p:spPr>
           <a:xfrm>
-            <a:off x="4690872" y="2194560"/>
-            <a:ext cx="640080" cy="640080"/>
+            <a:off x="960120" y="3721608"/>
+            <a:ext cx="621792" cy="621792"/>
           </a:xfrm>
           <a:prstGeom prst="ellipse">
             <a:avLst/>
@@ -2802,8 +2802,8 @@
         </p:nvSpPr>
         <p:spPr>
           <a:xfrm>
-            <a:off x="4690872" y="2194560"/>
-            <a:ext cx="640080" cy="640080"/>
+            <a:off x="960120" y="3721608"/>
+            <a:ext cx="621792" cy="621792"/>
           </a:xfrm>
           <a:prstGeom prst="rect">
             <a:avLst/>
@@ -2819,7 +2819,7 @@
               <a:buNone/>
             </a:pPr>
             <a:r>
-              <a:rPr lang="en-US" sz="2400" b="1" dirty="0">
+              <a:rPr lang="en-US" sz="2200" b="1" dirty="0">
                 <a:solidFill>
                   <a:srgbClr val="FFFFFF"/>
                 </a:solidFill>
@@ -2829,7 +2829,7 @@
               </a:rPr>
               <a:t>2</a:t>
             </a:r>
-            <a:endParaRPr lang="en-US" sz="2400" dirty="0"/>
+            <a:endParaRPr lang="en-US" sz="2200" dirty="0"/>
           </a:p>
         </p:txBody>
       </p:sp>
@@ -2841,8 +2841,8 @@
         </p:nvSpPr>
         <p:spPr>
           <a:xfrm>
-            <a:off x="4690872" y="3017520"/>
-            <a:ext cx="2953512" cy="822960"/>
+            <a:off x="1828800" y="3547872"/>
+            <a:ext cx="9418320" cy="411480"/>
           </a:xfrm>
           <a:prstGeom prst="rect">
             <a:avLst/>
@@ -2880,8 +2880,8 @@
         </p:nvSpPr>
         <p:spPr>
           <a:xfrm>
-            <a:off x="4690872" y="3794760"/>
-            <a:ext cx="2953512" cy="1554480"/>
+            <a:off x="1828800" y="3968496"/>
+            <a:ext cx="9418320" cy="594360"/>
           </a:xfrm>
           <a:prstGeom prst="rect">
             <a:avLst/>
@@ -2922,12 +2922,12 @@
         </p:nvSpPr>
         <p:spPr>
           <a:xfrm>
-            <a:off x="8193024" y="1874520"/>
-            <a:ext cx="3502152" cy="3657600"/>
+            <a:off x="640080" y="4864608"/>
+            <a:ext cx="10881360" cy="1371600"/>
           </a:xfrm>
           <a:prstGeom prst="roundRect">
             <a:avLst>
-              <a:gd name="adj" fmla="val 2611"/>
+              <a:gd name="adj" fmla="val 6667"/>
             </a:avLst>
           </a:prstGeom>
           <a:solidFill>
@@ -2949,8 +2949,8 @@
         </p:nvSpPr>
         <p:spPr>
           <a:xfrm>
-            <a:off x="8467344" y="2194560"/>
-            <a:ext cx="640080" cy="640080"/>
+            <a:off x="960120" y="5239512"/>
+            <a:ext cx="621792" cy="621792"/>
           </a:xfrm>
           <a:prstGeom prst="ellipse">
             <a:avLst/>
@@ -2969,8 +2969,8 @@
         </p:nvSpPr>
         <p:spPr>
           <a:xfrm>
-            <a:off x="8467344" y="2194560"/>
-            <a:ext cx="640080" cy="640080"/>
+            <a:off x="960120" y="5239512"/>
+            <a:ext cx="621792" cy="621792"/>
           </a:xfrm>
           <a:prstGeom prst="rect">
             <a:avLst/>
@@ -2986,7 +2986,7 @@
               <a:buNone/>
             </a:pPr>
             <a:r>
-              <a:rPr lang="en-US" sz="2400" b="1" dirty="0">
+              <a:rPr lang="en-US" sz="2200" b="1" dirty="0">
                 <a:solidFill>
                   <a:srgbClr val="FFFFFF"/>
                 </a:solidFill>
@@ -2996,7 +2996,7 @@
               </a:rPr>
               <a:t>3</a:t>
             </a:r>
-            <a:endParaRPr lang="en-US" sz="2400" dirty="0"/>
+            <a:endParaRPr lang="en-US" sz="2200" dirty="0"/>
           </a:p>
         </p:txBody>
       </p:sp>
@@ -3008,8 +3008,8 @@
         </p:nvSpPr>
         <p:spPr>
           <a:xfrm>
-            <a:off x="8467344" y="3017520"/>
-            <a:ext cx="2953512" cy="822960"/>
+            <a:off x="1828800" y="5065776"/>
+            <a:ext cx="9418320" cy="411480"/>
           </a:xfrm>
           <a:prstGeom prst="rect">
             <a:avLst/>
@@ -3047,8 +3047,8 @@
         </p:nvSpPr>
         <p:spPr>
           <a:xfrm>
-            <a:off x="8467344" y="3794760"/>
-            <a:ext cx="2953512" cy="1554480"/>
+            <a:off x="1828800" y="5486400"/>
+            <a:ext cx="9418320" cy="594360"/>
           </a:xfrm>
           <a:prstGeom prst="rect">
             <a:avLst/>
@@ -3076,45 +3076,6 @@
                 <a:cs typeface="Calibri" pitchFamily="34" charset="-120"/>
               </a:rPr>
               <a:t>The count grows 59 to 374 to 425 during verification, and the freshest reading stays under a second old.</a:t>
-            </a:r>
-            <a:endParaRPr lang="en-US" sz="1300" dirty="0"/>
-          </a:p>
-        </p:txBody>
-      </p:sp>
-      <p:sp>
-        <p:nvSpPr>
-          <p:cNvPr id="19" name="Text 17"/>
-          <p:cNvSpPr/>
-          <p:nvPr/>
-        </p:nvSpPr>
-        <p:spPr>
-          <a:xfrm>
-            <a:off x="640080" y="6263640"/>
-            <a:ext cx="10972800" cy="365760"/>
-          </a:xfrm>
-          <a:prstGeom prst="rect">
-            <a:avLst/>
-          </a:prstGeom>
-          <a:noFill/>
-          <a:ln/>
-        </p:spPr>
-        <p:txBody>
-          <a:bodyPr wrap="square" rtlCol="0" anchor="ctr"/>
-          <a:lstStyle/>
-          <a:p>
-            <a:pPr indent="0" marL="0">
-              <a:buNone/>
-            </a:pPr>
-            <a:r>
-              <a:rPr lang="en-US" sz="1300" i="1" dirty="0">
-                <a:solidFill>
-                  <a:srgbClr val="4F98C0"/>
-                </a:solidFill>
-                <a:latin typeface="Calibri" pitchFamily="34" charset="0"/>
-                <a:ea typeface="Calibri" pitchFamily="34" charset="-122"/>
-                <a:cs typeface="Calibri" pitchFamily="34" charset="-120"/>
-              </a:rPr>
-              <a:t>Switch to the live dashboard here — backup video ready.</a:t>
             </a:r>
             <a:endParaRPr lang="en-US" sz="1300" dirty="0"/>
           </a:p>
@@ -3199,12 +3160,12 @@
         </p:nvSpPr>
         <p:spPr>
           <a:xfrm>
-            <a:off x="640080" y="1874520"/>
-            <a:ext cx="4937760" cy="4160520"/>
+            <a:off x="731520" y="1920240"/>
+            <a:ext cx="10698480" cy="1965960"/>
           </a:xfrm>
           <a:prstGeom prst="roundRect">
             <a:avLst>
-              <a:gd name="adj" fmla="val 2198"/>
+              <a:gd name="adj" fmla="val 4651"/>
             </a:avLst>
           </a:prstGeom>
           <a:solidFill>
@@ -3226,7 +3187,7 @@
         </p:nvSpPr>
         <p:spPr>
           <a:xfrm>
-            <a:off x="960120" y="2103120"/>
+            <a:off x="1005840" y="2103120"/>
             <a:ext cx="3657600" cy="457200"/>
           </a:xfrm>
           <a:prstGeom prst="rect">
@@ -3265,8 +3226,8 @@
         </p:nvSpPr>
         <p:spPr>
           <a:xfrm>
-            <a:off x="960120" y="2651760"/>
-            <a:ext cx="4343400" cy="3200400"/>
+            <a:off x="1005840" y="2578608"/>
+            <a:ext cx="9966960" cy="1188720"/>
           </a:xfrm>
           <a:prstGeom prst="rect">
             <a:avLst/>
@@ -3280,12 +3241,12 @@
           <a:p>
             <a:pPr indent="0" marL="0">
               <a:lnSpc>
-                <a:spcPct val="112000"/>
+                <a:spcPct val="105000"/>
               </a:lnSpc>
               <a:buNone/>
             </a:pPr>
             <a:r>
-              <a:rPr lang="en-US" sz="1350" dirty="0">
+              <a:rPr lang="en-US" sz="1300" dirty="0">
                 <a:solidFill>
                   <a:srgbClr val="102636"/>
                 </a:solidFill>
@@ -3295,7 +3256,7 @@
               </a:rPr>
               <a:t>Deployed to the real AWS account, the dashboard page loaded but every panel stayed empty — its stylesheet, script and chart library all returned 404 from S3. Every signal said healthy: 120 tests green, a full emulator run clean, every curl check on the JSON API returning live data. The upload had flattened the static folder to the bucket root, and nothing was testing the page's own asset requests.</a:t>
             </a:r>
-            <a:endParaRPr lang="en-US" sz="1350" dirty="0"/>
+            <a:endParaRPr lang="en-US" sz="1300" dirty="0"/>
           </a:p>
         </p:txBody>
       </p:sp>
@@ -3307,12 +3268,12 @@
         </p:nvSpPr>
         <p:spPr>
           <a:xfrm>
-            <a:off x="6611112" y="1874520"/>
-            <a:ext cx="4937760" cy="4160520"/>
+            <a:off x="731520" y="4041648"/>
+            <a:ext cx="10698480" cy="1965960"/>
           </a:xfrm>
           <a:prstGeom prst="roundRect">
             <a:avLst>
-              <a:gd name="adj" fmla="val 2198"/>
+              <a:gd name="adj" fmla="val 4651"/>
             </a:avLst>
           </a:prstGeom>
           <a:solidFill>
@@ -3334,7 +3295,7 @@
         </p:nvSpPr>
         <p:spPr>
           <a:xfrm>
-            <a:off x="6931152" y="2103120"/>
+            <a:off x="1005840" y="4224528"/>
             <a:ext cx="3657600" cy="457200"/>
           </a:xfrm>
           <a:prstGeom prst="rect">
@@ -3373,8 +3334,8 @@
         </p:nvSpPr>
         <p:spPr>
           <a:xfrm>
-            <a:off x="6931152" y="2651760"/>
-            <a:ext cx="4343400" cy="3200400"/>
+            <a:off x="1005840" y="4700016"/>
+            <a:ext cx="9966960" cy="1188720"/>
           </a:xfrm>
           <a:prstGeom prst="rect">
             <a:avLst/>
@@ -3388,12 +3349,12 @@
           <a:p>
             <a:pPr indent="0" marL="0">
               <a:lnSpc>
-                <a:spcPct val="112000"/>
+                <a:spcPct val="105000"/>
               </a:lnSpc>
               <a:buNone/>
             </a:pPr>
             <a:r>
-              <a:rPr lang="en-US" sz="1350" dirty="0">
+              <a:rPr lang="en-US" sz="1300" dirty="0">
                 <a:solidFill>
                   <a:srgbClr val="102636"/>
                 </a:solidFill>
@@ -3403,29 +3364,9 @@
               </a:rPr>
               <a:t>Open the real page in a real browser and read its network requests — three 404s, visible immediately. Re-upload preserving the exact paths the page asks for, then re-verify by watching the item count climb across live reloads. The same live run also exposed a count-only scan undercount and one-message-per-aggregate sends, both fixed.</a:t>
             </a:r>
-            <a:endParaRPr lang="en-US" sz="1350" dirty="0"/>
-          </a:p>
-        </p:txBody>
-      </p:sp>
-      <p:sp>
-        <p:nvSpPr>
-          <p:cNvPr id="9" name="Shape 7"/>
-          <p:cNvSpPr/>
-          <p:nvPr/>
-        </p:nvSpPr>
-        <p:spPr>
-          <a:xfrm>
-            <a:off x="5669280" y="3703320"/>
-            <a:ext cx="841248" cy="512064"/>
-          </a:xfrm>
-          <a:prstGeom prst="rightArrow">
-            <a:avLst/>
-          </a:prstGeom>
-          <a:solidFill>
-            <a:srgbClr val="0F4E7E"/>
-          </a:solidFill>
-          <a:ln/>
-        </p:spPr>
+            <a:endParaRPr lang="en-US" sz="1300" dirty="0"/>
+          </a:p>
+        </p:txBody>
       </p:sp>
     </p:spTree>
   </p:cSld>

--- a/ppt/GopiKrishnan_X25112627_marine-vessel-monitoring.pptx
+++ b/ppt/GopiKrishnan_X25112627_marine-vessel-monitoring.pptx
@@ -1286,7 +1286,7 @@
           </a:solidFill>
           <a:ln w="12700">
             <a:solidFill>
-              <a:srgbClr val="E5A83C"/>
+              <a:srgbClr val="1E76A6"/>
             </a:solidFill>
             <a:prstDash val="solid"/>
           </a:ln>
@@ -1352,7 +1352,7 @@
           </a:solidFill>
           <a:ln w="12700">
             <a:solidFill>
-              <a:srgbClr val="E5A83C"/>
+              <a:srgbClr val="1E76A6"/>
             </a:solidFill>
             <a:prstDash val="solid"/>
           </a:ln>
@@ -1418,7 +1418,7 @@
           </a:solidFill>
           <a:ln w="12700">
             <a:solidFill>
-              <a:srgbClr val="E5A83C"/>
+              <a:srgbClr val="1E76A6"/>
             </a:solidFill>
             <a:prstDash val="solid"/>
           </a:ln>
@@ -1487,17 +1487,6 @@
             <a:pPr indent="0" marL="0">
               <a:buNone/>
             </a:pPr>
-            <a:r>
-              <a:rPr lang="en-US" sz="1250" dirty="0">
-                <a:solidFill>
-                  <a:srgbClr val="557280"/>
-                </a:solidFill>
-                <a:latin typeface="Calibri" pitchFamily="34" charset="0"/>
-                <a:ea typeface="Calibri" pitchFamily="34" charset="-122"/>
-                <a:cs typeface="Calibri" pitchFamily="34" charset="-120"/>
-              </a:rPr>
-              <a:t>Fog &amp; Edge Computing (H9FECC)   ·   deployed live on AWS</a:t>
-            </a:r>
             <a:endParaRPr lang="en-US" sz="1250" dirty="0"/>
           </a:p>
         </p:txBody>

--- a/ppt/GopiKrishnan_X25112627_marine-vessel-monitoring.pptx
+++ b/ppt/GopiKrishnan_X25112627_marine-vessel-monitoring.pptx
@@ -1124,7 +1124,7 @@
     <p:bg>
       <p:bgPr>
         <a:solidFill>
-          <a:srgbClr val="0E2436"/>
+          <a:srgbClr val="EEF5F4"/>
         </a:solidFill>
       </p:bgPr>
     </p:bg>
@@ -1144,14 +1144,198 @@
       </p:grpSpPr>
       <p:sp>
         <p:nvSpPr>
-          <p:cNvPr id="2" name="Text 0"/>
-          <p:cNvSpPr/>
-          <p:nvPr/>
-        </p:nvSpPr>
-        <p:spPr>
-          <a:xfrm>
-            <a:off x="640080" y="777240"/>
-            <a:ext cx="11064240" cy="2103120"/>
+          <p:cNvPr id="2" name="Shape 0"/>
+          <p:cNvSpPr/>
+          <p:nvPr/>
+        </p:nvSpPr>
+        <p:spPr>
+          <a:xfrm>
+            <a:off x="365760" y="365760"/>
+            <a:ext cx="365760" cy="0"/>
+          </a:xfrm>
+          <a:prstGeom prst="line">
+            <a:avLst/>
+          </a:prstGeom>
+          <a:noFill/>
+          <a:ln w="19050">
+            <a:solidFill>
+              <a:srgbClr val="0A4F4C"/>
+            </a:solidFill>
+            <a:prstDash val="solid"/>
+          </a:ln>
+        </p:spPr>
+      </p:sp>
+      <p:sp>
+        <p:nvSpPr>
+          <p:cNvPr id="3" name="Shape 1"/>
+          <p:cNvSpPr/>
+          <p:nvPr/>
+        </p:nvSpPr>
+        <p:spPr>
+          <a:xfrm>
+            <a:off x="365760" y="365760"/>
+            <a:ext cx="0" cy="365760"/>
+          </a:xfrm>
+          <a:prstGeom prst="line">
+            <a:avLst/>
+          </a:prstGeom>
+          <a:noFill/>
+          <a:ln w="19050">
+            <a:solidFill>
+              <a:srgbClr val="0A4F4C"/>
+            </a:solidFill>
+            <a:prstDash val="solid"/>
+          </a:ln>
+        </p:spPr>
+      </p:sp>
+      <p:sp>
+        <p:nvSpPr>
+          <p:cNvPr id="4" name="Shape 2"/>
+          <p:cNvSpPr/>
+          <p:nvPr/>
+        </p:nvSpPr>
+        <p:spPr>
+          <a:xfrm>
+            <a:off x="11460175" y="365760"/>
+            <a:ext cx="365760" cy="0"/>
+          </a:xfrm>
+          <a:prstGeom prst="line">
+            <a:avLst/>
+          </a:prstGeom>
+          <a:noFill/>
+          <a:ln w="19050">
+            <a:solidFill>
+              <a:srgbClr val="0A4F4C"/>
+            </a:solidFill>
+            <a:prstDash val="solid"/>
+          </a:ln>
+        </p:spPr>
+      </p:sp>
+      <p:sp>
+        <p:nvSpPr>
+          <p:cNvPr id="5" name="Shape 3"/>
+          <p:cNvSpPr/>
+          <p:nvPr/>
+        </p:nvSpPr>
+        <p:spPr>
+          <a:xfrm>
+            <a:off x="11825935" y="365760"/>
+            <a:ext cx="0" cy="365760"/>
+          </a:xfrm>
+          <a:prstGeom prst="line">
+            <a:avLst/>
+          </a:prstGeom>
+          <a:noFill/>
+          <a:ln w="19050">
+            <a:solidFill>
+              <a:srgbClr val="0A4F4C"/>
+            </a:solidFill>
+            <a:prstDash val="solid"/>
+          </a:ln>
+        </p:spPr>
+      </p:sp>
+      <p:sp>
+        <p:nvSpPr>
+          <p:cNvPr id="6" name="Shape 4"/>
+          <p:cNvSpPr/>
+          <p:nvPr/>
+        </p:nvSpPr>
+        <p:spPr>
+          <a:xfrm>
+            <a:off x="365760" y="6492240"/>
+            <a:ext cx="365760" cy="0"/>
+          </a:xfrm>
+          <a:prstGeom prst="line">
+            <a:avLst/>
+          </a:prstGeom>
+          <a:noFill/>
+          <a:ln w="19050">
+            <a:solidFill>
+              <a:srgbClr val="0A4F4C"/>
+            </a:solidFill>
+            <a:prstDash val="solid"/>
+          </a:ln>
+        </p:spPr>
+      </p:sp>
+      <p:sp>
+        <p:nvSpPr>
+          <p:cNvPr id="7" name="Shape 5"/>
+          <p:cNvSpPr/>
+          <p:nvPr/>
+        </p:nvSpPr>
+        <p:spPr>
+          <a:xfrm>
+            <a:off x="365760" y="6126480"/>
+            <a:ext cx="0" cy="365760"/>
+          </a:xfrm>
+          <a:prstGeom prst="line">
+            <a:avLst/>
+          </a:prstGeom>
+          <a:noFill/>
+          <a:ln w="19050">
+            <a:solidFill>
+              <a:srgbClr val="0A4F4C"/>
+            </a:solidFill>
+            <a:prstDash val="solid"/>
+          </a:ln>
+        </p:spPr>
+      </p:sp>
+      <p:sp>
+        <p:nvSpPr>
+          <p:cNvPr id="8" name="Shape 6"/>
+          <p:cNvSpPr/>
+          <p:nvPr/>
+        </p:nvSpPr>
+        <p:spPr>
+          <a:xfrm>
+            <a:off x="11460175" y="6492240"/>
+            <a:ext cx="365760" cy="0"/>
+          </a:xfrm>
+          <a:prstGeom prst="line">
+            <a:avLst/>
+          </a:prstGeom>
+          <a:noFill/>
+          <a:ln w="19050">
+            <a:solidFill>
+              <a:srgbClr val="0A4F4C"/>
+            </a:solidFill>
+            <a:prstDash val="solid"/>
+          </a:ln>
+        </p:spPr>
+      </p:sp>
+      <p:sp>
+        <p:nvSpPr>
+          <p:cNvPr id="9" name="Shape 7"/>
+          <p:cNvSpPr/>
+          <p:nvPr/>
+        </p:nvSpPr>
+        <p:spPr>
+          <a:xfrm>
+            <a:off x="11825935" y="6126480"/>
+            <a:ext cx="0" cy="365760"/>
+          </a:xfrm>
+          <a:prstGeom prst="line">
+            <a:avLst/>
+          </a:prstGeom>
+          <a:noFill/>
+          <a:ln w="19050">
+            <a:solidFill>
+              <a:srgbClr val="0A4F4C"/>
+            </a:solidFill>
+            <a:prstDash val="solid"/>
+          </a:ln>
+        </p:spPr>
+      </p:sp>
+      <p:sp>
+        <p:nvSpPr>
+          <p:cNvPr id="10" name="Text 8"/>
+          <p:cNvSpPr/>
+          <p:nvPr/>
+        </p:nvSpPr>
+        <p:spPr>
+          <a:xfrm>
+            <a:off x="896112" y="1645920"/>
+            <a:ext cx="10362895" cy="1645920"/>
           </a:xfrm>
           <a:prstGeom prst="rect">
             <a:avLst/>
@@ -1170,30 +1354,30 @@
               <a:buNone/>
             </a:pPr>
             <a:r>
-              <a:rPr lang="en-US" sz="5000" b="1" dirty="0">
+              <a:rPr lang="en-US" sz="3800" b="1" dirty="0">
                 <a:solidFill>
-                  <a:srgbClr val="FFFFFF"/>
+                  <a:srgbClr val="17302C"/>
                 </a:solidFill>
-                <a:latin typeface="Times New Roman" pitchFamily="34" charset="0"/>
-                <a:ea typeface="Times New Roman" pitchFamily="34" charset="-122"/>
-                <a:cs typeface="Times New Roman" pitchFamily="34" charset="-120"/>
+                <a:latin typeface="Century Gothic" pitchFamily="34" charset="0"/>
+                <a:ea typeface="Century Gothic" pitchFamily="34" charset="-122"/>
+                <a:cs typeface="Century Gothic" pitchFamily="34" charset="-120"/>
               </a:rPr>
               <a:t>Marine Vessel Condition Monitoring</a:t>
             </a:r>
-            <a:endParaRPr lang="en-US" sz="5000" dirty="0"/>
-          </a:p>
-        </p:txBody>
-      </p:sp>
-      <p:sp>
-        <p:nvSpPr>
-          <p:cNvPr id="3" name="Text 1"/>
-          <p:cNvSpPr/>
-          <p:nvPr/>
-        </p:nvSpPr>
-        <p:spPr>
-          <a:xfrm>
-            <a:off x="658368" y="2971800"/>
-            <a:ext cx="10972800" cy="365760"/>
+            <a:endParaRPr lang="en-US" sz="3800" dirty="0"/>
+          </a:p>
+        </p:txBody>
+      </p:sp>
+      <p:sp>
+        <p:nvSpPr>
+          <p:cNvPr id="11" name="Text 9"/>
+          <p:cNvSpPr/>
+          <p:nvPr/>
+        </p:nvSpPr>
+        <p:spPr>
+          <a:xfrm>
+            <a:off x="914400" y="3337560"/>
+            <a:ext cx="10362895" cy="365760"/>
           </a:xfrm>
           <a:prstGeom prst="rect">
             <a:avLst/>
@@ -1209,9 +1393,9 @@
               <a:buNone/>
             </a:pPr>
             <a:r>
-              <a:rPr lang="en-US" sz="1600" dirty="0">
+              <a:rPr lang="en-US" sz="1450" dirty="0">
                 <a:solidFill>
-                  <a:srgbClr val="4F98C0"/>
+                  <a:srgbClr val="5F6B74"/>
                 </a:solidFill>
                 <a:latin typeface="Calibri" pitchFamily="34" charset="0"/>
                 <a:ea typeface="Calibri" pitchFamily="34" charset="-122"/>
@@ -1219,41 +1403,41 @@
               </a:rPr>
               <a:t>Gopi Krishnan   ·   X25112627</a:t>
             </a:r>
-            <a:endParaRPr lang="en-US" sz="1600" dirty="0"/>
-          </a:p>
-        </p:txBody>
-      </p:sp>
-      <p:sp>
-        <p:nvSpPr>
-          <p:cNvPr id="4" name="Text 2"/>
-          <p:cNvSpPr/>
-          <p:nvPr/>
-        </p:nvSpPr>
-        <p:spPr>
-          <a:xfrm>
-            <a:off x="658368" y="3611880"/>
-            <a:ext cx="10424160" cy="1280160"/>
-          </a:xfrm>
-          <a:prstGeom prst="rect">
-            <a:avLst/>
-          </a:prstGeom>
-          <a:noFill/>
-          <a:ln/>
-        </p:spPr>
-        <p:txBody>
-          <a:bodyPr wrap="square" rtlCol="0" anchor="ctr"/>
+            <a:endParaRPr lang="en-US" sz="1450" dirty="0"/>
+          </a:p>
+        </p:txBody>
+      </p:sp>
+      <p:sp>
+        <p:nvSpPr>
+          <p:cNvPr id="12" name="Text 10"/>
+          <p:cNvSpPr/>
+          <p:nvPr/>
+        </p:nvSpPr>
+        <p:spPr>
+          <a:xfrm>
+            <a:off x="914400" y="3931920"/>
+            <a:ext cx="8138160" cy="1325880"/>
+          </a:xfrm>
+          <a:prstGeom prst="rect">
+            <a:avLst/>
+          </a:prstGeom>
+          <a:noFill/>
+          <a:ln/>
+        </p:spPr>
+        <p:txBody>
+          <a:bodyPr wrap="square" rtlCol="0" anchor="t"/>
           <a:lstStyle/>
           <a:p>
             <a:pPr indent="0" marL="0">
               <a:lnSpc>
-                <a:spcPct val="108000"/>
+                <a:spcPct val="130000"/>
               </a:lnSpc>
               <a:buNone/>
             </a:pPr>
             <a:r>
-              <a:rPr lang="en-US" sz="1900" dirty="0">
+              <a:rPr lang="en-US" sz="1400" dirty="0">
                 <a:solidFill>
-                  <a:srgbClr val="CEE2EE"/>
+                  <a:srgbClr val="17302C"/>
                 </a:solidFill>
                 <a:latin typeface="Calibri" pitchFamily="34" charset="0"/>
                 <a:ea typeface="Calibri" pitchFamily="34" charset="-122"/>
@@ -1261,233 +1445,7 @@
               </a:rPr>
               <a:t>Between fixed rounds the bridge is blind — a fuel-burn spike, a ballast imbalance or rising hull vibration surfaces only at the next check, and the raw data cannot fit the ship-to-shore link.</a:t>
             </a:r>
-            <a:endParaRPr lang="en-US" sz="1900" dirty="0"/>
-          </a:p>
-        </p:txBody>
-      </p:sp>
-      <p:sp>
-        <p:nvSpPr>
-          <p:cNvPr id="5" name="Shape 3"/>
-          <p:cNvSpPr/>
-          <p:nvPr/>
-        </p:nvSpPr>
-        <p:spPr>
-          <a:xfrm>
-            <a:off x="658368" y="5074920"/>
-            <a:ext cx="2651760" cy="566928"/>
-          </a:xfrm>
-          <a:prstGeom prst="roundRect">
-            <a:avLst>
-              <a:gd name="adj" fmla="val 50000"/>
-            </a:avLst>
-          </a:prstGeom>
-          <a:solidFill>
-            <a:srgbClr val="143A54"/>
-          </a:solidFill>
-          <a:ln w="12700">
-            <a:solidFill>
-              <a:srgbClr val="1E76A6"/>
-            </a:solidFill>
-            <a:prstDash val="solid"/>
-          </a:ln>
-        </p:spPr>
-      </p:sp>
-      <p:sp>
-        <p:nvSpPr>
-          <p:cNvPr id="6" name="Text 4"/>
-          <p:cNvSpPr/>
-          <p:nvPr/>
-        </p:nvSpPr>
-        <p:spPr>
-          <a:xfrm>
-            <a:off x="658368" y="5074920"/>
-            <a:ext cx="2651760" cy="566928"/>
-          </a:xfrm>
-          <a:prstGeom prst="rect">
-            <a:avLst/>
-          </a:prstGeom>
-          <a:noFill/>
-          <a:ln/>
-        </p:spPr>
-        <p:txBody>
-          <a:bodyPr wrap="square" lIns="0" tIns="0" rIns="0" bIns="0" rtlCol="0" anchor="ctr"/>
-          <a:lstStyle/>
-          <a:p>
-            <a:pPr algn="ctr" indent="0" marL="0">
-              <a:buNone/>
-            </a:pPr>
-            <a:r>
-              <a:rPr lang="en-US" sz="1350" b="1" dirty="0">
-                <a:solidFill>
-                  <a:srgbClr val="E5A83C"/>
-                </a:solidFill>
-                <a:latin typeface="Calibri" pitchFamily="34" charset="0"/>
-                <a:ea typeface="Calibri" pitchFamily="34" charset="-122"/>
-                <a:cs typeface="Calibri" pitchFamily="34" charset="-120"/>
-              </a:rPr>
-              <a:t>Engine &gt; 75 °C</a:t>
-            </a:r>
-            <a:endParaRPr lang="en-US" sz="1350" dirty="0"/>
-          </a:p>
-        </p:txBody>
-      </p:sp>
-      <p:sp>
-        <p:nvSpPr>
-          <p:cNvPr id="7" name="Shape 5"/>
-          <p:cNvSpPr/>
-          <p:nvPr/>
-        </p:nvSpPr>
-        <p:spPr>
-          <a:xfrm>
-            <a:off x="3538728" y="5074920"/>
-            <a:ext cx="2651760" cy="566928"/>
-          </a:xfrm>
-          <a:prstGeom prst="roundRect">
-            <a:avLst>
-              <a:gd name="adj" fmla="val 50000"/>
-            </a:avLst>
-          </a:prstGeom>
-          <a:solidFill>
-            <a:srgbClr val="143A54"/>
-          </a:solidFill>
-          <a:ln w="12700">
-            <a:solidFill>
-              <a:srgbClr val="1E76A6"/>
-            </a:solidFill>
-            <a:prstDash val="solid"/>
-          </a:ln>
-        </p:spPr>
-      </p:sp>
-      <p:sp>
-        <p:nvSpPr>
-          <p:cNvPr id="8" name="Text 6"/>
-          <p:cNvSpPr/>
-          <p:nvPr/>
-        </p:nvSpPr>
-        <p:spPr>
-          <a:xfrm>
-            <a:off x="3538728" y="5074920"/>
-            <a:ext cx="2651760" cy="566928"/>
-          </a:xfrm>
-          <a:prstGeom prst="rect">
-            <a:avLst/>
-          </a:prstGeom>
-          <a:noFill/>
-          <a:ln/>
-        </p:spPr>
-        <p:txBody>
-          <a:bodyPr wrap="square" lIns="0" tIns="0" rIns="0" bIns="0" rtlCol="0" anchor="ctr"/>
-          <a:lstStyle/>
-          <a:p>
-            <a:pPr algn="ctr" indent="0" marL="0">
-              <a:buNone/>
-            </a:pPr>
-            <a:r>
-              <a:rPr lang="en-US" sz="1350" b="1" dirty="0">
-                <a:solidFill>
-                  <a:srgbClr val="E5A83C"/>
-                </a:solidFill>
-                <a:latin typeface="Calibri" pitchFamily="34" charset="0"/>
-                <a:ea typeface="Calibri" pitchFamily="34" charset="-122"/>
-                <a:cs typeface="Calibri" pitchFamily="34" charset="-120"/>
-              </a:rPr>
-              <a:t>Fuel burn &gt; 350 L/h</a:t>
-            </a:r>
-            <a:endParaRPr lang="en-US" sz="1350" dirty="0"/>
-          </a:p>
-        </p:txBody>
-      </p:sp>
-      <p:sp>
-        <p:nvSpPr>
-          <p:cNvPr id="9" name="Shape 7"/>
-          <p:cNvSpPr/>
-          <p:nvPr/>
-        </p:nvSpPr>
-        <p:spPr>
-          <a:xfrm>
-            <a:off x="6419088" y="5074920"/>
-            <a:ext cx="2651760" cy="566928"/>
-          </a:xfrm>
-          <a:prstGeom prst="roundRect">
-            <a:avLst>
-              <a:gd name="adj" fmla="val 50000"/>
-            </a:avLst>
-          </a:prstGeom>
-          <a:solidFill>
-            <a:srgbClr val="143A54"/>
-          </a:solidFill>
-          <a:ln w="12700">
-            <a:solidFill>
-              <a:srgbClr val="1E76A6"/>
-            </a:solidFill>
-            <a:prstDash val="solid"/>
-          </a:ln>
-        </p:spPr>
-      </p:sp>
-      <p:sp>
-        <p:nvSpPr>
-          <p:cNvPr id="10" name="Text 8"/>
-          <p:cNvSpPr/>
-          <p:nvPr/>
-        </p:nvSpPr>
-        <p:spPr>
-          <a:xfrm>
-            <a:off x="6419088" y="5074920"/>
-            <a:ext cx="2651760" cy="566928"/>
-          </a:xfrm>
-          <a:prstGeom prst="rect">
-            <a:avLst/>
-          </a:prstGeom>
-          <a:noFill/>
-          <a:ln/>
-        </p:spPr>
-        <p:txBody>
-          <a:bodyPr wrap="square" lIns="0" tIns="0" rIns="0" bIns="0" rtlCol="0" anchor="ctr"/>
-          <a:lstStyle/>
-          <a:p>
-            <a:pPr algn="ctr" indent="0" marL="0">
-              <a:buNone/>
-            </a:pPr>
-            <a:r>
-              <a:rPr lang="en-US" sz="1350" b="1" dirty="0">
-                <a:solidFill>
-                  <a:srgbClr val="E5A83C"/>
-                </a:solidFill>
-                <a:latin typeface="Calibri" pitchFamily="34" charset="0"/>
-                <a:ea typeface="Calibri" pitchFamily="34" charset="-122"/>
-                <a:cs typeface="Calibri" pitchFamily="34" charset="-120"/>
-              </a:rPr>
-              <a:t>Hull peak &gt; 15 mm/s</a:t>
-            </a:r>
-            <a:endParaRPr lang="en-US" sz="1350" dirty="0"/>
-          </a:p>
-        </p:txBody>
-      </p:sp>
-      <p:sp>
-        <p:nvSpPr>
-          <p:cNvPr id="11" name="Text 9"/>
-          <p:cNvSpPr/>
-          <p:nvPr/>
-        </p:nvSpPr>
-        <p:spPr>
-          <a:xfrm>
-            <a:off x="658368" y="6355080"/>
-            <a:ext cx="10972800" cy="320040"/>
-          </a:xfrm>
-          <a:prstGeom prst="rect">
-            <a:avLst/>
-          </a:prstGeom>
-          <a:noFill/>
-          <a:ln/>
-        </p:spPr>
-        <p:txBody>
-          <a:bodyPr wrap="square" rtlCol="0" anchor="ctr"/>
-          <a:lstStyle/>
-          <a:p>
-            <a:pPr indent="0" marL="0">
-              <a:buNone/>
-            </a:pPr>
-            <a:endParaRPr lang="en-US" sz="1250" dirty="0"/>
+            <a:endParaRPr lang="en-US" sz="1400" dirty="0"/>
           </a:p>
         </p:txBody>
       </p:sp>
@@ -1505,7 +1463,7 @@
     <p:bg>
       <p:bgPr>
         <a:solidFill>
-          <a:srgbClr val="FFFFFF"/>
+          <a:srgbClr val="EEF5F4"/>
         </a:solidFill>
       </p:bgPr>
     </p:bg>
@@ -1525,23 +1483,207 @@
       </p:grpSpPr>
       <p:sp>
         <p:nvSpPr>
-          <p:cNvPr id="2" name="Text 0"/>
-          <p:cNvSpPr/>
-          <p:nvPr/>
-        </p:nvSpPr>
-        <p:spPr>
-          <a:xfrm>
-            <a:off x="640080" y="457200"/>
-            <a:ext cx="10972800" cy="640080"/>
-          </a:xfrm>
-          <a:prstGeom prst="rect">
-            <a:avLst/>
-          </a:prstGeom>
-          <a:noFill/>
-          <a:ln/>
-        </p:spPr>
-        <p:txBody>
-          <a:bodyPr wrap="square" rtlCol="0" anchor="ctr"/>
+          <p:cNvPr id="2" name="Shape 0"/>
+          <p:cNvSpPr/>
+          <p:nvPr/>
+        </p:nvSpPr>
+        <p:spPr>
+          <a:xfrm>
+            <a:off x="365760" y="365760"/>
+            <a:ext cx="365760" cy="0"/>
+          </a:xfrm>
+          <a:prstGeom prst="line">
+            <a:avLst/>
+          </a:prstGeom>
+          <a:noFill/>
+          <a:ln w="19050">
+            <a:solidFill>
+              <a:srgbClr val="0A4F4C"/>
+            </a:solidFill>
+            <a:prstDash val="solid"/>
+          </a:ln>
+        </p:spPr>
+      </p:sp>
+      <p:sp>
+        <p:nvSpPr>
+          <p:cNvPr id="3" name="Shape 1"/>
+          <p:cNvSpPr/>
+          <p:nvPr/>
+        </p:nvSpPr>
+        <p:spPr>
+          <a:xfrm>
+            <a:off x="365760" y="365760"/>
+            <a:ext cx="0" cy="365760"/>
+          </a:xfrm>
+          <a:prstGeom prst="line">
+            <a:avLst/>
+          </a:prstGeom>
+          <a:noFill/>
+          <a:ln w="19050">
+            <a:solidFill>
+              <a:srgbClr val="0A4F4C"/>
+            </a:solidFill>
+            <a:prstDash val="solid"/>
+          </a:ln>
+        </p:spPr>
+      </p:sp>
+      <p:sp>
+        <p:nvSpPr>
+          <p:cNvPr id="4" name="Shape 2"/>
+          <p:cNvSpPr/>
+          <p:nvPr/>
+        </p:nvSpPr>
+        <p:spPr>
+          <a:xfrm>
+            <a:off x="11460175" y="365760"/>
+            <a:ext cx="365760" cy="0"/>
+          </a:xfrm>
+          <a:prstGeom prst="line">
+            <a:avLst/>
+          </a:prstGeom>
+          <a:noFill/>
+          <a:ln w="19050">
+            <a:solidFill>
+              <a:srgbClr val="0A4F4C"/>
+            </a:solidFill>
+            <a:prstDash val="solid"/>
+          </a:ln>
+        </p:spPr>
+      </p:sp>
+      <p:sp>
+        <p:nvSpPr>
+          <p:cNvPr id="5" name="Shape 3"/>
+          <p:cNvSpPr/>
+          <p:nvPr/>
+        </p:nvSpPr>
+        <p:spPr>
+          <a:xfrm>
+            <a:off x="11825935" y="365760"/>
+            <a:ext cx="0" cy="365760"/>
+          </a:xfrm>
+          <a:prstGeom prst="line">
+            <a:avLst/>
+          </a:prstGeom>
+          <a:noFill/>
+          <a:ln w="19050">
+            <a:solidFill>
+              <a:srgbClr val="0A4F4C"/>
+            </a:solidFill>
+            <a:prstDash val="solid"/>
+          </a:ln>
+        </p:spPr>
+      </p:sp>
+      <p:sp>
+        <p:nvSpPr>
+          <p:cNvPr id="6" name="Shape 4"/>
+          <p:cNvSpPr/>
+          <p:nvPr/>
+        </p:nvSpPr>
+        <p:spPr>
+          <a:xfrm>
+            <a:off x="365760" y="6492240"/>
+            <a:ext cx="365760" cy="0"/>
+          </a:xfrm>
+          <a:prstGeom prst="line">
+            <a:avLst/>
+          </a:prstGeom>
+          <a:noFill/>
+          <a:ln w="19050">
+            <a:solidFill>
+              <a:srgbClr val="0A4F4C"/>
+            </a:solidFill>
+            <a:prstDash val="solid"/>
+          </a:ln>
+        </p:spPr>
+      </p:sp>
+      <p:sp>
+        <p:nvSpPr>
+          <p:cNvPr id="7" name="Shape 5"/>
+          <p:cNvSpPr/>
+          <p:nvPr/>
+        </p:nvSpPr>
+        <p:spPr>
+          <a:xfrm>
+            <a:off x="365760" y="6126480"/>
+            <a:ext cx="0" cy="365760"/>
+          </a:xfrm>
+          <a:prstGeom prst="line">
+            <a:avLst/>
+          </a:prstGeom>
+          <a:noFill/>
+          <a:ln w="19050">
+            <a:solidFill>
+              <a:srgbClr val="0A4F4C"/>
+            </a:solidFill>
+            <a:prstDash val="solid"/>
+          </a:ln>
+        </p:spPr>
+      </p:sp>
+      <p:sp>
+        <p:nvSpPr>
+          <p:cNvPr id="8" name="Shape 6"/>
+          <p:cNvSpPr/>
+          <p:nvPr/>
+        </p:nvSpPr>
+        <p:spPr>
+          <a:xfrm>
+            <a:off x="11460175" y="6492240"/>
+            <a:ext cx="365760" cy="0"/>
+          </a:xfrm>
+          <a:prstGeom prst="line">
+            <a:avLst/>
+          </a:prstGeom>
+          <a:noFill/>
+          <a:ln w="19050">
+            <a:solidFill>
+              <a:srgbClr val="0A4F4C"/>
+            </a:solidFill>
+            <a:prstDash val="solid"/>
+          </a:ln>
+        </p:spPr>
+      </p:sp>
+      <p:sp>
+        <p:nvSpPr>
+          <p:cNvPr id="9" name="Shape 7"/>
+          <p:cNvSpPr/>
+          <p:nvPr/>
+        </p:nvSpPr>
+        <p:spPr>
+          <a:xfrm>
+            <a:off x="11825935" y="6126480"/>
+            <a:ext cx="0" cy="365760"/>
+          </a:xfrm>
+          <a:prstGeom prst="line">
+            <a:avLst/>
+          </a:prstGeom>
+          <a:noFill/>
+          <a:ln w="19050">
+            <a:solidFill>
+              <a:srgbClr val="0A4F4C"/>
+            </a:solidFill>
+            <a:prstDash val="solid"/>
+          </a:ln>
+        </p:spPr>
+      </p:sp>
+      <p:sp>
+        <p:nvSpPr>
+          <p:cNvPr id="10" name="Text 8"/>
+          <p:cNvSpPr/>
+          <p:nvPr/>
+        </p:nvSpPr>
+        <p:spPr>
+          <a:xfrm>
+            <a:off x="914400" y="822960"/>
+            <a:ext cx="914400" cy="640080"/>
+          </a:xfrm>
+          <a:prstGeom prst="rect">
+            <a:avLst/>
+          </a:prstGeom>
+          <a:noFill/>
+          <a:ln/>
+        </p:spPr>
+        <p:txBody>
+          <a:bodyPr wrap="square" lIns="0" tIns="0" rIns="0" bIns="0" rtlCol="0" anchor="ctr"/>
           <a:lstStyle/>
           <a:p>
             <a:pPr indent="0" marL="0">
@@ -1550,13 +1692,13 @@
             <a:r>
               <a:rPr lang="en-US" sz="3000" b="1" dirty="0">
                 <a:solidFill>
-                  <a:srgbClr val="102636"/>
+                  <a:srgbClr val="0A4F4C"/>
                 </a:solidFill>
-                <a:latin typeface="Times New Roman" pitchFamily="34" charset="0"/>
-                <a:ea typeface="Times New Roman" pitchFamily="34" charset="-122"/>
-                <a:cs typeface="Times New Roman" pitchFamily="34" charset="-120"/>
+                <a:latin typeface="Century Gothic" pitchFamily="34" charset="0"/>
+                <a:ea typeface="Century Gothic" pitchFamily="34" charset="-122"/>
+                <a:cs typeface="Century Gothic" pitchFamily="34" charset="-120"/>
               </a:rPr>
-              <a:t>What I Built — Sensor to Bridge Screen</a:t>
+              <a:t>01</a:t>
             </a:r>
             <a:endParaRPr lang="en-US" sz="3000" dirty="0"/>
           </a:p>
@@ -1564,107 +1706,53 @@
       </p:sp>
       <p:sp>
         <p:nvSpPr>
-          <p:cNvPr id="3" name="Shape 1"/>
-          <p:cNvSpPr/>
-          <p:nvPr/>
-        </p:nvSpPr>
-        <p:spPr>
-          <a:xfrm>
-            <a:off x="640080" y="1554480"/>
-            <a:ext cx="3200400" cy="3383280"/>
-          </a:xfrm>
-          <a:prstGeom prst="roundRect">
-            <a:avLst>
-              <a:gd name="adj" fmla="val 2857"/>
-            </a:avLst>
-          </a:prstGeom>
-          <a:solidFill>
-            <a:srgbClr val="EDF4F9"/>
-          </a:solidFill>
-          <a:ln w="19050">
-            <a:solidFill>
-              <a:srgbClr val="4F98C0"/>
-            </a:solidFill>
-            <a:prstDash val="solid"/>
-          </a:ln>
-        </p:spPr>
-      </p:sp>
-      <p:sp>
-        <p:nvSpPr>
-          <p:cNvPr id="4" name="Text 2"/>
-          <p:cNvSpPr/>
-          <p:nvPr/>
-        </p:nvSpPr>
-        <p:spPr>
-          <a:xfrm>
-            <a:off x="640080" y="1691640"/>
-            <a:ext cx="3200400" cy="365760"/>
-          </a:xfrm>
-          <a:prstGeom prst="rect">
-            <a:avLst/>
-          </a:prstGeom>
-          <a:noFill/>
-          <a:ln/>
-        </p:spPr>
-        <p:txBody>
-          <a:bodyPr wrap="square" rtlCol="0" anchor="ctr"/>
-          <a:lstStyle/>
-          <a:p>
-            <a:pPr algn="ctr" indent="0" marL="0">
+          <p:cNvPr id="11" name="Text 9"/>
+          <p:cNvSpPr/>
+          <p:nvPr/>
+        </p:nvSpPr>
+        <p:spPr>
+          <a:xfrm>
+            <a:off x="1783080" y="996696"/>
+            <a:ext cx="9494215" cy="274320"/>
+          </a:xfrm>
+          <a:prstGeom prst="rect">
+            <a:avLst/>
+          </a:prstGeom>
+          <a:noFill/>
+          <a:ln/>
+        </p:spPr>
+        <p:txBody>
+          <a:bodyPr wrap="square" lIns="0" tIns="0" rIns="0" bIns="0" rtlCol="0" anchor="ctr"/>
+          <a:lstStyle/>
+          <a:p>
+            <a:pPr indent="0" marL="0">
               <a:buNone/>
             </a:pPr>
             <a:r>
-              <a:rPr lang="en-US" sz="1200" b="1" spc="300" kern="0" dirty="0">
+              <a:rPr lang="en-US" sz="1100" b="1" spc="200" kern="0" dirty="0">
                 <a:solidFill>
-                  <a:srgbClr val="4F98C0"/>
+                  <a:srgbClr val="5F6B74"/>
                 </a:solidFill>
                 <a:latin typeface="Calibri" pitchFamily="34" charset="0"/>
                 <a:ea typeface="Calibri" pitchFamily="34" charset="-122"/>
                 <a:cs typeface="Calibri" pitchFamily="34" charset="-120"/>
               </a:rPr>
-              <a:t>EDGE</a:t>
-            </a:r>
-            <a:endParaRPr lang="en-US" sz="1200" dirty="0"/>
-          </a:p>
-        </p:txBody>
-      </p:sp>
-      <p:sp>
-        <p:nvSpPr>
-          <p:cNvPr id="5" name="Shape 3"/>
-          <p:cNvSpPr/>
-          <p:nvPr/>
-        </p:nvSpPr>
-        <p:spPr>
-          <a:xfrm>
-            <a:off x="914400" y="2286000"/>
-            <a:ext cx="2651760" cy="1005840"/>
-          </a:xfrm>
-          <a:prstGeom prst="roundRect">
-            <a:avLst>
-              <a:gd name="adj" fmla="val 7273"/>
-            </a:avLst>
-          </a:prstGeom>
-          <a:solidFill>
-            <a:srgbClr val="FFFFFF"/>
-          </a:solidFill>
-          <a:ln w="15240">
-            <a:solidFill>
-              <a:srgbClr val="4F98C0"/>
-            </a:solidFill>
-            <a:prstDash val="solid"/>
-          </a:ln>
-        </p:spPr>
-      </p:sp>
-      <p:sp>
-        <p:nvSpPr>
-          <p:cNvPr id="6" name="Text 4"/>
-          <p:cNvSpPr/>
-          <p:nvPr/>
-        </p:nvSpPr>
-        <p:spPr>
-          <a:xfrm>
-            <a:off x="914400" y="2432304"/>
-            <a:ext cx="2651760" cy="365760"/>
+              <a:t>ARCHITECTURE</a:t>
+            </a:r>
+            <a:endParaRPr lang="en-US" sz="1100" dirty="0"/>
+          </a:p>
+        </p:txBody>
+      </p:sp>
+      <p:sp>
+        <p:nvSpPr>
+          <p:cNvPr id="12" name="Text 10"/>
+          <p:cNvSpPr/>
+          <p:nvPr/>
+        </p:nvSpPr>
+        <p:spPr>
+          <a:xfrm>
+            <a:off x="914400" y="1472184"/>
+            <a:ext cx="10362895" cy="640080"/>
           </a:xfrm>
           <a:prstGeom prst="rect">
             <a:avLst/>
@@ -1676,34 +1764,140 @@
           <a:bodyPr wrap="square" lIns="0" tIns="0" rIns="0" bIns="0" rtlCol="0" anchor="ctr"/>
           <a:lstStyle/>
           <a:p>
-            <a:pPr algn="ctr" indent="0" marL="0">
+            <a:pPr indent="0" marL="0">
               <a:buNone/>
             </a:pPr>
             <a:r>
-              <a:rPr lang="en-US" sz="1400" b="1" dirty="0">
+              <a:rPr lang="en-US" sz="2300" b="1" dirty="0">
                 <a:solidFill>
-                  <a:srgbClr val="102636"/>
+                  <a:srgbClr val="17302C"/>
                 </a:solidFill>
-                <a:latin typeface="Calibri" pitchFamily="34" charset="0"/>
-                <a:ea typeface="Calibri" pitchFamily="34" charset="-122"/>
-                <a:cs typeface="Calibri" pitchFamily="34" charset="-120"/>
+                <a:latin typeface="Century Gothic" pitchFamily="34" charset="0"/>
+                <a:ea typeface="Century Gothic" pitchFamily="34" charset="-122"/>
+                <a:cs typeface="Century Gothic" pitchFamily="34" charset="-120"/>
+              </a:rPr>
+              <a:t>What I Built — Sensor to Bridge Screen</a:t>
+            </a:r>
+            <a:endParaRPr lang="en-US" sz="2300" dirty="0"/>
+          </a:p>
+        </p:txBody>
+      </p:sp>
+      <p:sp>
+        <p:nvSpPr>
+          <p:cNvPr id="13" name="Shape 11"/>
+          <p:cNvSpPr/>
+          <p:nvPr/>
+        </p:nvSpPr>
+        <p:spPr>
+          <a:xfrm>
+            <a:off x="914400" y="3063240"/>
+            <a:ext cx="1346149" cy="1965960"/>
+          </a:xfrm>
+          <a:prstGeom prst="roundRect">
+            <a:avLst/>
+          </a:prstGeom>
+          <a:solidFill>
+            <a:srgbClr val="0A4F4C"/>
+          </a:solidFill>
+          <a:ln w="12700">
+            <a:solidFill>
+              <a:srgbClr val="0A4F4C"/>
+            </a:solidFill>
+            <a:prstDash val="solid"/>
+          </a:ln>
+        </p:spPr>
+      </p:sp>
+      <p:sp>
+        <p:nvSpPr>
+          <p:cNvPr id="14" name="Text 12"/>
+          <p:cNvSpPr/>
+          <p:nvPr/>
+        </p:nvSpPr>
+        <p:spPr>
+          <a:xfrm>
+            <a:off x="1060704" y="3246120"/>
+            <a:ext cx="1053541" cy="320040"/>
+          </a:xfrm>
+          <a:prstGeom prst="rect">
+            <a:avLst/>
+          </a:prstGeom>
+          <a:noFill/>
+          <a:ln/>
+        </p:spPr>
+        <p:txBody>
+          <a:bodyPr wrap="square" lIns="0" tIns="0" rIns="0" bIns="0" rtlCol="0" anchor="ctr"/>
+          <a:lstStyle/>
+          <a:p>
+            <a:pPr indent="0" marL="0">
+              <a:buNone/>
+            </a:pPr>
+            <a:r>
+              <a:rPr lang="en-US" sz="1100" dirty="0">
+                <a:solidFill>
+                  <a:srgbClr val="FFFFFF"/>
+                </a:solidFill>
+                <a:latin typeface="Consolas" pitchFamily="34" charset="0"/>
+                <a:ea typeface="Consolas" pitchFamily="34" charset="-122"/>
+                <a:cs typeface="Consolas" pitchFamily="34" charset="-120"/>
+              </a:rPr>
+              <a:t>01</a:t>
+            </a:r>
+            <a:endParaRPr lang="en-US" sz="1100" dirty="0"/>
+          </a:p>
+        </p:txBody>
+      </p:sp>
+      <p:sp>
+        <p:nvSpPr>
+          <p:cNvPr id="15" name="Text 13"/>
+          <p:cNvSpPr/>
+          <p:nvPr/>
+        </p:nvSpPr>
+        <p:spPr>
+          <a:xfrm>
+            <a:off x="1060704" y="3685032"/>
+            <a:ext cx="1053541" cy="868680"/>
+          </a:xfrm>
+          <a:prstGeom prst="rect">
+            <a:avLst/>
+          </a:prstGeom>
+          <a:noFill/>
+          <a:ln/>
+        </p:spPr>
+        <p:txBody>
+          <a:bodyPr wrap="square" lIns="0" tIns="0" rIns="0" bIns="0" rtlCol="0" anchor="t"/>
+          <a:lstStyle/>
+          <a:p>
+            <a:pPr indent="0" marL="0">
+              <a:lnSpc>
+                <a:spcPct val="96000"/>
+              </a:lnSpc>
+              <a:buNone/>
+            </a:pPr>
+            <a:r>
+              <a:rPr lang="en-US" sz="1300" b="1" dirty="0">
+                <a:solidFill>
+                  <a:srgbClr val="FFFFFF"/>
+                </a:solidFill>
+                <a:latin typeface="Century Gothic" pitchFamily="34" charset="0"/>
+                <a:ea typeface="Century Gothic" pitchFamily="34" charset="-122"/>
+                <a:cs typeface="Century Gothic" pitchFamily="34" charset="-120"/>
               </a:rPr>
               <a:t>Vessel sensors</a:t>
             </a:r>
-            <a:endParaRPr lang="en-US" sz="1400" dirty="0"/>
-          </a:p>
-        </p:txBody>
-      </p:sp>
-      <p:sp>
-        <p:nvSpPr>
-          <p:cNvPr id="7" name="Text 5"/>
-          <p:cNvSpPr/>
-          <p:nvPr/>
-        </p:nvSpPr>
-        <p:spPr>
-          <a:xfrm>
-            <a:off x="914400" y="2816352"/>
-            <a:ext cx="2651760" cy="365760"/>
+            <a:endParaRPr lang="en-US" sz="1300" dirty="0"/>
+          </a:p>
+        </p:txBody>
+      </p:sp>
+      <p:sp>
+        <p:nvSpPr>
+          <p:cNvPr id="16" name="Text 14"/>
+          <p:cNvSpPr/>
+          <p:nvPr/>
+        </p:nvSpPr>
+        <p:spPr>
+          <a:xfrm>
+            <a:off x="1060704" y="4544568"/>
+            <a:ext cx="1053541" cy="365760"/>
           </a:xfrm>
           <a:prstGeom prst="rect">
             <a:avLst/>
@@ -1715,13 +1909,13 @@
           <a:bodyPr wrap="square" lIns="0" tIns="0" rIns="0" bIns="0" rtlCol="0" anchor="ctr"/>
           <a:lstStyle/>
           <a:p>
-            <a:pPr algn="ctr" indent="0" marL="0">
+            <a:pPr indent="0" marL="0">
               <a:buNone/>
             </a:pPr>
             <a:r>
-              <a:rPr lang="en-US" sz="1000" dirty="0">
+              <a:rPr lang="en-US" sz="900" dirty="0">
                 <a:solidFill>
-                  <a:srgbClr val="557280"/>
+                  <a:srgbClr val="FFFFFF"/>
                 </a:solidFill>
                 <a:latin typeface="Calibri" pitchFamily="34" charset="0"/>
                 <a:ea typeface="Calibri" pitchFamily="34" charset="-122"/>
@@ -1729,32 +1923,50 @@
               </a:rPr>
               <a:t>10 · 2 vessels</a:t>
             </a:r>
-            <a:endParaRPr lang="en-US" sz="1000" dirty="0"/>
-          </a:p>
-        </p:txBody>
-      </p:sp>
-      <p:sp>
-        <p:nvSpPr>
-          <p:cNvPr id="8" name="Shape 6"/>
-          <p:cNvSpPr/>
-          <p:nvPr/>
-        </p:nvSpPr>
-        <p:spPr>
-          <a:xfrm>
-            <a:off x="914400" y="3520440"/>
-            <a:ext cx="2651760" cy="1005840"/>
+            <a:endParaRPr lang="en-US" sz="900" dirty="0"/>
+          </a:p>
+        </p:txBody>
+      </p:sp>
+      <p:sp>
+        <p:nvSpPr>
+          <p:cNvPr id="17" name="Shape 15"/>
+          <p:cNvSpPr/>
+          <p:nvPr/>
+        </p:nvSpPr>
+        <p:spPr>
+          <a:xfrm>
+            <a:off x="2333701" y="3936492"/>
+            <a:ext cx="310896" cy="219456"/>
+          </a:xfrm>
+          <a:prstGeom prst="rightArrow">
+            <a:avLst/>
+          </a:prstGeom>
+          <a:solidFill>
+            <a:srgbClr val="5F6B74"/>
+          </a:solidFill>
+          <a:ln/>
+        </p:spPr>
+      </p:sp>
+      <p:sp>
+        <p:nvSpPr>
+          <p:cNvPr id="18" name="Shape 16"/>
+          <p:cNvSpPr/>
+          <p:nvPr/>
+        </p:nvSpPr>
+        <p:spPr>
+          <a:xfrm>
+            <a:off x="2717749" y="3063240"/>
+            <a:ext cx="1346149" cy="1965960"/>
           </a:xfrm>
           <a:prstGeom prst="roundRect">
-            <a:avLst>
-              <a:gd name="adj" fmla="val 7273"/>
-            </a:avLst>
+            <a:avLst/>
           </a:prstGeom>
           <a:solidFill>
-            <a:srgbClr val="FFFFFF"/>
+            <a:srgbClr val="0A4F4C"/>
           </a:solidFill>
-          <a:ln w="15240">
-            <a:solidFill>
-              <a:srgbClr val="4F98C0"/>
+          <a:ln w="12700">
+            <a:solidFill>
+              <a:srgbClr val="0A4F4C"/>
             </a:solidFill>
             <a:prstDash val="solid"/>
           </a:ln>
@@ -1762,14 +1974,14 @@
       </p:sp>
       <p:sp>
         <p:nvSpPr>
-          <p:cNvPr id="9" name="Text 7"/>
-          <p:cNvSpPr/>
-          <p:nvPr/>
-        </p:nvSpPr>
-        <p:spPr>
-          <a:xfrm>
-            <a:off x="914400" y="3666744"/>
-            <a:ext cx="2651760" cy="365760"/>
+          <p:cNvPr id="19" name="Text 17"/>
+          <p:cNvSpPr/>
+          <p:nvPr/>
+        </p:nvSpPr>
+        <p:spPr>
+          <a:xfrm>
+            <a:off x="2864053" y="3246120"/>
+            <a:ext cx="1053541" cy="320040"/>
           </a:xfrm>
           <a:prstGeom prst="rect">
             <a:avLst/>
@@ -1781,34 +1993,76 @@
           <a:bodyPr wrap="square" lIns="0" tIns="0" rIns="0" bIns="0" rtlCol="0" anchor="ctr"/>
           <a:lstStyle/>
           <a:p>
-            <a:pPr algn="ctr" indent="0" marL="0">
+            <a:pPr indent="0" marL="0">
               <a:buNone/>
             </a:pPr>
             <a:r>
-              <a:rPr lang="en-US" sz="1400" b="1" dirty="0">
+              <a:rPr lang="en-US" sz="1100" dirty="0">
                 <a:solidFill>
-                  <a:srgbClr val="102636"/>
+                  <a:srgbClr val="FFFFFF"/>
                 </a:solidFill>
-                <a:latin typeface="Calibri" pitchFamily="34" charset="0"/>
-                <a:ea typeface="Calibri" pitchFamily="34" charset="-122"/>
-                <a:cs typeface="Calibri" pitchFamily="34" charset="-120"/>
+                <a:latin typeface="Consolas" pitchFamily="34" charset="0"/>
+                <a:ea typeface="Consolas" pitchFamily="34" charset="-122"/>
+                <a:cs typeface="Consolas" pitchFamily="34" charset="-120"/>
+              </a:rPr>
+              <a:t>02</a:t>
+            </a:r>
+            <a:endParaRPr lang="en-US" sz="1100" dirty="0"/>
+          </a:p>
+        </p:txBody>
+      </p:sp>
+      <p:sp>
+        <p:nvSpPr>
+          <p:cNvPr id="20" name="Text 18"/>
+          <p:cNvSpPr/>
+          <p:nvPr/>
+        </p:nvSpPr>
+        <p:spPr>
+          <a:xfrm>
+            <a:off x="2864053" y="3685032"/>
+            <a:ext cx="1053541" cy="868680"/>
+          </a:xfrm>
+          <a:prstGeom prst="rect">
+            <a:avLst/>
+          </a:prstGeom>
+          <a:noFill/>
+          <a:ln/>
+        </p:spPr>
+        <p:txBody>
+          <a:bodyPr wrap="square" lIns="0" tIns="0" rIns="0" bIns="0" rtlCol="0" anchor="t"/>
+          <a:lstStyle/>
+          <a:p>
+            <a:pPr indent="0" marL="0">
+              <a:lnSpc>
+                <a:spcPct val="96000"/>
+              </a:lnSpc>
+              <a:buNone/>
+            </a:pPr>
+            <a:r>
+              <a:rPr lang="en-US" sz="1300" b="1" dirty="0">
+                <a:solidFill>
+                  <a:srgbClr val="FFFFFF"/>
+                </a:solidFill>
+                <a:latin typeface="Century Gothic" pitchFamily="34" charset="0"/>
+                <a:ea typeface="Century Gothic" pitchFamily="34" charset="-122"/>
+                <a:cs typeface="Century Gothic" pitchFamily="34" charset="-120"/>
               </a:rPr>
               <a:t>Fog node</a:t>
             </a:r>
-            <a:endParaRPr lang="en-US" sz="1400" dirty="0"/>
-          </a:p>
-        </p:txBody>
-      </p:sp>
-      <p:sp>
-        <p:nvSpPr>
-          <p:cNvPr id="10" name="Text 8"/>
-          <p:cNvSpPr/>
-          <p:nvPr/>
-        </p:nvSpPr>
-        <p:spPr>
-          <a:xfrm>
-            <a:off x="914400" y="4050792"/>
-            <a:ext cx="2651760" cy="365760"/>
+            <a:endParaRPr lang="en-US" sz="1300" dirty="0"/>
+          </a:p>
+        </p:txBody>
+      </p:sp>
+      <p:sp>
+        <p:nvSpPr>
+          <p:cNvPr id="21" name="Text 19"/>
+          <p:cNvSpPr/>
+          <p:nvPr/>
+        </p:nvSpPr>
+        <p:spPr>
+          <a:xfrm>
+            <a:off x="2864053" y="4544568"/>
+            <a:ext cx="1053541" cy="365760"/>
           </a:xfrm>
           <a:prstGeom prst="rect">
             <a:avLst/>
@@ -1820,13 +2074,13 @@
           <a:bodyPr wrap="square" lIns="0" tIns="0" rIns="0" bIns="0" rtlCol="0" anchor="ctr"/>
           <a:lstStyle/>
           <a:p>
-            <a:pPr algn="ctr" indent="0" marL="0">
+            <a:pPr indent="0" marL="0">
               <a:buNone/>
             </a:pPr>
             <a:r>
-              <a:rPr lang="en-US" sz="1000" dirty="0">
+              <a:rPr lang="en-US" sz="900" dirty="0">
                 <a:solidFill>
-                  <a:srgbClr val="557280"/>
+                  <a:srgbClr val="FFFFFF"/>
                 </a:solidFill>
                 <a:latin typeface="Calibri" pitchFamily="34" charset="0"/>
                 <a:ea typeface="Calibri" pitchFamily="34" charset="-122"/>
@@ -1834,122 +2088,50 @@
               </a:rPr>
               <a:t>window · aggregate · alert</a:t>
             </a:r>
-            <a:endParaRPr lang="en-US" sz="1000" dirty="0"/>
-          </a:p>
-        </p:txBody>
-      </p:sp>
-      <p:sp>
-        <p:nvSpPr>
-          <p:cNvPr id="11" name="Shape 9"/>
-          <p:cNvSpPr/>
-          <p:nvPr/>
-        </p:nvSpPr>
-        <p:spPr>
-          <a:xfrm>
-            <a:off x="3886200" y="3246120"/>
-            <a:ext cx="502920" cy="0"/>
-          </a:xfrm>
-          <a:prstGeom prst="line">
-            <a:avLst/>
-          </a:prstGeom>
-          <a:noFill/>
-          <a:ln w="31750">
-            <a:solidFill>
-              <a:srgbClr val="0F4E7E"/>
-            </a:solidFill>
-            <a:prstDash val="solid"/>
-            <a:tailEnd type="triangle"/>
-          </a:ln>
-        </p:spPr>
-      </p:sp>
-      <p:sp>
-        <p:nvSpPr>
-          <p:cNvPr id="12" name="Shape 10"/>
-          <p:cNvSpPr/>
-          <p:nvPr/>
-        </p:nvSpPr>
-        <p:spPr>
-          <a:xfrm>
-            <a:off x="4572000" y="1554480"/>
-            <a:ext cx="6949440" cy="3383280"/>
+            <a:endParaRPr lang="en-US" sz="900" dirty="0"/>
+          </a:p>
+        </p:txBody>
+      </p:sp>
+      <p:sp>
+        <p:nvSpPr>
+          <p:cNvPr id="22" name="Shape 20"/>
+          <p:cNvSpPr/>
+          <p:nvPr/>
+        </p:nvSpPr>
+        <p:spPr>
+          <a:xfrm>
+            <a:off x="4137050" y="3936492"/>
+            <a:ext cx="310896" cy="219456"/>
+          </a:xfrm>
+          <a:prstGeom prst="rightArrow">
+            <a:avLst/>
+          </a:prstGeom>
+          <a:solidFill>
+            <a:srgbClr val="5F6B74"/>
+          </a:solidFill>
+          <a:ln/>
+        </p:spPr>
+      </p:sp>
+      <p:sp>
+        <p:nvSpPr>
+          <p:cNvPr id="23" name="Shape 21"/>
+          <p:cNvSpPr/>
+          <p:nvPr/>
+        </p:nvSpPr>
+        <p:spPr>
+          <a:xfrm>
+            <a:off x="4521098" y="3063240"/>
+            <a:ext cx="1346149" cy="1965960"/>
           </a:xfrm>
           <a:prstGeom prst="roundRect">
-            <a:avLst>
-              <a:gd name="adj" fmla="val 2703"/>
-            </a:avLst>
-          </a:prstGeom>
-          <a:solidFill>
-            <a:srgbClr val="EDF4F9"/>
-          </a:solidFill>
-          <a:ln w="19050">
-            <a:solidFill>
-              <a:srgbClr val="0F4E7E"/>
-            </a:solidFill>
-            <a:prstDash val="solid"/>
-          </a:ln>
-        </p:spPr>
-      </p:sp>
-      <p:sp>
-        <p:nvSpPr>
-          <p:cNvPr id="13" name="Text 11"/>
-          <p:cNvSpPr/>
-          <p:nvPr/>
-        </p:nvSpPr>
-        <p:spPr>
-          <a:xfrm>
-            <a:off x="4572000" y="1691640"/>
-            <a:ext cx="6949440" cy="365760"/>
-          </a:xfrm>
-          <a:prstGeom prst="rect">
-            <a:avLst/>
-          </a:prstGeom>
-          <a:noFill/>
-          <a:ln/>
-        </p:spPr>
-        <p:txBody>
-          <a:bodyPr wrap="square" rtlCol="0" anchor="ctr"/>
-          <a:lstStyle/>
-          <a:p>
-            <a:pPr algn="ctr" indent="0" marL="0">
-              <a:buNone/>
-            </a:pPr>
-            <a:r>
-              <a:rPr lang="en-US" sz="1200" b="1" spc="200" kern="0" dirty="0">
-                <a:solidFill>
-                  <a:srgbClr val="0F4E7E"/>
-                </a:solidFill>
-                <a:latin typeface="Calibri" pitchFamily="34" charset="0"/>
-                <a:ea typeface="Calibri" pitchFamily="34" charset="-122"/>
-                <a:cs typeface="Calibri" pitchFamily="34" charset="-120"/>
-              </a:rPr>
-              <a:t>CLOUD (serverless)</a:t>
-            </a:r>
-            <a:endParaRPr lang="en-US" sz="1200" dirty="0"/>
-          </a:p>
-        </p:txBody>
-      </p:sp>
-      <p:sp>
-        <p:nvSpPr>
-          <p:cNvPr id="14" name="Shape 12"/>
-          <p:cNvSpPr/>
-          <p:nvPr/>
-        </p:nvSpPr>
-        <p:spPr>
-          <a:xfrm>
-            <a:off x="4846320" y="2651760"/>
-            <a:ext cx="1463040" cy="1371600"/>
-          </a:xfrm>
-          <a:prstGeom prst="roundRect">
-            <a:avLst>
-              <a:gd name="adj" fmla="val 5333"/>
-            </a:avLst>
+            <a:avLst/>
           </a:prstGeom>
           <a:solidFill>
             <a:srgbClr val="FFFFFF"/>
           </a:solidFill>
-          <a:ln w="15240">
-            <a:solidFill>
-              <a:srgbClr val="0F4E7E"/>
+          <a:ln w="12700">
+            <a:solidFill>
+              <a:srgbClr val="E4E6E9"/>
             </a:solidFill>
             <a:prstDash val="solid"/>
           </a:ln>
@@ -1957,14 +2139,14 @@
       </p:sp>
       <p:sp>
         <p:nvSpPr>
-          <p:cNvPr id="15" name="Text 13"/>
-          <p:cNvSpPr/>
-          <p:nvPr/>
-        </p:nvSpPr>
-        <p:spPr>
-          <a:xfrm>
-            <a:off x="4800600" y="2907792"/>
-            <a:ext cx="1554480" cy="457200"/>
+          <p:cNvPr id="24" name="Text 22"/>
+          <p:cNvSpPr/>
+          <p:nvPr/>
+        </p:nvSpPr>
+        <p:spPr>
+          <a:xfrm>
+            <a:off x="4667402" y="3246120"/>
+            <a:ext cx="1053541" cy="320040"/>
           </a:xfrm>
           <a:prstGeom prst="rect">
             <a:avLst/>
@@ -1976,34 +2158,76 @@
           <a:bodyPr wrap="square" lIns="0" tIns="0" rIns="0" bIns="0" rtlCol="0" anchor="ctr"/>
           <a:lstStyle/>
           <a:p>
-            <a:pPr algn="ctr" indent="0" marL="0">
+            <a:pPr indent="0" marL="0">
               <a:buNone/>
             </a:pPr>
             <a:r>
-              <a:rPr lang="en-US" sz="1250" b="1" dirty="0">
+              <a:rPr lang="en-US" sz="1100" dirty="0">
                 <a:solidFill>
-                  <a:srgbClr val="102636"/>
+                  <a:srgbClr val="0A4F4C"/>
                 </a:solidFill>
-                <a:latin typeface="Calibri" pitchFamily="34" charset="0"/>
-                <a:ea typeface="Calibri" pitchFamily="34" charset="-122"/>
-                <a:cs typeface="Calibri" pitchFamily="34" charset="-120"/>
+                <a:latin typeface="Consolas" pitchFamily="34" charset="0"/>
+                <a:ea typeface="Consolas" pitchFamily="34" charset="-122"/>
+                <a:cs typeface="Consolas" pitchFamily="34" charset="-120"/>
+              </a:rPr>
+              <a:t>03</a:t>
+            </a:r>
+            <a:endParaRPr lang="en-US" sz="1100" dirty="0"/>
+          </a:p>
+        </p:txBody>
+      </p:sp>
+      <p:sp>
+        <p:nvSpPr>
+          <p:cNvPr id="25" name="Text 23"/>
+          <p:cNvSpPr/>
+          <p:nvPr/>
+        </p:nvSpPr>
+        <p:spPr>
+          <a:xfrm>
+            <a:off x="4667402" y="3685032"/>
+            <a:ext cx="1053541" cy="868680"/>
+          </a:xfrm>
+          <a:prstGeom prst="rect">
+            <a:avLst/>
+          </a:prstGeom>
+          <a:noFill/>
+          <a:ln/>
+        </p:spPr>
+        <p:txBody>
+          <a:bodyPr wrap="square" lIns="0" tIns="0" rIns="0" bIns="0" rtlCol="0" anchor="t"/>
+          <a:lstStyle/>
+          <a:p>
+            <a:pPr indent="0" marL="0">
+              <a:lnSpc>
+                <a:spcPct val="96000"/>
+              </a:lnSpc>
+              <a:buNone/>
+            </a:pPr>
+            <a:r>
+              <a:rPr lang="en-US" sz="1300" b="1" dirty="0">
+                <a:solidFill>
+                  <a:srgbClr val="17302C"/>
+                </a:solidFill>
+                <a:latin typeface="Century Gothic" pitchFamily="34" charset="0"/>
+                <a:ea typeface="Century Gothic" pitchFamily="34" charset="-122"/>
+                <a:cs typeface="Century Gothic" pitchFamily="34" charset="-120"/>
               </a:rPr>
               <a:t>Amazon SQS</a:t>
             </a:r>
-            <a:endParaRPr lang="en-US" sz="1250" dirty="0"/>
-          </a:p>
-        </p:txBody>
-      </p:sp>
-      <p:sp>
-        <p:nvSpPr>
-          <p:cNvPr id="16" name="Text 14"/>
-          <p:cNvSpPr/>
-          <p:nvPr/>
-        </p:nvSpPr>
-        <p:spPr>
-          <a:xfrm>
-            <a:off x="4828032" y="3401568"/>
-            <a:ext cx="1499616" cy="457200"/>
+            <a:endParaRPr lang="en-US" sz="1300" dirty="0"/>
+          </a:p>
+        </p:txBody>
+      </p:sp>
+      <p:sp>
+        <p:nvSpPr>
+          <p:cNvPr id="26" name="Text 24"/>
+          <p:cNvSpPr/>
+          <p:nvPr/>
+        </p:nvSpPr>
+        <p:spPr>
+          <a:xfrm>
+            <a:off x="4667402" y="4544568"/>
+            <a:ext cx="1053541" cy="365760"/>
           </a:xfrm>
           <a:prstGeom prst="rect">
             <a:avLst/>
@@ -2015,13 +2239,13 @@
           <a:bodyPr wrap="square" lIns="0" tIns="0" rIns="0" bIns="0" rtlCol="0" anchor="ctr"/>
           <a:lstStyle/>
           <a:p>
-            <a:pPr algn="ctr" indent="0" marL="0">
+            <a:pPr indent="0" marL="0">
               <a:buNone/>
             </a:pPr>
             <a:r>
               <a:rPr lang="en-US" sz="900" dirty="0">
                 <a:solidFill>
-                  <a:srgbClr val="557280"/>
+                  <a:srgbClr val="5F6B74"/>
                 </a:solidFill>
                 <a:latin typeface="Calibri" pitchFamily="34" charset="0"/>
                 <a:ea typeface="Calibri" pitchFamily="34" charset="-122"/>
@@ -2035,50 +2259,44 @@
       </p:sp>
       <p:sp>
         <p:nvSpPr>
-          <p:cNvPr id="17" name="Shape 15"/>
-          <p:cNvSpPr/>
-          <p:nvPr/>
-        </p:nvSpPr>
-        <p:spPr>
-          <a:xfrm>
-            <a:off x="6318504" y="3337560"/>
-            <a:ext cx="164592" cy="0"/>
-          </a:xfrm>
-          <a:prstGeom prst="line">
-            <a:avLst/>
-          </a:prstGeom>
-          <a:noFill/>
-          <a:ln w="20320">
-            <a:solidFill>
-              <a:srgbClr val="4F98C0"/>
-            </a:solidFill>
-            <a:prstDash val="solid"/>
-            <a:tailEnd type="triangle"/>
-          </a:ln>
-        </p:spPr>
-      </p:sp>
-      <p:sp>
-        <p:nvSpPr>
-          <p:cNvPr id="18" name="Shape 16"/>
-          <p:cNvSpPr/>
-          <p:nvPr/>
-        </p:nvSpPr>
-        <p:spPr>
-          <a:xfrm>
-            <a:off x="6492240" y="2651760"/>
-            <a:ext cx="1463040" cy="1371600"/>
+          <p:cNvPr id="27" name="Shape 25"/>
+          <p:cNvSpPr/>
+          <p:nvPr/>
+        </p:nvSpPr>
+        <p:spPr>
+          <a:xfrm>
+            <a:off x="5940400" y="3936492"/>
+            <a:ext cx="310896" cy="219456"/>
+          </a:xfrm>
+          <a:prstGeom prst="rightArrow">
+            <a:avLst/>
+          </a:prstGeom>
+          <a:solidFill>
+            <a:srgbClr val="5F6B74"/>
+          </a:solidFill>
+          <a:ln/>
+        </p:spPr>
+      </p:sp>
+      <p:sp>
+        <p:nvSpPr>
+          <p:cNvPr id="28" name="Shape 26"/>
+          <p:cNvSpPr/>
+          <p:nvPr/>
+        </p:nvSpPr>
+        <p:spPr>
+          <a:xfrm>
+            <a:off x="6324448" y="3063240"/>
+            <a:ext cx="1346149" cy="1965960"/>
           </a:xfrm>
           <a:prstGeom prst="roundRect">
-            <a:avLst>
-              <a:gd name="adj" fmla="val 5333"/>
-            </a:avLst>
+            <a:avLst/>
           </a:prstGeom>
           <a:solidFill>
             <a:srgbClr val="FFFFFF"/>
           </a:solidFill>
-          <a:ln w="15240">
-            <a:solidFill>
-              <a:srgbClr val="0F4E7E"/>
+          <a:ln w="12700">
+            <a:solidFill>
+              <a:srgbClr val="E4E6E9"/>
             </a:solidFill>
             <a:prstDash val="solid"/>
           </a:ln>
@@ -2086,14 +2304,14 @@
       </p:sp>
       <p:sp>
         <p:nvSpPr>
-          <p:cNvPr id="19" name="Text 17"/>
-          <p:cNvSpPr/>
-          <p:nvPr/>
-        </p:nvSpPr>
-        <p:spPr>
-          <a:xfrm>
-            <a:off x="6446520" y="2907792"/>
-            <a:ext cx="1554480" cy="457200"/>
+          <p:cNvPr id="29" name="Text 27"/>
+          <p:cNvSpPr/>
+          <p:nvPr/>
+        </p:nvSpPr>
+        <p:spPr>
+          <a:xfrm>
+            <a:off x="6470752" y="3246120"/>
+            <a:ext cx="1053541" cy="320040"/>
           </a:xfrm>
           <a:prstGeom prst="rect">
             <a:avLst/>
@@ -2105,34 +2323,76 @@
           <a:bodyPr wrap="square" lIns="0" tIns="0" rIns="0" bIns="0" rtlCol="0" anchor="ctr"/>
           <a:lstStyle/>
           <a:p>
-            <a:pPr algn="ctr" indent="0" marL="0">
+            <a:pPr indent="0" marL="0">
               <a:buNone/>
             </a:pPr>
             <a:r>
-              <a:rPr lang="en-US" sz="1250" b="1" dirty="0">
+              <a:rPr lang="en-US" sz="1100" dirty="0">
                 <a:solidFill>
-                  <a:srgbClr val="102636"/>
+                  <a:srgbClr val="0A4F4C"/>
                 </a:solidFill>
-                <a:latin typeface="Calibri" pitchFamily="34" charset="0"/>
-                <a:ea typeface="Calibri" pitchFamily="34" charset="-122"/>
-                <a:cs typeface="Calibri" pitchFamily="34" charset="-120"/>
+                <a:latin typeface="Consolas" pitchFamily="34" charset="0"/>
+                <a:ea typeface="Consolas" pitchFamily="34" charset="-122"/>
+                <a:cs typeface="Consolas" pitchFamily="34" charset="-120"/>
+              </a:rPr>
+              <a:t>04</a:t>
+            </a:r>
+            <a:endParaRPr lang="en-US" sz="1100" dirty="0"/>
+          </a:p>
+        </p:txBody>
+      </p:sp>
+      <p:sp>
+        <p:nvSpPr>
+          <p:cNvPr id="30" name="Text 28"/>
+          <p:cNvSpPr/>
+          <p:nvPr/>
+        </p:nvSpPr>
+        <p:spPr>
+          <a:xfrm>
+            <a:off x="6470752" y="3685032"/>
+            <a:ext cx="1053541" cy="868680"/>
+          </a:xfrm>
+          <a:prstGeom prst="rect">
+            <a:avLst/>
+          </a:prstGeom>
+          <a:noFill/>
+          <a:ln/>
+        </p:spPr>
+        <p:txBody>
+          <a:bodyPr wrap="square" lIns="0" tIns="0" rIns="0" bIns="0" rtlCol="0" anchor="t"/>
+          <a:lstStyle/>
+          <a:p>
+            <a:pPr indent="0" marL="0">
+              <a:lnSpc>
+                <a:spcPct val="96000"/>
+              </a:lnSpc>
+              <a:buNone/>
+            </a:pPr>
+            <a:r>
+              <a:rPr lang="en-US" sz="1300" b="1" dirty="0">
+                <a:solidFill>
+                  <a:srgbClr val="17302C"/>
+                </a:solidFill>
+                <a:latin typeface="Century Gothic" pitchFamily="34" charset="0"/>
+                <a:ea typeface="Century Gothic" pitchFamily="34" charset="-122"/>
+                <a:cs typeface="Century Gothic" pitchFamily="34" charset="-120"/>
               </a:rPr>
               <a:t>AWS Lambda</a:t>
             </a:r>
-            <a:endParaRPr lang="en-US" sz="1250" dirty="0"/>
-          </a:p>
-        </p:txBody>
-      </p:sp>
-      <p:sp>
-        <p:nvSpPr>
-          <p:cNvPr id="20" name="Text 18"/>
-          <p:cNvSpPr/>
-          <p:nvPr/>
-        </p:nvSpPr>
-        <p:spPr>
-          <a:xfrm>
-            <a:off x="6473952" y="3401568"/>
-            <a:ext cx="1499616" cy="457200"/>
+            <a:endParaRPr lang="en-US" sz="1300" dirty="0"/>
+          </a:p>
+        </p:txBody>
+      </p:sp>
+      <p:sp>
+        <p:nvSpPr>
+          <p:cNvPr id="31" name="Text 29"/>
+          <p:cNvSpPr/>
+          <p:nvPr/>
+        </p:nvSpPr>
+        <p:spPr>
+          <a:xfrm>
+            <a:off x="6470752" y="4544568"/>
+            <a:ext cx="1053541" cy="365760"/>
           </a:xfrm>
           <a:prstGeom prst="rect">
             <a:avLst/>
@@ -2144,13 +2404,13 @@
           <a:bodyPr wrap="square" lIns="0" tIns="0" rIns="0" bIns="0" rtlCol="0" anchor="ctr"/>
           <a:lstStyle/>
           <a:p>
-            <a:pPr algn="ctr" indent="0" marL="0">
+            <a:pPr indent="0" marL="0">
               <a:buNone/>
             </a:pPr>
             <a:r>
               <a:rPr lang="en-US" sz="900" dirty="0">
                 <a:solidFill>
-                  <a:srgbClr val="557280"/>
+                  <a:srgbClr val="5F6B74"/>
                 </a:solidFill>
                 <a:latin typeface="Calibri" pitchFamily="34" charset="0"/>
                 <a:ea typeface="Calibri" pitchFamily="34" charset="-122"/>
@@ -2164,50 +2424,44 @@
       </p:sp>
       <p:sp>
         <p:nvSpPr>
-          <p:cNvPr id="21" name="Shape 19"/>
-          <p:cNvSpPr/>
-          <p:nvPr/>
-        </p:nvSpPr>
-        <p:spPr>
-          <a:xfrm>
-            <a:off x="7964424" y="3337560"/>
-            <a:ext cx="164592" cy="0"/>
-          </a:xfrm>
-          <a:prstGeom prst="line">
-            <a:avLst/>
-          </a:prstGeom>
-          <a:noFill/>
-          <a:ln w="20320">
-            <a:solidFill>
-              <a:srgbClr val="4F98C0"/>
-            </a:solidFill>
-            <a:prstDash val="solid"/>
-            <a:tailEnd type="triangle"/>
-          </a:ln>
-        </p:spPr>
-      </p:sp>
-      <p:sp>
-        <p:nvSpPr>
-          <p:cNvPr id="22" name="Shape 20"/>
-          <p:cNvSpPr/>
-          <p:nvPr/>
-        </p:nvSpPr>
-        <p:spPr>
-          <a:xfrm>
-            <a:off x="8138160" y="2651760"/>
-            <a:ext cx="1463040" cy="1371600"/>
+          <p:cNvPr id="32" name="Shape 30"/>
+          <p:cNvSpPr/>
+          <p:nvPr/>
+        </p:nvSpPr>
+        <p:spPr>
+          <a:xfrm>
+            <a:off x="7743749" y="3936492"/>
+            <a:ext cx="310896" cy="219456"/>
+          </a:xfrm>
+          <a:prstGeom prst="rightArrow">
+            <a:avLst/>
+          </a:prstGeom>
+          <a:solidFill>
+            <a:srgbClr val="5F6B74"/>
+          </a:solidFill>
+          <a:ln/>
+        </p:spPr>
+      </p:sp>
+      <p:sp>
+        <p:nvSpPr>
+          <p:cNvPr id="33" name="Shape 31"/>
+          <p:cNvSpPr/>
+          <p:nvPr/>
+        </p:nvSpPr>
+        <p:spPr>
+          <a:xfrm>
+            <a:off x="8127797" y="3063240"/>
+            <a:ext cx="1346149" cy="1965960"/>
           </a:xfrm>
           <a:prstGeom prst="roundRect">
-            <a:avLst>
-              <a:gd name="adj" fmla="val 5333"/>
-            </a:avLst>
+            <a:avLst/>
           </a:prstGeom>
           <a:solidFill>
             <a:srgbClr val="FFFFFF"/>
           </a:solidFill>
-          <a:ln w="15240">
-            <a:solidFill>
-              <a:srgbClr val="0F4E7E"/>
+          <a:ln w="12700">
+            <a:solidFill>
+              <a:srgbClr val="E4E6E9"/>
             </a:solidFill>
             <a:prstDash val="solid"/>
           </a:ln>
@@ -2215,14 +2469,14 @@
       </p:sp>
       <p:sp>
         <p:nvSpPr>
-          <p:cNvPr id="23" name="Text 21"/>
-          <p:cNvSpPr/>
-          <p:nvPr/>
-        </p:nvSpPr>
-        <p:spPr>
-          <a:xfrm>
-            <a:off x="8092440" y="2907792"/>
-            <a:ext cx="1554480" cy="457200"/>
+          <p:cNvPr id="34" name="Text 32"/>
+          <p:cNvSpPr/>
+          <p:nvPr/>
+        </p:nvSpPr>
+        <p:spPr>
+          <a:xfrm>
+            <a:off x="8274101" y="3246120"/>
+            <a:ext cx="1053541" cy="320040"/>
           </a:xfrm>
           <a:prstGeom prst="rect">
             <a:avLst/>
@@ -2234,34 +2488,76 @@
           <a:bodyPr wrap="square" lIns="0" tIns="0" rIns="0" bIns="0" rtlCol="0" anchor="ctr"/>
           <a:lstStyle/>
           <a:p>
-            <a:pPr algn="ctr" indent="0" marL="0">
+            <a:pPr indent="0" marL="0">
               <a:buNone/>
             </a:pPr>
             <a:r>
-              <a:rPr lang="en-US" sz="1250" b="1" dirty="0">
+              <a:rPr lang="en-US" sz="1100" dirty="0">
                 <a:solidFill>
-                  <a:srgbClr val="102636"/>
+                  <a:srgbClr val="0A4F4C"/>
                 </a:solidFill>
-                <a:latin typeface="Calibri" pitchFamily="34" charset="0"/>
-                <a:ea typeface="Calibri" pitchFamily="34" charset="-122"/>
-                <a:cs typeface="Calibri" pitchFamily="34" charset="-120"/>
+                <a:latin typeface="Consolas" pitchFamily="34" charset="0"/>
+                <a:ea typeface="Consolas" pitchFamily="34" charset="-122"/>
+                <a:cs typeface="Consolas" pitchFamily="34" charset="-120"/>
+              </a:rPr>
+              <a:t>05</a:t>
+            </a:r>
+            <a:endParaRPr lang="en-US" sz="1100" dirty="0"/>
+          </a:p>
+        </p:txBody>
+      </p:sp>
+      <p:sp>
+        <p:nvSpPr>
+          <p:cNvPr id="35" name="Text 33"/>
+          <p:cNvSpPr/>
+          <p:nvPr/>
+        </p:nvSpPr>
+        <p:spPr>
+          <a:xfrm>
+            <a:off x="8274101" y="3685032"/>
+            <a:ext cx="1053541" cy="868680"/>
+          </a:xfrm>
+          <a:prstGeom prst="rect">
+            <a:avLst/>
+          </a:prstGeom>
+          <a:noFill/>
+          <a:ln/>
+        </p:spPr>
+        <p:txBody>
+          <a:bodyPr wrap="square" lIns="0" tIns="0" rIns="0" bIns="0" rtlCol="0" anchor="t"/>
+          <a:lstStyle/>
+          <a:p>
+            <a:pPr indent="0" marL="0">
+              <a:lnSpc>
+                <a:spcPct val="96000"/>
+              </a:lnSpc>
+              <a:buNone/>
+            </a:pPr>
+            <a:r>
+              <a:rPr lang="en-US" sz="1300" b="1" dirty="0">
+                <a:solidFill>
+                  <a:srgbClr val="17302C"/>
+                </a:solidFill>
+                <a:latin typeface="Century Gothic" pitchFamily="34" charset="0"/>
+                <a:ea typeface="Century Gothic" pitchFamily="34" charset="-122"/>
+                <a:cs typeface="Century Gothic" pitchFamily="34" charset="-120"/>
               </a:rPr>
               <a:t>DynamoDB</a:t>
             </a:r>
-            <a:endParaRPr lang="en-US" sz="1250" dirty="0"/>
-          </a:p>
-        </p:txBody>
-      </p:sp>
-      <p:sp>
-        <p:nvSpPr>
-          <p:cNvPr id="24" name="Text 22"/>
-          <p:cNvSpPr/>
-          <p:nvPr/>
-        </p:nvSpPr>
-        <p:spPr>
-          <a:xfrm>
-            <a:off x="8119872" y="3401568"/>
-            <a:ext cx="1499616" cy="457200"/>
+            <a:endParaRPr lang="en-US" sz="1300" dirty="0"/>
+          </a:p>
+        </p:txBody>
+      </p:sp>
+      <p:sp>
+        <p:nvSpPr>
+          <p:cNvPr id="36" name="Text 34"/>
+          <p:cNvSpPr/>
+          <p:nvPr/>
+        </p:nvSpPr>
+        <p:spPr>
+          <a:xfrm>
+            <a:off x="8274101" y="4544568"/>
+            <a:ext cx="1053541" cy="365760"/>
           </a:xfrm>
           <a:prstGeom prst="rect">
             <a:avLst/>
@@ -2273,13 +2569,13 @@
           <a:bodyPr wrap="square" lIns="0" tIns="0" rIns="0" bIns="0" rtlCol="0" anchor="ctr"/>
           <a:lstStyle/>
           <a:p>
-            <a:pPr algn="ctr" indent="0" marL="0">
+            <a:pPr indent="0" marL="0">
               <a:buNone/>
             </a:pPr>
             <a:r>
               <a:rPr lang="en-US" sz="900" dirty="0">
                 <a:solidFill>
-                  <a:srgbClr val="557280"/>
+                  <a:srgbClr val="5F6B74"/>
                 </a:solidFill>
                 <a:latin typeface="Calibri" pitchFamily="34" charset="0"/>
                 <a:ea typeface="Calibri" pitchFamily="34" charset="-122"/>
@@ -2293,50 +2589,44 @@
       </p:sp>
       <p:sp>
         <p:nvSpPr>
-          <p:cNvPr id="25" name="Shape 23"/>
-          <p:cNvSpPr/>
-          <p:nvPr/>
-        </p:nvSpPr>
-        <p:spPr>
-          <a:xfrm>
-            <a:off x="9610344" y="3337560"/>
-            <a:ext cx="164592" cy="0"/>
-          </a:xfrm>
-          <a:prstGeom prst="line">
-            <a:avLst/>
-          </a:prstGeom>
-          <a:noFill/>
-          <a:ln w="20320">
-            <a:solidFill>
-              <a:srgbClr val="4F98C0"/>
-            </a:solidFill>
-            <a:prstDash val="solid"/>
-            <a:tailEnd type="triangle"/>
-          </a:ln>
-        </p:spPr>
-      </p:sp>
-      <p:sp>
-        <p:nvSpPr>
-          <p:cNvPr id="26" name="Shape 24"/>
-          <p:cNvSpPr/>
-          <p:nvPr/>
-        </p:nvSpPr>
-        <p:spPr>
-          <a:xfrm>
-            <a:off x="9784080" y="2651760"/>
-            <a:ext cx="1463040" cy="1371600"/>
+          <p:cNvPr id="37" name="Shape 35"/>
+          <p:cNvSpPr/>
+          <p:nvPr/>
+        </p:nvSpPr>
+        <p:spPr>
+          <a:xfrm>
+            <a:off x="9547098" y="3936492"/>
+            <a:ext cx="310896" cy="219456"/>
+          </a:xfrm>
+          <a:prstGeom prst="rightArrow">
+            <a:avLst/>
+          </a:prstGeom>
+          <a:solidFill>
+            <a:srgbClr val="5F6B74"/>
+          </a:solidFill>
+          <a:ln/>
+        </p:spPr>
+      </p:sp>
+      <p:sp>
+        <p:nvSpPr>
+          <p:cNvPr id="38" name="Shape 36"/>
+          <p:cNvSpPr/>
+          <p:nvPr/>
+        </p:nvSpPr>
+        <p:spPr>
+          <a:xfrm>
+            <a:off x="9931146" y="3063240"/>
+            <a:ext cx="1346149" cy="1965960"/>
           </a:xfrm>
           <a:prstGeom prst="roundRect">
-            <a:avLst>
-              <a:gd name="adj" fmla="val 5333"/>
-            </a:avLst>
+            <a:avLst/>
           </a:prstGeom>
           <a:solidFill>
             <a:srgbClr val="FFFFFF"/>
           </a:solidFill>
-          <a:ln w="15240">
-            <a:solidFill>
-              <a:srgbClr val="1E76A6"/>
+          <a:ln w="12700">
+            <a:solidFill>
+              <a:srgbClr val="E4E6E9"/>
             </a:solidFill>
             <a:prstDash val="solid"/>
           </a:ln>
@@ -2344,14 +2634,14 @@
       </p:sp>
       <p:sp>
         <p:nvSpPr>
-          <p:cNvPr id="27" name="Text 25"/>
-          <p:cNvSpPr/>
-          <p:nvPr/>
-        </p:nvSpPr>
-        <p:spPr>
-          <a:xfrm>
-            <a:off x="9738360" y="2907792"/>
-            <a:ext cx="1554480" cy="457200"/>
+          <p:cNvPr id="39" name="Text 37"/>
+          <p:cNvSpPr/>
+          <p:nvPr/>
+        </p:nvSpPr>
+        <p:spPr>
+          <a:xfrm>
+            <a:off x="10077450" y="3246120"/>
+            <a:ext cx="1053541" cy="320040"/>
           </a:xfrm>
           <a:prstGeom prst="rect">
             <a:avLst/>
@@ -2363,34 +2653,76 @@
           <a:bodyPr wrap="square" lIns="0" tIns="0" rIns="0" bIns="0" rtlCol="0" anchor="ctr"/>
           <a:lstStyle/>
           <a:p>
-            <a:pPr algn="ctr" indent="0" marL="0">
+            <a:pPr indent="0" marL="0">
               <a:buNone/>
             </a:pPr>
             <a:r>
-              <a:rPr lang="en-US" sz="1250" b="1" dirty="0">
+              <a:rPr lang="en-US" sz="1100" dirty="0">
                 <a:solidFill>
-                  <a:srgbClr val="102636"/>
+                  <a:srgbClr val="0A4F4C"/>
                 </a:solidFill>
-                <a:latin typeface="Calibri" pitchFamily="34" charset="0"/>
-                <a:ea typeface="Calibri" pitchFamily="34" charset="-122"/>
-                <a:cs typeface="Calibri" pitchFamily="34" charset="-120"/>
+                <a:latin typeface="Consolas" pitchFamily="34" charset="0"/>
+                <a:ea typeface="Consolas" pitchFamily="34" charset="-122"/>
+                <a:cs typeface="Consolas" pitchFamily="34" charset="-120"/>
+              </a:rPr>
+              <a:t>06</a:t>
+            </a:r>
+            <a:endParaRPr lang="en-US" sz="1100" dirty="0"/>
+          </a:p>
+        </p:txBody>
+      </p:sp>
+      <p:sp>
+        <p:nvSpPr>
+          <p:cNvPr id="40" name="Text 38"/>
+          <p:cNvSpPr/>
+          <p:nvPr/>
+        </p:nvSpPr>
+        <p:spPr>
+          <a:xfrm>
+            <a:off x="10077450" y="3685032"/>
+            <a:ext cx="1053541" cy="868680"/>
+          </a:xfrm>
+          <a:prstGeom prst="rect">
+            <a:avLst/>
+          </a:prstGeom>
+          <a:noFill/>
+          <a:ln/>
+        </p:spPr>
+        <p:txBody>
+          <a:bodyPr wrap="square" lIns="0" tIns="0" rIns="0" bIns="0" rtlCol="0" anchor="t"/>
+          <a:lstStyle/>
+          <a:p>
+            <a:pPr indent="0" marL="0">
+              <a:lnSpc>
+                <a:spcPct val="96000"/>
+              </a:lnSpc>
+              <a:buNone/>
+            </a:pPr>
+            <a:r>
+              <a:rPr lang="en-US" sz="1300" b="1" dirty="0">
+                <a:solidFill>
+                  <a:srgbClr val="17302C"/>
+                </a:solidFill>
+                <a:latin typeface="Century Gothic" pitchFamily="34" charset="0"/>
+                <a:ea typeface="Century Gothic" pitchFamily="34" charset="-122"/>
+                <a:cs typeface="Century Gothic" pitchFamily="34" charset="-120"/>
               </a:rPr>
               <a:t>API GW + S3</a:t>
             </a:r>
-            <a:endParaRPr lang="en-US" sz="1250" dirty="0"/>
-          </a:p>
-        </p:txBody>
-      </p:sp>
-      <p:sp>
-        <p:nvSpPr>
-          <p:cNvPr id="28" name="Text 26"/>
-          <p:cNvSpPr/>
-          <p:nvPr/>
-        </p:nvSpPr>
-        <p:spPr>
-          <a:xfrm>
-            <a:off x="9765792" y="3401568"/>
-            <a:ext cx="1499616" cy="457200"/>
+            <a:endParaRPr lang="en-US" sz="1300" dirty="0"/>
+          </a:p>
+        </p:txBody>
+      </p:sp>
+      <p:sp>
+        <p:nvSpPr>
+          <p:cNvPr id="41" name="Text 39"/>
+          <p:cNvSpPr/>
+          <p:nvPr/>
+        </p:nvSpPr>
+        <p:spPr>
+          <a:xfrm>
+            <a:off x="10077450" y="4544568"/>
+            <a:ext cx="1053541" cy="365760"/>
           </a:xfrm>
           <a:prstGeom prst="rect">
             <a:avLst/>
@@ -2402,13 +2734,13 @@
           <a:bodyPr wrap="square" lIns="0" tIns="0" rIns="0" bIns="0" rtlCol="0" anchor="ctr"/>
           <a:lstStyle/>
           <a:p>
-            <a:pPr algn="ctr" indent="0" marL="0">
+            <a:pPr indent="0" marL="0">
               <a:buNone/>
             </a:pPr>
             <a:r>
               <a:rPr lang="en-US" sz="900" dirty="0">
                 <a:solidFill>
-                  <a:srgbClr val="557280"/>
+                  <a:srgbClr val="5F6B74"/>
                 </a:solidFill>
                 <a:latin typeface="Calibri" pitchFamily="34" charset="0"/>
                 <a:ea typeface="Calibri" pitchFamily="34" charset="-122"/>
@@ -2417,45 +2749,6 @@
               <a:t>bridge console</a:t>
             </a:r>
             <a:endParaRPr lang="en-US" sz="900" dirty="0"/>
-          </a:p>
-        </p:txBody>
-      </p:sp>
-      <p:sp>
-        <p:nvSpPr>
-          <p:cNvPr id="29" name="Text 27"/>
-          <p:cNvSpPr/>
-          <p:nvPr/>
-        </p:nvSpPr>
-        <p:spPr>
-          <a:xfrm>
-            <a:off x="640080" y="5257800"/>
-            <a:ext cx="10972800" cy="731520"/>
-          </a:xfrm>
-          <a:prstGeom prst="rect">
-            <a:avLst/>
-          </a:prstGeom>
-          <a:noFill/>
-          <a:ln/>
-        </p:spPr>
-        <p:txBody>
-          <a:bodyPr wrap="square" rtlCol="0" anchor="ctr"/>
-          <a:lstStyle/>
-          <a:p>
-            <a:pPr algn="ctr" indent="0" marL="0">
-              <a:buNone/>
-            </a:pPr>
-            <a:r>
-              <a:rPr lang="en-US" sz="1500" i="1" dirty="0">
-                <a:solidFill>
-                  <a:srgbClr val="0F4E7E"/>
-                </a:solidFill>
-                <a:latin typeface="Calibri" pitchFamily="34" charset="0"/>
-                <a:ea typeface="Calibri" pitchFamily="34" charset="-122"/>
-                <a:cs typeface="Calibri" pitchFamily="34" charset="-120"/>
-              </a:rPr>
-              <a:t>Each window is reduced to min, max, average, latest and count and checked against the alert rules before anything leaves the vessel; only summaries go ashore.</a:t>
-            </a:r>
-            <a:endParaRPr lang="en-US" sz="1500" dirty="0"/>
           </a:p>
         </p:txBody>
       </p:sp>
@@ -2473,7 +2766,7 @@
     <p:bg>
       <p:bgPr>
         <a:solidFill>
-          <a:srgbClr val="FFFFFF"/>
+          <a:srgbClr val="EEF5F4"/>
         </a:solidFill>
       </p:bgPr>
     </p:bg>
@@ -2493,23 +2786,207 @@
       </p:grpSpPr>
       <p:sp>
         <p:nvSpPr>
-          <p:cNvPr id="2" name="Text 0"/>
-          <p:cNvSpPr/>
-          <p:nvPr/>
-        </p:nvSpPr>
-        <p:spPr>
-          <a:xfrm>
-            <a:off x="640080" y="457200"/>
-            <a:ext cx="7315200" cy="640080"/>
-          </a:xfrm>
-          <a:prstGeom prst="rect">
-            <a:avLst/>
-          </a:prstGeom>
-          <a:noFill/>
-          <a:ln/>
-        </p:spPr>
-        <p:txBody>
-          <a:bodyPr wrap="square" rtlCol="0" anchor="ctr"/>
+          <p:cNvPr id="2" name="Shape 0"/>
+          <p:cNvSpPr/>
+          <p:nvPr/>
+        </p:nvSpPr>
+        <p:spPr>
+          <a:xfrm>
+            <a:off x="365760" y="365760"/>
+            <a:ext cx="365760" cy="0"/>
+          </a:xfrm>
+          <a:prstGeom prst="line">
+            <a:avLst/>
+          </a:prstGeom>
+          <a:noFill/>
+          <a:ln w="19050">
+            <a:solidFill>
+              <a:srgbClr val="0A4F4C"/>
+            </a:solidFill>
+            <a:prstDash val="solid"/>
+          </a:ln>
+        </p:spPr>
+      </p:sp>
+      <p:sp>
+        <p:nvSpPr>
+          <p:cNvPr id="3" name="Shape 1"/>
+          <p:cNvSpPr/>
+          <p:nvPr/>
+        </p:nvSpPr>
+        <p:spPr>
+          <a:xfrm>
+            <a:off x="365760" y="365760"/>
+            <a:ext cx="0" cy="365760"/>
+          </a:xfrm>
+          <a:prstGeom prst="line">
+            <a:avLst/>
+          </a:prstGeom>
+          <a:noFill/>
+          <a:ln w="19050">
+            <a:solidFill>
+              <a:srgbClr val="0A4F4C"/>
+            </a:solidFill>
+            <a:prstDash val="solid"/>
+          </a:ln>
+        </p:spPr>
+      </p:sp>
+      <p:sp>
+        <p:nvSpPr>
+          <p:cNvPr id="4" name="Shape 2"/>
+          <p:cNvSpPr/>
+          <p:nvPr/>
+        </p:nvSpPr>
+        <p:spPr>
+          <a:xfrm>
+            <a:off x="11460175" y="365760"/>
+            <a:ext cx="365760" cy="0"/>
+          </a:xfrm>
+          <a:prstGeom prst="line">
+            <a:avLst/>
+          </a:prstGeom>
+          <a:noFill/>
+          <a:ln w="19050">
+            <a:solidFill>
+              <a:srgbClr val="0A4F4C"/>
+            </a:solidFill>
+            <a:prstDash val="solid"/>
+          </a:ln>
+        </p:spPr>
+      </p:sp>
+      <p:sp>
+        <p:nvSpPr>
+          <p:cNvPr id="5" name="Shape 3"/>
+          <p:cNvSpPr/>
+          <p:nvPr/>
+        </p:nvSpPr>
+        <p:spPr>
+          <a:xfrm>
+            <a:off x="11825935" y="365760"/>
+            <a:ext cx="0" cy="365760"/>
+          </a:xfrm>
+          <a:prstGeom prst="line">
+            <a:avLst/>
+          </a:prstGeom>
+          <a:noFill/>
+          <a:ln w="19050">
+            <a:solidFill>
+              <a:srgbClr val="0A4F4C"/>
+            </a:solidFill>
+            <a:prstDash val="solid"/>
+          </a:ln>
+        </p:spPr>
+      </p:sp>
+      <p:sp>
+        <p:nvSpPr>
+          <p:cNvPr id="6" name="Shape 4"/>
+          <p:cNvSpPr/>
+          <p:nvPr/>
+        </p:nvSpPr>
+        <p:spPr>
+          <a:xfrm>
+            <a:off x="365760" y="6492240"/>
+            <a:ext cx="365760" cy="0"/>
+          </a:xfrm>
+          <a:prstGeom prst="line">
+            <a:avLst/>
+          </a:prstGeom>
+          <a:noFill/>
+          <a:ln w="19050">
+            <a:solidFill>
+              <a:srgbClr val="0A4F4C"/>
+            </a:solidFill>
+            <a:prstDash val="solid"/>
+          </a:ln>
+        </p:spPr>
+      </p:sp>
+      <p:sp>
+        <p:nvSpPr>
+          <p:cNvPr id="7" name="Shape 5"/>
+          <p:cNvSpPr/>
+          <p:nvPr/>
+        </p:nvSpPr>
+        <p:spPr>
+          <a:xfrm>
+            <a:off x="365760" y="6126480"/>
+            <a:ext cx="0" cy="365760"/>
+          </a:xfrm>
+          <a:prstGeom prst="line">
+            <a:avLst/>
+          </a:prstGeom>
+          <a:noFill/>
+          <a:ln w="19050">
+            <a:solidFill>
+              <a:srgbClr val="0A4F4C"/>
+            </a:solidFill>
+            <a:prstDash val="solid"/>
+          </a:ln>
+        </p:spPr>
+      </p:sp>
+      <p:sp>
+        <p:nvSpPr>
+          <p:cNvPr id="8" name="Shape 6"/>
+          <p:cNvSpPr/>
+          <p:nvPr/>
+        </p:nvSpPr>
+        <p:spPr>
+          <a:xfrm>
+            <a:off x="11460175" y="6492240"/>
+            <a:ext cx="365760" cy="0"/>
+          </a:xfrm>
+          <a:prstGeom prst="line">
+            <a:avLst/>
+          </a:prstGeom>
+          <a:noFill/>
+          <a:ln w="19050">
+            <a:solidFill>
+              <a:srgbClr val="0A4F4C"/>
+            </a:solidFill>
+            <a:prstDash val="solid"/>
+          </a:ln>
+        </p:spPr>
+      </p:sp>
+      <p:sp>
+        <p:nvSpPr>
+          <p:cNvPr id="9" name="Shape 7"/>
+          <p:cNvSpPr/>
+          <p:nvPr/>
+        </p:nvSpPr>
+        <p:spPr>
+          <a:xfrm>
+            <a:off x="11825935" y="6126480"/>
+            <a:ext cx="0" cy="365760"/>
+          </a:xfrm>
+          <a:prstGeom prst="line">
+            <a:avLst/>
+          </a:prstGeom>
+          <a:noFill/>
+          <a:ln w="19050">
+            <a:solidFill>
+              <a:srgbClr val="0A4F4C"/>
+            </a:solidFill>
+            <a:prstDash val="solid"/>
+          </a:ln>
+        </p:spPr>
+      </p:sp>
+      <p:sp>
+        <p:nvSpPr>
+          <p:cNvPr id="10" name="Text 8"/>
+          <p:cNvSpPr/>
+          <p:nvPr/>
+        </p:nvSpPr>
+        <p:spPr>
+          <a:xfrm>
+            <a:off x="914400" y="822960"/>
+            <a:ext cx="914400" cy="640080"/>
+          </a:xfrm>
+          <a:prstGeom prst="rect">
+            <a:avLst/>
+          </a:prstGeom>
+          <a:noFill/>
+          <a:ln/>
+        </p:spPr>
+        <p:txBody>
+          <a:bodyPr wrap="square" lIns="0" tIns="0" rIns="0" bIns="0" rtlCol="0" anchor="ctr"/>
           <a:lstStyle/>
           <a:p>
             <a:pPr indent="0" marL="0">
@@ -2518,13 +2995,13 @@
             <a:r>
               <a:rPr lang="en-US" sz="3000" b="1" dirty="0">
                 <a:solidFill>
-                  <a:srgbClr val="102636"/>
+                  <a:srgbClr val="0A4F4C"/>
                 </a:solidFill>
-                <a:latin typeface="Times New Roman" pitchFamily="34" charset="0"/>
-                <a:ea typeface="Times New Roman" pitchFamily="34" charset="-122"/>
-                <a:cs typeface="Times New Roman" pitchFamily="34" charset="-120"/>
+                <a:latin typeface="Century Gothic" pitchFamily="34" charset="0"/>
+                <a:ea typeface="Century Gothic" pitchFamily="34" charset="-122"/>
+                <a:cs typeface="Century Gothic" pitchFamily="34" charset="-120"/>
               </a:rPr>
-              <a:t>Live Demo</a:t>
+              <a:t>02</a:t>
             </a:r>
             <a:endParaRPr lang="en-US" sz="3000" dirty="0"/>
           </a:p>
@@ -2532,32 +3009,110 @@
       </p:sp>
       <p:sp>
         <p:nvSpPr>
-          <p:cNvPr id="3" name="Text 1"/>
-          <p:cNvSpPr/>
-          <p:nvPr/>
-        </p:nvSpPr>
-        <p:spPr>
-          <a:xfrm>
-            <a:off x="658368" y="1143000"/>
-            <a:ext cx="10972800" cy="365760"/>
-          </a:xfrm>
-          <a:prstGeom prst="rect">
-            <a:avLst/>
-          </a:prstGeom>
-          <a:noFill/>
-          <a:ln/>
-        </p:spPr>
-        <p:txBody>
-          <a:bodyPr wrap="square" rtlCol="0" anchor="ctr"/>
+          <p:cNvPr id="11" name="Text 9"/>
+          <p:cNvSpPr/>
+          <p:nvPr/>
+        </p:nvSpPr>
+        <p:spPr>
+          <a:xfrm>
+            <a:off x="1783080" y="996696"/>
+            <a:ext cx="9494215" cy="274320"/>
+          </a:xfrm>
+          <a:prstGeom prst="rect">
+            <a:avLst/>
+          </a:prstGeom>
+          <a:noFill/>
+          <a:ln/>
+        </p:spPr>
+        <p:txBody>
+          <a:bodyPr wrap="square" lIns="0" tIns="0" rIns="0" bIns="0" rtlCol="0" anchor="ctr"/>
           <a:lstStyle/>
           <a:p>
             <a:pPr indent="0" marL="0">
               <a:buNone/>
             </a:pPr>
             <a:r>
-              <a:rPr lang="en-US" sz="1400" dirty="0">
+              <a:rPr lang="en-US" sz="1100" b="1" spc="200" kern="0" dirty="0">
                 <a:solidFill>
-                  <a:srgbClr val="1E76A6"/>
+                  <a:srgbClr val="5F6B74"/>
+                </a:solidFill>
+                <a:latin typeface="Calibri" pitchFamily="34" charset="0"/>
+                <a:ea typeface="Calibri" pitchFamily="34" charset="-122"/>
+                <a:cs typeface="Calibri" pitchFamily="34" charset="-120"/>
+              </a:rPr>
+              <a:t>LIVE DEMO</a:t>
+            </a:r>
+            <a:endParaRPr lang="en-US" sz="1100" dirty="0"/>
+          </a:p>
+        </p:txBody>
+      </p:sp>
+      <p:sp>
+        <p:nvSpPr>
+          <p:cNvPr id="12" name="Text 10"/>
+          <p:cNvSpPr/>
+          <p:nvPr/>
+        </p:nvSpPr>
+        <p:spPr>
+          <a:xfrm>
+            <a:off x="914400" y="1472184"/>
+            <a:ext cx="10362895" cy="640080"/>
+          </a:xfrm>
+          <a:prstGeom prst="rect">
+            <a:avLst/>
+          </a:prstGeom>
+          <a:noFill/>
+          <a:ln/>
+        </p:spPr>
+        <p:txBody>
+          <a:bodyPr wrap="square" lIns="0" tIns="0" rIns="0" bIns="0" rtlCol="0" anchor="ctr"/>
+          <a:lstStyle/>
+          <a:p>
+            <a:pPr indent="0" marL="0">
+              <a:buNone/>
+            </a:pPr>
+            <a:r>
+              <a:rPr lang="en-US" sz="2300" b="1" dirty="0">
+                <a:solidFill>
+                  <a:srgbClr val="17302C"/>
+                </a:solidFill>
+                <a:latin typeface="Century Gothic" pitchFamily="34" charset="0"/>
+                <a:ea typeface="Century Gothic" pitchFamily="34" charset="-122"/>
+                <a:cs typeface="Century Gothic" pitchFamily="34" charset="-120"/>
+              </a:rPr>
+              <a:t>See it running on AWS</a:t>
+            </a:r>
+            <a:endParaRPr lang="en-US" sz="2300" dirty="0"/>
+          </a:p>
+        </p:txBody>
+      </p:sp>
+      <p:sp>
+        <p:nvSpPr>
+          <p:cNvPr id="13" name="Text 11"/>
+          <p:cNvSpPr/>
+          <p:nvPr/>
+        </p:nvSpPr>
+        <p:spPr>
+          <a:xfrm>
+            <a:off x="914400" y="1993392"/>
+            <a:ext cx="10362895" cy="274320"/>
+          </a:xfrm>
+          <a:prstGeom prst="rect">
+            <a:avLst/>
+          </a:prstGeom>
+          <a:noFill/>
+          <a:ln/>
+        </p:spPr>
+        <p:txBody>
+          <a:bodyPr wrap="square" rtlCol="0" anchor="ctr"/>
+          <a:lstStyle/>
+          <a:p>
+            <a:pPr indent="0" marL="0">
+              <a:buNone/>
+            </a:pPr>
+            <a:r>
+              <a:rPr lang="en-US" sz="1100" dirty="0">
+                <a:solidFill>
+                  <a:srgbClr val="0A4F4C"/>
                 </a:solidFill>
                 <a:latin typeface="Consolas" pitchFamily="34" charset="0"/>
                 <a:ea typeface="Consolas" pitchFamily="34" charset="-122"/>
@@ -2565,32 +3120,30 @@
               </a:rPr>
               <a:t>mvs-frontend-573065484152.s3-website-us-east-1.amazonaws.com</a:t>
             </a:r>
-            <a:endParaRPr lang="en-US" sz="1400" dirty="0"/>
-          </a:p>
-        </p:txBody>
-      </p:sp>
-      <p:sp>
-        <p:nvSpPr>
-          <p:cNvPr id="4" name="Shape 2"/>
-          <p:cNvSpPr/>
-          <p:nvPr/>
-        </p:nvSpPr>
-        <p:spPr>
-          <a:xfrm>
-            <a:off x="640080" y="1828800"/>
-            <a:ext cx="10881360" cy="1371600"/>
+            <a:endParaRPr lang="en-US" sz="1100" dirty="0"/>
+          </a:p>
+        </p:txBody>
+      </p:sp>
+      <p:sp>
+        <p:nvSpPr>
+          <p:cNvPr id="14" name="Shape 12"/>
+          <p:cNvSpPr/>
+          <p:nvPr/>
+        </p:nvSpPr>
+        <p:spPr>
+          <a:xfrm>
+            <a:off x="914400" y="2606040"/>
+            <a:ext cx="3210458" cy="3291840"/>
           </a:xfrm>
           <a:prstGeom prst="roundRect">
-            <a:avLst>
-              <a:gd name="adj" fmla="val 6667"/>
-            </a:avLst>
+            <a:avLst/>
           </a:prstGeom>
           <a:solidFill>
-            <a:srgbClr val="EDF4F9"/>
+            <a:srgbClr val="FFFFFF"/>
           </a:solidFill>
-          <a:ln w="15240">
-            <a:solidFill>
-              <a:srgbClr val="1E76A6"/>
+          <a:ln w="12700">
+            <a:solidFill>
+              <a:srgbClr val="E4E6E9"/>
             </a:solidFill>
             <a:prstDash val="solid"/>
           </a:ln>
@@ -2598,73 +3151,14 @@
       </p:sp>
       <p:sp>
         <p:nvSpPr>
-          <p:cNvPr id="5" name="Shape 3"/>
-          <p:cNvSpPr/>
-          <p:nvPr/>
-        </p:nvSpPr>
-        <p:spPr>
-          <a:xfrm>
-            <a:off x="960120" y="2203704"/>
-            <a:ext cx="621792" cy="621792"/>
-          </a:xfrm>
-          <a:prstGeom prst="ellipse">
-            <a:avLst/>
-          </a:prstGeom>
-          <a:solidFill>
-            <a:srgbClr val="0F4E7E"/>
-          </a:solidFill>
-          <a:ln/>
-        </p:spPr>
-      </p:sp>
-      <p:sp>
-        <p:nvSpPr>
-          <p:cNvPr id="6" name="Text 4"/>
-          <p:cNvSpPr/>
-          <p:nvPr/>
-        </p:nvSpPr>
-        <p:spPr>
-          <a:xfrm>
-            <a:off x="960120" y="2203704"/>
-            <a:ext cx="621792" cy="621792"/>
-          </a:xfrm>
-          <a:prstGeom prst="rect">
-            <a:avLst/>
-          </a:prstGeom>
-          <a:noFill/>
-          <a:ln/>
-        </p:spPr>
-        <p:txBody>
-          <a:bodyPr wrap="square" lIns="0" tIns="0" rIns="0" bIns="0" rtlCol="0" anchor="ctr"/>
-          <a:lstStyle/>
-          <a:p>
-            <a:pPr algn="ctr" indent="0" marL="0">
-              <a:buNone/>
-            </a:pPr>
-            <a:r>
-              <a:rPr lang="en-US" sz="2200" b="1" dirty="0">
-                <a:solidFill>
-                  <a:srgbClr val="FFFFFF"/>
-                </a:solidFill>
-                <a:latin typeface="Times New Roman" pitchFamily="34" charset="0"/>
-                <a:ea typeface="Times New Roman" pitchFamily="34" charset="-122"/>
-                <a:cs typeface="Times New Roman" pitchFamily="34" charset="-120"/>
-              </a:rPr>
-              <a:t>1</a:t>
-            </a:r>
-            <a:endParaRPr lang="en-US" sz="2200" dirty="0"/>
-          </a:p>
-        </p:txBody>
-      </p:sp>
-      <p:sp>
-        <p:nvSpPr>
-          <p:cNvPr id="7" name="Text 5"/>
-          <p:cNvSpPr/>
-          <p:nvPr/>
-        </p:nvSpPr>
-        <p:spPr>
-          <a:xfrm>
-            <a:off x="1828800" y="2029968"/>
-            <a:ext cx="9418320" cy="411480"/>
+          <p:cNvPr id="15" name="Text 13"/>
+          <p:cNvSpPr/>
+          <p:nvPr/>
+        </p:nvSpPr>
+        <p:spPr>
+          <a:xfrm>
+            <a:off x="1188720" y="2843784"/>
+            <a:ext cx="1828800" cy="777240"/>
           </a:xfrm>
           <a:prstGeom prst="rect">
             <a:avLst/>
@@ -2680,51 +3174,93 @@
               <a:buNone/>
             </a:pPr>
             <a:r>
-              <a:rPr lang="en-US" sz="1700" b="1" dirty="0">
+              <a:rPr lang="en-US" sz="3800" b="1" dirty="0">
                 <a:solidFill>
-                  <a:srgbClr val="102636"/>
+                  <a:srgbClr val="0A4F4C"/>
                 </a:solidFill>
-                <a:latin typeface="Calibri" pitchFamily="34" charset="0"/>
-                <a:ea typeface="Calibri" pitchFamily="34" charset="-122"/>
-                <a:cs typeface="Calibri" pitchFamily="34" charset="-120"/>
+                <a:latin typeface="Century Gothic" pitchFamily="34" charset="0"/>
+                <a:ea typeface="Century Gothic" pitchFamily="34" charset="-122"/>
+                <a:cs typeface="Century Gothic" pitchFamily="34" charset="-120"/>
               </a:rPr>
-              <a:t>A Bridge Console per vessel</a:t>
-            </a:r>
-            <a:endParaRPr lang="en-US" sz="1700" dirty="0"/>
-          </a:p>
-        </p:txBody>
-      </p:sp>
-      <p:sp>
-        <p:nvSpPr>
-          <p:cNvPr id="8" name="Text 6"/>
-          <p:cNvSpPr/>
-          <p:nvPr/>
-        </p:nvSpPr>
-        <p:spPr>
-          <a:xfrm>
-            <a:off x="1828800" y="2450592"/>
-            <a:ext cx="9418320" cy="594360"/>
-          </a:xfrm>
-          <a:prstGeom prst="rect">
-            <a:avLst/>
-          </a:prstGeom>
-          <a:noFill/>
-          <a:ln/>
-        </p:spPr>
-        <p:txBody>
-          <a:bodyPr wrap="square" lIns="0" tIns="0" rIns="0" bIns="0" rtlCol="0" anchor="ctr"/>
+              <a:t>01</a:t>
+            </a:r>
+            <a:endParaRPr lang="en-US" sz="3800" dirty="0"/>
+          </a:p>
+        </p:txBody>
+      </p:sp>
+      <p:sp>
+        <p:nvSpPr>
+          <p:cNvPr id="16" name="Text 14"/>
+          <p:cNvSpPr/>
+          <p:nvPr/>
+        </p:nvSpPr>
+        <p:spPr>
+          <a:xfrm>
+            <a:off x="1207008" y="3657600"/>
+            <a:ext cx="2661818" cy="868680"/>
+          </a:xfrm>
+          <a:prstGeom prst="rect">
+            <a:avLst/>
+          </a:prstGeom>
+          <a:noFill/>
+          <a:ln/>
+        </p:spPr>
+        <p:txBody>
+          <a:bodyPr wrap="square" lIns="0" tIns="0" rIns="0" bIns="0" rtlCol="0" anchor="t"/>
           <a:lstStyle/>
           <a:p>
             <a:pPr indent="0" marL="0">
               <a:lnSpc>
-                <a:spcPct val="105000"/>
+                <a:spcPct val="100000"/>
               </a:lnSpc>
               <a:buNone/>
             </a:pPr>
             <a:r>
-              <a:rPr lang="en-US" sz="1300" dirty="0">
+              <a:rPr lang="en-US" sz="1550" b="1" dirty="0">
                 <a:solidFill>
-                  <a:srgbClr val="557280"/>
+                  <a:srgbClr val="17302C"/>
+                </a:solidFill>
+                <a:latin typeface="Century Gothic" pitchFamily="34" charset="0"/>
+                <a:ea typeface="Century Gothic" pitchFamily="34" charset="-122"/>
+                <a:cs typeface="Century Gothic" pitchFamily="34" charset="-120"/>
+              </a:rPr>
+              <a:t>A Bridge Console per vessel</a:t>
+            </a:r>
+            <a:endParaRPr lang="en-US" sz="1550" dirty="0"/>
+          </a:p>
+        </p:txBody>
+      </p:sp>
+      <p:sp>
+        <p:nvSpPr>
+          <p:cNvPr id="17" name="Text 15"/>
+          <p:cNvSpPr/>
+          <p:nvPr/>
+        </p:nvSpPr>
+        <p:spPr>
+          <a:xfrm>
+            <a:off x="1207008" y="4526280"/>
+            <a:ext cx="2661818" cy="1188720"/>
+          </a:xfrm>
+          <a:prstGeom prst="rect">
+            <a:avLst/>
+          </a:prstGeom>
+          <a:noFill/>
+          <a:ln/>
+        </p:spPr>
+        <p:txBody>
+          <a:bodyPr wrap="square" lIns="0" tIns="0" rIns="0" bIns="0" rtlCol="0" anchor="ctr"/>
+          <a:lstStyle/>
+          <a:p>
+            <a:pPr indent="0" marL="0">
+              <a:lnSpc>
+                <a:spcPct val="120000"/>
+              </a:lnSpc>
+              <a:buNone/>
+            </a:pPr>
+            <a:r>
+              <a:rPr lang="en-US" sz="1200" dirty="0">
+                <a:solidFill>
+                  <a:srgbClr val="5F6B74"/>
                 </a:solidFill>
                 <a:latin typeface="Calibri" pitchFamily="34" charset="0"/>
                 <a:ea typeface="Calibri" pitchFamily="34" charset="-122"/>
@@ -2732,32 +3268,30 @@
               </a:rPr>
               <a:t>Engine, fuel, ballast, hull vibration and passengers live for both vessels, reduced to a summary before it leaves the ship.</a:t>
             </a:r>
-            <a:endParaRPr lang="en-US" sz="1300" dirty="0"/>
-          </a:p>
-        </p:txBody>
-      </p:sp>
-      <p:sp>
-        <p:nvSpPr>
-          <p:cNvPr id="9" name="Shape 7"/>
-          <p:cNvSpPr/>
-          <p:nvPr/>
-        </p:nvSpPr>
-        <p:spPr>
-          <a:xfrm>
-            <a:off x="640080" y="3346704"/>
-            <a:ext cx="10881360" cy="1371600"/>
+            <a:endParaRPr lang="en-US" sz="1200" dirty="0"/>
+          </a:p>
+        </p:txBody>
+      </p:sp>
+      <p:sp>
+        <p:nvSpPr>
+          <p:cNvPr id="18" name="Shape 16"/>
+          <p:cNvSpPr/>
+          <p:nvPr/>
+        </p:nvSpPr>
+        <p:spPr>
+          <a:xfrm>
+            <a:off x="4490618" y="2606040"/>
+            <a:ext cx="3210458" cy="3291840"/>
           </a:xfrm>
           <a:prstGeom prst="roundRect">
-            <a:avLst>
-              <a:gd name="adj" fmla="val 6667"/>
-            </a:avLst>
+            <a:avLst/>
           </a:prstGeom>
           <a:solidFill>
-            <a:srgbClr val="EDF4F9"/>
+            <a:srgbClr val="FFFFFF"/>
           </a:solidFill>
-          <a:ln w="15240">
-            <a:solidFill>
-              <a:srgbClr val="1E76A6"/>
+          <a:ln w="12700">
+            <a:solidFill>
+              <a:srgbClr val="E4E6E9"/>
             </a:solidFill>
             <a:prstDash val="solid"/>
           </a:ln>
@@ -2765,73 +3299,14 @@
       </p:sp>
       <p:sp>
         <p:nvSpPr>
-          <p:cNvPr id="10" name="Shape 8"/>
-          <p:cNvSpPr/>
-          <p:nvPr/>
-        </p:nvSpPr>
-        <p:spPr>
-          <a:xfrm>
-            <a:off x="960120" y="3721608"/>
-            <a:ext cx="621792" cy="621792"/>
-          </a:xfrm>
-          <a:prstGeom prst="ellipse">
-            <a:avLst/>
-          </a:prstGeom>
-          <a:solidFill>
-            <a:srgbClr val="0F4E7E"/>
-          </a:solidFill>
-          <a:ln/>
-        </p:spPr>
-      </p:sp>
-      <p:sp>
-        <p:nvSpPr>
-          <p:cNvPr id="11" name="Text 9"/>
-          <p:cNvSpPr/>
-          <p:nvPr/>
-        </p:nvSpPr>
-        <p:spPr>
-          <a:xfrm>
-            <a:off x="960120" y="3721608"/>
-            <a:ext cx="621792" cy="621792"/>
-          </a:xfrm>
-          <a:prstGeom prst="rect">
-            <a:avLst/>
-          </a:prstGeom>
-          <a:noFill/>
-          <a:ln/>
-        </p:spPr>
-        <p:txBody>
-          <a:bodyPr wrap="square" lIns="0" tIns="0" rIns="0" bIns="0" rtlCol="0" anchor="ctr"/>
-          <a:lstStyle/>
-          <a:p>
-            <a:pPr algn="ctr" indent="0" marL="0">
-              <a:buNone/>
-            </a:pPr>
-            <a:r>
-              <a:rPr lang="en-US" sz="2200" b="1" dirty="0">
-                <a:solidFill>
-                  <a:srgbClr val="FFFFFF"/>
-                </a:solidFill>
-                <a:latin typeface="Times New Roman" pitchFamily="34" charset="0"/>
-                <a:ea typeface="Times New Roman" pitchFamily="34" charset="-122"/>
-                <a:cs typeface="Times New Roman" pitchFamily="34" charset="-120"/>
-              </a:rPr>
-              <a:t>2</a:t>
-            </a:r>
-            <a:endParaRPr lang="en-US" sz="2200" dirty="0"/>
-          </a:p>
-        </p:txBody>
-      </p:sp>
-      <p:sp>
-        <p:nvSpPr>
-          <p:cNvPr id="12" name="Text 10"/>
-          <p:cNvSpPr/>
-          <p:nvPr/>
-        </p:nvSpPr>
-        <p:spPr>
-          <a:xfrm>
-            <a:off x="1828800" y="3547872"/>
-            <a:ext cx="9418320" cy="411480"/>
+          <p:cNvPr id="19" name="Text 17"/>
+          <p:cNvSpPr/>
+          <p:nvPr/>
+        </p:nvSpPr>
+        <p:spPr>
+          <a:xfrm>
+            <a:off x="4764938" y="2843784"/>
+            <a:ext cx="1828800" cy="777240"/>
           </a:xfrm>
           <a:prstGeom prst="rect">
             <a:avLst/>
@@ -2847,51 +3322,93 @@
               <a:buNone/>
             </a:pPr>
             <a:r>
-              <a:rPr lang="en-US" sz="1700" b="1" dirty="0">
+              <a:rPr lang="en-US" sz="3800" b="1" dirty="0">
                 <a:solidFill>
-                  <a:srgbClr val="102636"/>
+                  <a:srgbClr val="0A4F4C"/>
                 </a:solidFill>
-                <a:latin typeface="Calibri" pitchFamily="34" charset="0"/>
-                <a:ea typeface="Calibri" pitchFamily="34" charset="-122"/>
-                <a:cs typeface="Calibri" pitchFamily="34" charset="-120"/>
+                <a:latin typeface="Century Gothic" pitchFamily="34" charset="0"/>
+                <a:ea typeface="Century Gothic" pitchFamily="34" charset="-122"/>
+                <a:cs typeface="Century Gothic" pitchFamily="34" charset="-120"/>
               </a:rPr>
-              <a:t>Real alerts on the console</a:t>
-            </a:r>
-            <a:endParaRPr lang="en-US" sz="1700" dirty="0"/>
-          </a:p>
-        </p:txBody>
-      </p:sp>
-      <p:sp>
-        <p:nvSpPr>
-          <p:cNvPr id="13" name="Text 11"/>
-          <p:cNvSpPr/>
-          <p:nvPr/>
-        </p:nvSpPr>
-        <p:spPr>
-          <a:xfrm>
-            <a:off x="1828800" y="3968496"/>
-            <a:ext cx="9418320" cy="594360"/>
-          </a:xfrm>
-          <a:prstGeom prst="rect">
-            <a:avLst/>
-          </a:prstGeom>
-          <a:noFill/>
-          <a:ln/>
-        </p:spPr>
-        <p:txBody>
-          <a:bodyPr wrap="square" lIns="0" tIns="0" rIns="0" bIns="0" rtlCol="0" anchor="ctr"/>
+              <a:t>02</a:t>
+            </a:r>
+            <a:endParaRPr lang="en-US" sz="3800" dirty="0"/>
+          </a:p>
+        </p:txBody>
+      </p:sp>
+      <p:sp>
+        <p:nvSpPr>
+          <p:cNvPr id="20" name="Text 18"/>
+          <p:cNvSpPr/>
+          <p:nvPr/>
+        </p:nvSpPr>
+        <p:spPr>
+          <a:xfrm>
+            <a:off x="4783226" y="3657600"/>
+            <a:ext cx="2661818" cy="868680"/>
+          </a:xfrm>
+          <a:prstGeom prst="rect">
+            <a:avLst/>
+          </a:prstGeom>
+          <a:noFill/>
+          <a:ln/>
+        </p:spPr>
+        <p:txBody>
+          <a:bodyPr wrap="square" lIns="0" tIns="0" rIns="0" bIns="0" rtlCol="0" anchor="t"/>
           <a:lstStyle/>
           <a:p>
             <a:pPr indent="0" marL="0">
               <a:lnSpc>
-                <a:spcPct val="105000"/>
+                <a:spcPct val="100000"/>
               </a:lnSpc>
               <a:buNone/>
             </a:pPr>
             <a:r>
-              <a:rPr lang="en-US" sz="1300" dirty="0">
+              <a:rPr lang="en-US" sz="1550" b="1" dirty="0">
                 <a:solidFill>
-                  <a:srgbClr val="557280"/>
+                  <a:srgbClr val="17302C"/>
+                </a:solidFill>
+                <a:latin typeface="Century Gothic" pitchFamily="34" charset="0"/>
+                <a:ea typeface="Century Gothic" pitchFamily="34" charset="-122"/>
+                <a:cs typeface="Century Gothic" pitchFamily="34" charset="-120"/>
+              </a:rPr>
+              <a:t>Real alerts on the console</a:t>
+            </a:r>
+            <a:endParaRPr lang="en-US" sz="1550" dirty="0"/>
+          </a:p>
+        </p:txBody>
+      </p:sp>
+      <p:sp>
+        <p:nvSpPr>
+          <p:cNvPr id="21" name="Text 19"/>
+          <p:cNvSpPr/>
+          <p:nvPr/>
+        </p:nvSpPr>
+        <p:spPr>
+          <a:xfrm>
+            <a:off x="4783226" y="4526280"/>
+            <a:ext cx="2661818" cy="1188720"/>
+          </a:xfrm>
+          <a:prstGeom prst="rect">
+            <a:avLst/>
+          </a:prstGeom>
+          <a:noFill/>
+          <a:ln/>
+        </p:spPr>
+        <p:txBody>
+          <a:bodyPr wrap="square" lIns="0" tIns="0" rIns="0" bIns="0" rtlCol="0" anchor="ctr"/>
+          <a:lstStyle/>
+          <a:p>
+            <a:pPr indent="0" marL="0">
+              <a:lnSpc>
+                <a:spcPct val="120000"/>
+              </a:lnSpc>
+              <a:buNone/>
+            </a:pPr>
+            <a:r>
+              <a:rPr lang="en-US" sz="1200" dirty="0">
+                <a:solidFill>
+                  <a:srgbClr val="5F6B74"/>
                 </a:solidFill>
                 <a:latin typeface="Calibri" pitchFamily="34" charset="0"/>
                 <a:ea typeface="Calibri" pitchFamily="34" charset="-122"/>
@@ -2899,32 +3416,30 @@
               </a:rPr>
               <a:t>Excessive fuel burn and hull stress fire on the Bridge Console as their thresholds are crossed, on real data.</a:t>
             </a:r>
-            <a:endParaRPr lang="en-US" sz="1300" dirty="0"/>
-          </a:p>
-        </p:txBody>
-      </p:sp>
-      <p:sp>
-        <p:nvSpPr>
-          <p:cNvPr id="14" name="Shape 12"/>
-          <p:cNvSpPr/>
-          <p:nvPr/>
-        </p:nvSpPr>
-        <p:spPr>
-          <a:xfrm>
-            <a:off x="640080" y="4864608"/>
-            <a:ext cx="10881360" cy="1371600"/>
+            <a:endParaRPr lang="en-US" sz="1200" dirty="0"/>
+          </a:p>
+        </p:txBody>
+      </p:sp>
+      <p:sp>
+        <p:nvSpPr>
+          <p:cNvPr id="22" name="Shape 20"/>
+          <p:cNvSpPr/>
+          <p:nvPr/>
+        </p:nvSpPr>
+        <p:spPr>
+          <a:xfrm>
+            <a:off x="8066837" y="2606040"/>
+            <a:ext cx="3210458" cy="3291840"/>
           </a:xfrm>
           <a:prstGeom prst="roundRect">
-            <a:avLst>
-              <a:gd name="adj" fmla="val 6667"/>
-            </a:avLst>
+            <a:avLst/>
           </a:prstGeom>
           <a:solidFill>
-            <a:srgbClr val="EDF4F9"/>
+            <a:srgbClr val="FFFFFF"/>
           </a:solidFill>
-          <a:ln w="15240">
-            <a:solidFill>
-              <a:srgbClr val="1E76A6"/>
+          <a:ln w="12700">
+            <a:solidFill>
+              <a:srgbClr val="E4E6E9"/>
             </a:solidFill>
             <a:prstDash val="solid"/>
           </a:ln>
@@ -2932,73 +3447,14 @@
       </p:sp>
       <p:sp>
         <p:nvSpPr>
-          <p:cNvPr id="15" name="Shape 13"/>
-          <p:cNvSpPr/>
-          <p:nvPr/>
-        </p:nvSpPr>
-        <p:spPr>
-          <a:xfrm>
-            <a:off x="960120" y="5239512"/>
-            <a:ext cx="621792" cy="621792"/>
-          </a:xfrm>
-          <a:prstGeom prst="ellipse">
-            <a:avLst/>
-          </a:prstGeom>
-          <a:solidFill>
-            <a:srgbClr val="0F4E7E"/>
-          </a:solidFill>
-          <a:ln/>
-        </p:spPr>
-      </p:sp>
-      <p:sp>
-        <p:nvSpPr>
-          <p:cNvPr id="16" name="Text 14"/>
-          <p:cNvSpPr/>
-          <p:nvPr/>
-        </p:nvSpPr>
-        <p:spPr>
-          <a:xfrm>
-            <a:off x="960120" y="5239512"/>
-            <a:ext cx="621792" cy="621792"/>
-          </a:xfrm>
-          <a:prstGeom prst="rect">
-            <a:avLst/>
-          </a:prstGeom>
-          <a:noFill/>
-          <a:ln/>
-        </p:spPr>
-        <p:txBody>
-          <a:bodyPr wrap="square" lIns="0" tIns="0" rIns="0" bIns="0" rtlCol="0" anchor="ctr"/>
-          <a:lstStyle/>
-          <a:p>
-            <a:pPr algn="ctr" indent="0" marL="0">
-              <a:buNone/>
-            </a:pPr>
-            <a:r>
-              <a:rPr lang="en-US" sz="2200" b="1" dirty="0">
-                <a:solidFill>
-                  <a:srgbClr val="FFFFFF"/>
-                </a:solidFill>
-                <a:latin typeface="Times New Roman" pitchFamily="34" charset="0"/>
-                <a:ea typeface="Times New Roman" pitchFamily="34" charset="-122"/>
-                <a:cs typeface="Times New Roman" pitchFamily="34" charset="-120"/>
-              </a:rPr>
-              <a:t>3</a:t>
-            </a:r>
-            <a:endParaRPr lang="en-US" sz="2200" dirty="0"/>
-          </a:p>
-        </p:txBody>
-      </p:sp>
-      <p:sp>
-        <p:nvSpPr>
-          <p:cNvPr id="17" name="Text 15"/>
-          <p:cNvSpPr/>
-          <p:nvPr/>
-        </p:nvSpPr>
-        <p:spPr>
-          <a:xfrm>
-            <a:off x="1828800" y="5065776"/>
-            <a:ext cx="9418320" cy="411480"/>
+          <p:cNvPr id="23" name="Text 21"/>
+          <p:cNvSpPr/>
+          <p:nvPr/>
+        </p:nvSpPr>
+        <p:spPr>
+          <a:xfrm>
+            <a:off x="8341157" y="2843784"/>
+            <a:ext cx="1828800" cy="777240"/>
           </a:xfrm>
           <a:prstGeom prst="rect">
             <a:avLst/>
@@ -3014,51 +3470,93 @@
               <a:buNone/>
             </a:pPr>
             <a:r>
-              <a:rPr lang="en-US" sz="1700" b="1" dirty="0">
+              <a:rPr lang="en-US" sz="3800" b="1" dirty="0">
                 <a:solidFill>
-                  <a:srgbClr val="102636"/>
+                  <a:srgbClr val="0A4F4C"/>
                 </a:solidFill>
-                <a:latin typeface="Calibri" pitchFamily="34" charset="0"/>
-                <a:ea typeface="Calibri" pitchFamily="34" charset="-122"/>
-                <a:cs typeface="Calibri" pitchFamily="34" charset="-120"/>
+                <a:latin typeface="Century Gothic" pitchFamily="34" charset="0"/>
+                <a:ea typeface="Century Gothic" pitchFamily="34" charset="-122"/>
+                <a:cs typeface="Century Gothic" pitchFamily="34" charset="-120"/>
               </a:rPr>
-              <a:t>Stored items climbing live</a:t>
-            </a:r>
-            <a:endParaRPr lang="en-US" sz="1700" dirty="0"/>
-          </a:p>
-        </p:txBody>
-      </p:sp>
-      <p:sp>
-        <p:nvSpPr>
-          <p:cNvPr id="18" name="Text 16"/>
-          <p:cNvSpPr/>
-          <p:nvPr/>
-        </p:nvSpPr>
-        <p:spPr>
-          <a:xfrm>
-            <a:off x="1828800" y="5486400"/>
-            <a:ext cx="9418320" cy="594360"/>
-          </a:xfrm>
-          <a:prstGeom prst="rect">
-            <a:avLst/>
-          </a:prstGeom>
-          <a:noFill/>
-          <a:ln/>
-        </p:spPr>
-        <p:txBody>
-          <a:bodyPr wrap="square" lIns="0" tIns="0" rIns="0" bIns="0" rtlCol="0" anchor="ctr"/>
+              <a:t>03</a:t>
+            </a:r>
+            <a:endParaRPr lang="en-US" sz="3800" dirty="0"/>
+          </a:p>
+        </p:txBody>
+      </p:sp>
+      <p:sp>
+        <p:nvSpPr>
+          <p:cNvPr id="24" name="Text 22"/>
+          <p:cNvSpPr/>
+          <p:nvPr/>
+        </p:nvSpPr>
+        <p:spPr>
+          <a:xfrm>
+            <a:off x="8359445" y="3657600"/>
+            <a:ext cx="2661818" cy="868680"/>
+          </a:xfrm>
+          <a:prstGeom prst="rect">
+            <a:avLst/>
+          </a:prstGeom>
+          <a:noFill/>
+          <a:ln/>
+        </p:spPr>
+        <p:txBody>
+          <a:bodyPr wrap="square" lIns="0" tIns="0" rIns="0" bIns="0" rtlCol="0" anchor="t"/>
           <a:lstStyle/>
           <a:p>
             <a:pPr indent="0" marL="0">
               <a:lnSpc>
-                <a:spcPct val="105000"/>
+                <a:spcPct val="100000"/>
               </a:lnSpc>
               <a:buNone/>
             </a:pPr>
             <a:r>
-              <a:rPr lang="en-US" sz="1300" dirty="0">
+              <a:rPr lang="en-US" sz="1550" b="1" dirty="0">
                 <a:solidFill>
-                  <a:srgbClr val="557280"/>
+                  <a:srgbClr val="17302C"/>
+                </a:solidFill>
+                <a:latin typeface="Century Gothic" pitchFamily="34" charset="0"/>
+                <a:ea typeface="Century Gothic" pitchFamily="34" charset="-122"/>
+                <a:cs typeface="Century Gothic" pitchFamily="34" charset="-120"/>
+              </a:rPr>
+              <a:t>Stored items climbing live</a:t>
+            </a:r>
+            <a:endParaRPr lang="en-US" sz="1550" dirty="0"/>
+          </a:p>
+        </p:txBody>
+      </p:sp>
+      <p:sp>
+        <p:nvSpPr>
+          <p:cNvPr id="25" name="Text 23"/>
+          <p:cNvSpPr/>
+          <p:nvPr/>
+        </p:nvSpPr>
+        <p:spPr>
+          <a:xfrm>
+            <a:off x="8359445" y="4526280"/>
+            <a:ext cx="2661818" cy="1188720"/>
+          </a:xfrm>
+          <a:prstGeom prst="rect">
+            <a:avLst/>
+          </a:prstGeom>
+          <a:noFill/>
+          <a:ln/>
+        </p:spPr>
+        <p:txBody>
+          <a:bodyPr wrap="square" lIns="0" tIns="0" rIns="0" bIns="0" rtlCol="0" anchor="ctr"/>
+          <a:lstStyle/>
+          <a:p>
+            <a:pPr indent="0" marL="0">
+              <a:lnSpc>
+                <a:spcPct val="120000"/>
+              </a:lnSpc>
+              <a:buNone/>
+            </a:pPr>
+            <a:r>
+              <a:rPr lang="en-US" sz="1200" dirty="0">
+                <a:solidFill>
+                  <a:srgbClr val="5F6B74"/>
                 </a:solidFill>
                 <a:latin typeface="Calibri" pitchFamily="34" charset="0"/>
                 <a:ea typeface="Calibri" pitchFamily="34" charset="-122"/>
@@ -3066,7 +3564,7 @@
               </a:rPr>
               <a:t>The count grows 59 to 374 to 425 during verification, and the freshest reading stays under a second old.</a:t>
             </a:r>
-            <a:endParaRPr lang="en-US" sz="1300" dirty="0"/>
+            <a:endParaRPr lang="en-US" sz="1200" dirty="0"/>
           </a:p>
         </p:txBody>
       </p:sp>
@@ -3084,7 +3582,7 @@
     <p:bg>
       <p:bgPr>
         <a:solidFill>
-          <a:srgbClr val="FFFFFF"/>
+          <a:srgbClr val="EEF5F4"/>
         </a:solidFill>
       </p:bgPr>
     </p:bg>
@@ -3104,80 +3602,237 @@
       </p:grpSpPr>
       <p:sp>
         <p:nvSpPr>
-          <p:cNvPr id="2" name="Text 0"/>
-          <p:cNvSpPr/>
-          <p:nvPr/>
-        </p:nvSpPr>
-        <p:spPr>
-          <a:xfrm>
-            <a:off x="640080" y="502920"/>
-            <a:ext cx="10972800" cy="822960"/>
-          </a:xfrm>
-          <a:prstGeom prst="rect">
-            <a:avLst/>
-          </a:prstGeom>
-          <a:noFill/>
-          <a:ln/>
-        </p:spPr>
-        <p:txBody>
-          <a:bodyPr wrap="square" rtlCol="0" anchor="t"/>
+          <p:cNvPr id="2" name="Shape 0"/>
+          <p:cNvSpPr/>
+          <p:nvPr/>
+        </p:nvSpPr>
+        <p:spPr>
+          <a:xfrm>
+            <a:off x="365760" y="365760"/>
+            <a:ext cx="365760" cy="0"/>
+          </a:xfrm>
+          <a:prstGeom prst="line">
+            <a:avLst/>
+          </a:prstGeom>
+          <a:noFill/>
+          <a:ln w="19050">
+            <a:solidFill>
+              <a:srgbClr val="0A4F4C"/>
+            </a:solidFill>
+            <a:prstDash val="solid"/>
+          </a:ln>
+        </p:spPr>
+      </p:sp>
+      <p:sp>
+        <p:nvSpPr>
+          <p:cNvPr id="3" name="Shape 1"/>
+          <p:cNvSpPr/>
+          <p:nvPr/>
+        </p:nvSpPr>
+        <p:spPr>
+          <a:xfrm>
+            <a:off x="365760" y="365760"/>
+            <a:ext cx="0" cy="365760"/>
+          </a:xfrm>
+          <a:prstGeom prst="line">
+            <a:avLst/>
+          </a:prstGeom>
+          <a:noFill/>
+          <a:ln w="19050">
+            <a:solidFill>
+              <a:srgbClr val="0A4F4C"/>
+            </a:solidFill>
+            <a:prstDash val="solid"/>
+          </a:ln>
+        </p:spPr>
+      </p:sp>
+      <p:sp>
+        <p:nvSpPr>
+          <p:cNvPr id="4" name="Shape 2"/>
+          <p:cNvSpPr/>
+          <p:nvPr/>
+        </p:nvSpPr>
+        <p:spPr>
+          <a:xfrm>
+            <a:off x="11460175" y="365760"/>
+            <a:ext cx="365760" cy="0"/>
+          </a:xfrm>
+          <a:prstGeom prst="line">
+            <a:avLst/>
+          </a:prstGeom>
+          <a:noFill/>
+          <a:ln w="19050">
+            <a:solidFill>
+              <a:srgbClr val="0A4F4C"/>
+            </a:solidFill>
+            <a:prstDash val="solid"/>
+          </a:ln>
+        </p:spPr>
+      </p:sp>
+      <p:sp>
+        <p:nvSpPr>
+          <p:cNvPr id="5" name="Shape 3"/>
+          <p:cNvSpPr/>
+          <p:nvPr/>
+        </p:nvSpPr>
+        <p:spPr>
+          <a:xfrm>
+            <a:off x="11825935" y="365760"/>
+            <a:ext cx="0" cy="365760"/>
+          </a:xfrm>
+          <a:prstGeom prst="line">
+            <a:avLst/>
+          </a:prstGeom>
+          <a:noFill/>
+          <a:ln w="19050">
+            <a:solidFill>
+              <a:srgbClr val="0A4F4C"/>
+            </a:solidFill>
+            <a:prstDash val="solid"/>
+          </a:ln>
+        </p:spPr>
+      </p:sp>
+      <p:sp>
+        <p:nvSpPr>
+          <p:cNvPr id="6" name="Shape 4"/>
+          <p:cNvSpPr/>
+          <p:nvPr/>
+        </p:nvSpPr>
+        <p:spPr>
+          <a:xfrm>
+            <a:off x="365760" y="6492240"/>
+            <a:ext cx="365760" cy="0"/>
+          </a:xfrm>
+          <a:prstGeom prst="line">
+            <a:avLst/>
+          </a:prstGeom>
+          <a:noFill/>
+          <a:ln w="19050">
+            <a:solidFill>
+              <a:srgbClr val="0A4F4C"/>
+            </a:solidFill>
+            <a:prstDash val="solid"/>
+          </a:ln>
+        </p:spPr>
+      </p:sp>
+      <p:sp>
+        <p:nvSpPr>
+          <p:cNvPr id="7" name="Shape 5"/>
+          <p:cNvSpPr/>
+          <p:nvPr/>
+        </p:nvSpPr>
+        <p:spPr>
+          <a:xfrm>
+            <a:off x="365760" y="6126480"/>
+            <a:ext cx="0" cy="365760"/>
+          </a:xfrm>
+          <a:prstGeom prst="line">
+            <a:avLst/>
+          </a:prstGeom>
+          <a:noFill/>
+          <a:ln w="19050">
+            <a:solidFill>
+              <a:srgbClr val="0A4F4C"/>
+            </a:solidFill>
+            <a:prstDash val="solid"/>
+          </a:ln>
+        </p:spPr>
+      </p:sp>
+      <p:sp>
+        <p:nvSpPr>
+          <p:cNvPr id="8" name="Shape 6"/>
+          <p:cNvSpPr/>
+          <p:nvPr/>
+        </p:nvSpPr>
+        <p:spPr>
+          <a:xfrm>
+            <a:off x="11460175" y="6492240"/>
+            <a:ext cx="365760" cy="0"/>
+          </a:xfrm>
+          <a:prstGeom prst="line">
+            <a:avLst/>
+          </a:prstGeom>
+          <a:noFill/>
+          <a:ln w="19050">
+            <a:solidFill>
+              <a:srgbClr val="0A4F4C"/>
+            </a:solidFill>
+            <a:prstDash val="solid"/>
+          </a:ln>
+        </p:spPr>
+      </p:sp>
+      <p:sp>
+        <p:nvSpPr>
+          <p:cNvPr id="9" name="Shape 7"/>
+          <p:cNvSpPr/>
+          <p:nvPr/>
+        </p:nvSpPr>
+        <p:spPr>
+          <a:xfrm>
+            <a:off x="11825935" y="6126480"/>
+            <a:ext cx="0" cy="365760"/>
+          </a:xfrm>
+          <a:prstGeom prst="line">
+            <a:avLst/>
+          </a:prstGeom>
+          <a:noFill/>
+          <a:ln w="19050">
+            <a:solidFill>
+              <a:srgbClr val="0A4F4C"/>
+            </a:solidFill>
+            <a:prstDash val="solid"/>
+          </a:ln>
+        </p:spPr>
+      </p:sp>
+      <p:sp>
+        <p:nvSpPr>
+          <p:cNvPr id="10" name="Text 8"/>
+          <p:cNvSpPr/>
+          <p:nvPr/>
+        </p:nvSpPr>
+        <p:spPr>
+          <a:xfrm>
+            <a:off x="914400" y="822960"/>
+            <a:ext cx="914400" cy="640080"/>
+          </a:xfrm>
+          <a:prstGeom prst="rect">
+            <a:avLst/>
+          </a:prstGeom>
+          <a:noFill/>
+          <a:ln/>
+        </p:spPr>
+        <p:txBody>
+          <a:bodyPr wrap="square" lIns="0" tIns="0" rIns="0" bIns="0" rtlCol="0" anchor="ctr"/>
           <a:lstStyle/>
           <a:p>
             <a:pPr indent="0" marL="0">
               <a:buNone/>
             </a:pPr>
             <a:r>
-              <a:rPr lang="en-US" sz="2800" b="1" dirty="0">
+              <a:rPr lang="en-US" sz="3000" b="1" dirty="0">
                 <a:solidFill>
-                  <a:srgbClr val="102636"/>
+                  <a:srgbClr val="0A4F4C"/>
                 </a:solidFill>
-                <a:latin typeface="Times New Roman" pitchFamily="34" charset="0"/>
-                <a:ea typeface="Times New Roman" pitchFamily="34" charset="-122"/>
-                <a:cs typeface="Times New Roman" pitchFamily="34" charset="-120"/>
+                <a:latin typeface="Century Gothic" pitchFamily="34" charset="0"/>
+                <a:ea typeface="Century Gothic" pitchFamily="34" charset="-122"/>
+                <a:cs typeface="Century Gothic" pitchFamily="34" charset="-120"/>
               </a:rPr>
-              <a:t>Hardest Part — green checks, broken page</a:t>
-            </a:r>
-            <a:endParaRPr lang="en-US" sz="2800" dirty="0"/>
-          </a:p>
-        </p:txBody>
-      </p:sp>
-      <p:sp>
-        <p:nvSpPr>
-          <p:cNvPr id="3" name="Shape 1"/>
-          <p:cNvSpPr/>
-          <p:nvPr/>
-        </p:nvSpPr>
-        <p:spPr>
-          <a:xfrm>
-            <a:off x="731520" y="1920240"/>
-            <a:ext cx="10698480" cy="1965960"/>
-          </a:xfrm>
-          <a:prstGeom prst="roundRect">
-            <a:avLst>
-              <a:gd name="adj" fmla="val 4651"/>
-            </a:avLst>
-          </a:prstGeom>
-          <a:solidFill>
-            <a:srgbClr val="EDF4F9"/>
-          </a:solidFill>
-          <a:ln w="19050">
-            <a:solidFill>
-              <a:srgbClr val="E5A83C"/>
-            </a:solidFill>
-            <a:prstDash val="solid"/>
-          </a:ln>
-        </p:spPr>
-      </p:sp>
-      <p:sp>
-        <p:nvSpPr>
-          <p:cNvPr id="4" name="Text 2"/>
-          <p:cNvSpPr/>
-          <p:nvPr/>
-        </p:nvSpPr>
-        <p:spPr>
-          <a:xfrm>
-            <a:off x="1005840" y="2103120"/>
-            <a:ext cx="3657600" cy="457200"/>
+              <a:t>03</a:t>
+            </a:r>
+            <a:endParaRPr lang="en-US" sz="3000" dirty="0"/>
+          </a:p>
+        </p:txBody>
+      </p:sp>
+      <p:sp>
+        <p:nvSpPr>
+          <p:cNvPr id="11" name="Text 9"/>
+          <p:cNvSpPr/>
+          <p:nvPr/>
+        </p:nvSpPr>
+        <p:spPr>
+          <a:xfrm>
+            <a:off x="1783080" y="996696"/>
+            <a:ext cx="9494215" cy="274320"/>
           </a:xfrm>
           <a:prstGeom prst="rect">
             <a:avLst/>
@@ -3193,99 +3848,30 @@
               <a:buNone/>
             </a:pPr>
             <a:r>
-              <a:rPr lang="en-US" sz="1900" b="1" dirty="0">
+              <a:rPr lang="en-US" sz="1100" b="1" spc="200" kern="0" dirty="0">
                 <a:solidFill>
-                  <a:srgbClr val="E5A83C"/>
-                </a:solidFill>
-                <a:latin typeface="Times New Roman" pitchFamily="34" charset="0"/>
-                <a:ea typeface="Times New Roman" pitchFamily="34" charset="-122"/>
-                <a:cs typeface="Times New Roman" pitchFamily="34" charset="-120"/>
-              </a:rPr>
-              <a:t>Problem</a:t>
-            </a:r>
-            <a:endParaRPr lang="en-US" sz="1900" dirty="0"/>
-          </a:p>
-        </p:txBody>
-      </p:sp>
-      <p:sp>
-        <p:nvSpPr>
-          <p:cNvPr id="5" name="Text 3"/>
-          <p:cNvSpPr/>
-          <p:nvPr/>
-        </p:nvSpPr>
-        <p:spPr>
-          <a:xfrm>
-            <a:off x="1005840" y="2578608"/>
-            <a:ext cx="9966960" cy="1188720"/>
-          </a:xfrm>
-          <a:prstGeom prst="rect">
-            <a:avLst/>
-          </a:prstGeom>
-          <a:noFill/>
-          <a:ln/>
-        </p:spPr>
-        <p:txBody>
-          <a:bodyPr wrap="square" lIns="0" tIns="0" rIns="0" bIns="0" rtlCol="0" anchor="ctr"/>
-          <a:lstStyle/>
-          <a:p>
-            <a:pPr indent="0" marL="0">
-              <a:lnSpc>
-                <a:spcPct val="105000"/>
-              </a:lnSpc>
-              <a:buNone/>
-            </a:pPr>
-            <a:r>
-              <a:rPr lang="en-US" sz="1300" dirty="0">
-                <a:solidFill>
-                  <a:srgbClr val="102636"/>
+                  <a:srgbClr val="5F6B74"/>
                 </a:solidFill>
                 <a:latin typeface="Calibri" pitchFamily="34" charset="0"/>
                 <a:ea typeface="Calibri" pitchFamily="34" charset="-122"/>
                 <a:cs typeface="Calibri" pitchFamily="34" charset="-120"/>
               </a:rPr>
-              <a:t>Deployed to the real AWS account, the dashboard page loaded but every panel stayed empty — its stylesheet, script and chart library all returned 404 from S3. Every signal said healthy: 120 tests green, a full emulator run clean, every curl check on the JSON API returning live data. The upload had flattened the static folder to the bucket root, and nothing was testing the page's own asset requests.</a:t>
-            </a:r>
-            <a:endParaRPr lang="en-US" sz="1300" dirty="0"/>
-          </a:p>
-        </p:txBody>
-      </p:sp>
-      <p:sp>
-        <p:nvSpPr>
-          <p:cNvPr id="6" name="Shape 4"/>
-          <p:cNvSpPr/>
-          <p:nvPr/>
-        </p:nvSpPr>
-        <p:spPr>
-          <a:xfrm>
-            <a:off x="731520" y="4041648"/>
-            <a:ext cx="10698480" cy="1965960"/>
-          </a:xfrm>
-          <a:prstGeom prst="roundRect">
-            <a:avLst>
-              <a:gd name="adj" fmla="val 4651"/>
-            </a:avLst>
-          </a:prstGeom>
-          <a:solidFill>
-            <a:srgbClr val="EDF4F9"/>
-          </a:solidFill>
-          <a:ln w="19050">
-            <a:solidFill>
-              <a:srgbClr val="1E76A6"/>
-            </a:solidFill>
-            <a:prstDash val="solid"/>
-          </a:ln>
-        </p:spPr>
-      </p:sp>
-      <p:sp>
-        <p:nvSpPr>
-          <p:cNvPr id="7" name="Text 5"/>
-          <p:cNvSpPr/>
-          <p:nvPr/>
-        </p:nvSpPr>
-        <p:spPr>
-          <a:xfrm>
-            <a:off x="1005840" y="4224528"/>
-            <a:ext cx="3657600" cy="457200"/>
+              <a:t>CHALLENGE</a:t>
+            </a:r>
+            <a:endParaRPr lang="en-US" sz="1100" dirty="0"/>
+          </a:p>
+        </p:txBody>
+      </p:sp>
+      <p:sp>
+        <p:nvSpPr>
+          <p:cNvPr id="12" name="Text 10"/>
+          <p:cNvSpPr/>
+          <p:nvPr/>
+        </p:nvSpPr>
+        <p:spPr>
+          <a:xfrm>
+            <a:off x="914400" y="1472184"/>
+            <a:ext cx="10362895" cy="640080"/>
           </a:xfrm>
           <a:prstGeom prst="rect">
             <a:avLst/>
@@ -3301,30 +3887,55 @@
               <a:buNone/>
             </a:pPr>
             <a:r>
-              <a:rPr lang="en-US" sz="1900" b="1" dirty="0">
+              <a:rPr lang="en-US" sz="2300" b="1" dirty="0">
                 <a:solidFill>
-                  <a:srgbClr val="1E76A6"/>
+                  <a:srgbClr val="17302C"/>
                 </a:solidFill>
-                <a:latin typeface="Times New Roman" pitchFamily="34" charset="0"/>
-                <a:ea typeface="Times New Roman" pitchFamily="34" charset="-122"/>
-                <a:cs typeface="Times New Roman" pitchFamily="34" charset="-120"/>
+                <a:latin typeface="Century Gothic" pitchFamily="34" charset="0"/>
+                <a:ea typeface="Century Gothic" pitchFamily="34" charset="-122"/>
+                <a:cs typeface="Century Gothic" pitchFamily="34" charset="-120"/>
               </a:rPr>
-              <a:t>Solution</a:t>
-            </a:r>
-            <a:endParaRPr lang="en-US" sz="1900" dirty="0"/>
-          </a:p>
-        </p:txBody>
-      </p:sp>
-      <p:sp>
-        <p:nvSpPr>
-          <p:cNvPr id="8" name="Text 6"/>
-          <p:cNvSpPr/>
-          <p:nvPr/>
-        </p:nvSpPr>
-        <p:spPr>
-          <a:xfrm>
-            <a:off x="1005840" y="4700016"/>
-            <a:ext cx="9966960" cy="1188720"/>
+              <a:t>one routing table, two runtimes</a:t>
+            </a:r>
+            <a:endParaRPr lang="en-US" sz="2300" dirty="0"/>
+          </a:p>
+        </p:txBody>
+      </p:sp>
+      <p:sp>
+        <p:nvSpPr>
+          <p:cNvPr id="13" name="Shape 11"/>
+          <p:cNvSpPr/>
+          <p:nvPr/>
+        </p:nvSpPr>
+        <p:spPr>
+          <a:xfrm>
+            <a:off x="914400" y="2514600"/>
+            <a:ext cx="4952848" cy="3383280"/>
+          </a:xfrm>
+          <a:prstGeom prst="roundRect">
+            <a:avLst/>
+          </a:prstGeom>
+          <a:solidFill>
+            <a:srgbClr val="FFFFFF"/>
+          </a:solidFill>
+          <a:ln w="12700">
+            <a:solidFill>
+              <a:srgbClr val="E4E6E9"/>
+            </a:solidFill>
+            <a:prstDash val="solid"/>
+          </a:ln>
+        </p:spPr>
+      </p:sp>
+      <p:sp>
+        <p:nvSpPr>
+          <p:cNvPr id="14" name="Text 12"/>
+          <p:cNvSpPr/>
+          <p:nvPr/>
+        </p:nvSpPr>
+        <p:spPr>
+          <a:xfrm>
+            <a:off x="1234440" y="2788920"/>
+            <a:ext cx="4312768" cy="320040"/>
           </a:xfrm>
           <a:prstGeom prst="rect">
             <a:avLst/>
@@ -3337,23 +3948,214 @@
           <a:lstStyle/>
           <a:p>
             <a:pPr indent="0" marL="0">
-              <a:lnSpc>
-                <a:spcPct val="105000"/>
-              </a:lnSpc>
               <a:buNone/>
             </a:pPr>
             <a:r>
-              <a:rPr lang="en-US" sz="1300" dirty="0">
+              <a:rPr lang="en-US" sz="1200" b="1" spc="200" kern="0" dirty="0">
                 <a:solidFill>
-                  <a:srgbClr val="102636"/>
+                  <a:srgbClr val="D1584E"/>
                 </a:solidFill>
                 <a:latin typeface="Calibri" pitchFamily="34" charset="0"/>
                 <a:ea typeface="Calibri" pitchFamily="34" charset="-122"/>
                 <a:cs typeface="Calibri" pitchFamily="34" charset="-120"/>
               </a:rPr>
-              <a:t>Open the real page in a real browser and read its network requests — three 404s, visible immediately. Re-upload preserving the exact paths the page asks for, then re-verify by watching the item count climb across live reloads. The same live run also exposed a count-only scan undercount and one-message-per-aggregate sends, both fixed.</a:t>
-            </a:r>
-            <a:endParaRPr lang="en-US" sz="1300" dirty="0"/>
+              <a:t>PROBLEM</a:t>
+            </a:r>
+            <a:endParaRPr lang="en-US" sz="1200" dirty="0"/>
+          </a:p>
+        </p:txBody>
+      </p:sp>
+      <p:sp>
+        <p:nvSpPr>
+          <p:cNvPr id="15" name="Shape 13"/>
+          <p:cNvSpPr/>
+          <p:nvPr/>
+        </p:nvSpPr>
+        <p:spPr>
+          <a:xfrm>
+            <a:off x="1234440" y="3172968"/>
+            <a:ext cx="4312768" cy="0"/>
+          </a:xfrm>
+          <a:prstGeom prst="line">
+            <a:avLst/>
+          </a:prstGeom>
+          <a:noFill/>
+          <a:ln w="19050">
+            <a:solidFill>
+              <a:srgbClr val="D1584E"/>
+            </a:solidFill>
+            <a:prstDash val="solid"/>
+          </a:ln>
+        </p:spPr>
+      </p:sp>
+      <p:sp>
+        <p:nvSpPr>
+          <p:cNvPr id="16" name="Text 14"/>
+          <p:cNvSpPr/>
+          <p:nvPr/>
+        </p:nvSpPr>
+        <p:spPr>
+          <a:xfrm>
+            <a:off x="1234440" y="3337560"/>
+            <a:ext cx="4312768" cy="2377440"/>
+          </a:xfrm>
+          <a:prstGeom prst="rect">
+            <a:avLst/>
+          </a:prstGeom>
+          <a:noFill/>
+          <a:ln/>
+        </p:spPr>
+        <p:txBody>
+          <a:bodyPr wrap="square" lIns="0" tIns="0" rIns="0" bIns="0" rtlCol="0" anchor="t"/>
+          <a:lstStyle/>
+          <a:p>
+            <a:pPr indent="0" marL="0">
+              <a:lnSpc>
+                <a:spcPct val="128000"/>
+              </a:lnSpc>
+              <a:buNone/>
+            </a:pPr>
+            <a:r>
+              <a:rPr lang="en-US" sz="1350" dirty="0">
+                <a:solidFill>
+                  <a:srgbClr val="17302C"/>
+                </a:solidFill>
+                <a:latin typeface="Calibri" pitchFamily="34" charset="0"/>
+                <a:ea typeface="Calibri" pitchFamily="34" charset="-122"/>
+                <a:cs typeface="Calibri" pitchFamily="34" charset="-120"/>
+              </a:rPr>
+              <a:t>The dashboard has to answer the same routes on a developer's laptop and inside a cloud function, and the two must stay identical: any divergence between a local route and its cloud counterpart is a bug that only appears in production, after the local checks have already gone green.</a:t>
+            </a:r>
+            <a:endParaRPr lang="en-US" sz="1350" dirty="0"/>
+          </a:p>
+        </p:txBody>
+      </p:sp>
+      <p:sp>
+        <p:nvSpPr>
+          <p:cNvPr id="17" name="Shape 15"/>
+          <p:cNvSpPr/>
+          <p:nvPr/>
+        </p:nvSpPr>
+        <p:spPr>
+          <a:xfrm>
+            <a:off x="6324448" y="2514600"/>
+            <a:ext cx="4952848" cy="3383280"/>
+          </a:xfrm>
+          <a:prstGeom prst="roundRect">
+            <a:avLst/>
+          </a:prstGeom>
+          <a:solidFill>
+            <a:srgbClr val="FFFFFF"/>
+          </a:solidFill>
+          <a:ln w="12700">
+            <a:solidFill>
+              <a:srgbClr val="E4E6E9"/>
+            </a:solidFill>
+            <a:prstDash val="solid"/>
+          </a:ln>
+        </p:spPr>
+      </p:sp>
+      <p:sp>
+        <p:nvSpPr>
+          <p:cNvPr id="18" name="Text 16"/>
+          <p:cNvSpPr/>
+          <p:nvPr/>
+        </p:nvSpPr>
+        <p:spPr>
+          <a:xfrm>
+            <a:off x="6644488" y="2788920"/>
+            <a:ext cx="4312768" cy="320040"/>
+          </a:xfrm>
+          <a:prstGeom prst="rect">
+            <a:avLst/>
+          </a:prstGeom>
+          <a:noFill/>
+          <a:ln/>
+        </p:spPr>
+        <p:txBody>
+          <a:bodyPr wrap="square" lIns="0" tIns="0" rIns="0" bIns="0" rtlCol="0" anchor="ctr"/>
+          <a:lstStyle/>
+          <a:p>
+            <a:pPr indent="0" marL="0">
+              <a:buNone/>
+            </a:pPr>
+            <a:r>
+              <a:rPr lang="en-US" sz="1200" b="1" spc="200" kern="0" dirty="0">
+                <a:solidFill>
+                  <a:srgbClr val="2F7D5B"/>
+                </a:solidFill>
+                <a:latin typeface="Calibri" pitchFamily="34" charset="0"/>
+                <a:ea typeface="Calibri" pitchFamily="34" charset="-122"/>
+                <a:cs typeface="Calibri" pitchFamily="34" charset="-120"/>
+              </a:rPr>
+              <a:t>SOLUTION</a:t>
+            </a:r>
+            <a:endParaRPr lang="en-US" sz="1200" dirty="0"/>
+          </a:p>
+        </p:txBody>
+      </p:sp>
+      <p:sp>
+        <p:nvSpPr>
+          <p:cNvPr id="19" name="Shape 17"/>
+          <p:cNvSpPr/>
+          <p:nvPr/>
+        </p:nvSpPr>
+        <p:spPr>
+          <a:xfrm>
+            <a:off x="6644488" y="3172968"/>
+            <a:ext cx="4312768" cy="0"/>
+          </a:xfrm>
+          <a:prstGeom prst="line">
+            <a:avLst/>
+          </a:prstGeom>
+          <a:noFill/>
+          <a:ln w="19050">
+            <a:solidFill>
+              <a:srgbClr val="2F7D5B"/>
+            </a:solidFill>
+            <a:prstDash val="solid"/>
+          </a:ln>
+        </p:spPr>
+      </p:sp>
+      <p:sp>
+        <p:nvSpPr>
+          <p:cNvPr id="20" name="Text 18"/>
+          <p:cNvSpPr/>
+          <p:nvPr/>
+        </p:nvSpPr>
+        <p:spPr>
+          <a:xfrm>
+            <a:off x="6644488" y="3337560"/>
+            <a:ext cx="4312768" cy="2377440"/>
+          </a:xfrm>
+          <a:prstGeom prst="rect">
+            <a:avLst/>
+          </a:prstGeom>
+          <a:noFill/>
+          <a:ln/>
+        </p:spPr>
+        <p:txBody>
+          <a:bodyPr wrap="square" lIns="0" tIns="0" rIns="0" bIns="0" rtlCol="0" anchor="t"/>
+          <a:lstStyle/>
+          <a:p>
+            <a:pPr indent="0" marL="0">
+              <a:lnSpc>
+                <a:spcPct val="128000"/>
+              </a:lnSpc>
+              <a:buNone/>
+            </a:pPr>
+            <a:r>
+              <a:rPr lang="en-US" sz="1350" dirty="0">
+                <a:solidFill>
+                  <a:srgbClr val="17302C"/>
+                </a:solidFill>
+                <a:latin typeface="Calibri" pitchFamily="34" charset="0"/>
+                <a:ea typeface="Calibri" pitchFamily="34" charset="-122"/>
+                <a:cs typeface="Calibri" pitchFamily="34" charset="-120"/>
+              </a:rPr>
+              <a:t>Routing is a single flat dispatch table pairing each path with its handler, and both the local server and the function driver read that one table, so adding or changing an endpoint is one edit that both runtimes inherit. The routes cannot drift, and a real-browser check confirmed the live deployment matched the local server exactly.</a:t>
+            </a:r>
+            <a:endParaRPr lang="en-US" sz="1350" dirty="0"/>
           </a:p>
         </p:txBody>
       </p:sp>
